--- a/guide/guide-choix-de-garde.pptx
+++ b/guide/guide-choix-de-garde.pptx
@@ -17,6 +17,7 @@
     <p:sldId id="265" r:id="rId16"/>
     <p:sldId id="266" r:id="rId17"/>
     <p:sldId id="267" r:id="rId18"/>
+    <p:sldId id="268" r:id="rId19"/>
   </p:sldIdLst>
   <p:sldSz cx="12191695" cy="6858000" type="screen4x3"/>
   <p:notesSz cx="6858000" cy="9144000"/>
@@ -3444,7 +3445,7 @@
                   <a:srgbClr val="0F172A"/>
                 </a:solidFill>
               </a:rPr>
-              <a:t>Quand c'est à son tour de choisir</a:t>
+              <a:t>Quand c'est une autre personne qui choisit</a:t>
             </a:r>
           </a:p>
         </p:txBody>
@@ -3457,8 +3458,8 @@
         </p:nvSpPr>
         <p:spPr>
           <a:xfrm>
-            <a:off x="640080" y="2011680"/>
-            <a:ext cx="6309360" cy="4572000"/>
+            <a:off x="640080" y="1920240"/>
+            <a:ext cx="6126480" cy="914400"/>
           </a:xfrm>
           <a:prstGeom prst="rect">
             <a:avLst/>
@@ -3473,43 +3474,124 @@
           <a:p>
             <a:pPr algn="l">
               <a:lnSpc>
+                <a:spcPct val="135000"/>
+              </a:lnSpc>
+              <a:spcAft>
+                <a:spcPts val="800"/>
+              </a:spcAft>
+            </a:pPr>
+            <a:r>
+              <a:rPr sz="1700" b="0">
+                <a:solidFill>
+                  <a:srgbClr val="64748B"/>
+                </a:solidFill>
+              </a:rPr>
+              <a:t>L'onglet </a:t>
+            </a:r>
+            <a:r>
+              <a:rPr sz="1700" b="1">
+                <a:solidFill>
+                  <a:srgbClr val="64748B"/>
+                </a:solidFill>
+              </a:rPr>
+              <a:t>Planning</a:t>
+            </a:r>
+            <a:r>
+              <a:rPr sz="1700" b="0">
+                <a:solidFill>
+                  <a:srgbClr val="64748B"/>
+                </a:solidFill>
+              </a:rPr>
+              <a:t> est affiché </a:t>
+            </a:r>
+            <a:r>
+              <a:rPr sz="1700" b="1">
+                <a:solidFill>
+                  <a:srgbClr val="64748B"/>
+                </a:solidFill>
+              </a:rPr>
+              <a:t>du point de vue de la personne dont c'est le tour</a:t>
+            </a:r>
+            <a:r>
+              <a:rPr sz="1700" b="0">
+                <a:solidFill>
+                  <a:srgbClr val="64748B"/>
+                </a:solidFill>
+              </a:rPr>
+              <a:t>, pour l'aider à choisir.</a:t>
+            </a:r>
+          </a:p>
+        </p:txBody>
+      </p:sp>
+      <p:sp>
+        <p:nvSpPr>
+          <p:cNvPr id="5" name="TextBox 4"/>
+          <p:cNvSpPr txBox="1"/>
+          <p:nvPr/>
+        </p:nvSpPr>
+        <p:spPr>
+          <a:xfrm>
+            <a:off x="640080" y="2880360"/>
+            <a:ext cx="6309360" cy="4572000"/>
+          </a:xfrm>
+          <a:prstGeom prst="rect">
+            <a:avLst/>
+          </a:prstGeom>
+          <a:noFill/>
+        </p:spPr>
+        <p:txBody>
+          <a:bodyPr wrap="square" anchor="t">
+            <a:spAutoFit/>
+          </a:bodyPr>
+          <a:lstStyle/>
+          <a:p>
+            <a:pPr algn="l">
+              <a:lnSpc>
                 <a:spcPct val="125000"/>
               </a:lnSpc>
               <a:spcAft>
-                <a:spcPts val="1200"/>
-              </a:spcAft>
-            </a:pPr>
-            <a:r>
-              <a:rPr sz="1700">
-                <a:solidFill>
-                  <a:srgbClr val="0F172A"/>
-                </a:solidFill>
-              </a:rPr>
-              <a:t>🔔  </a:t>
-            </a:r>
-            <a:r>
-              <a:rPr sz="1700" b="0">
-                <a:solidFill>
-                  <a:srgbClr val="0F172A"/>
-                </a:solidFill>
-              </a:rPr>
-              <a:t>Une </a:t>
-            </a:r>
-            <a:r>
-              <a:rPr sz="1700" b="1">
-                <a:solidFill>
-                  <a:srgbClr val="0F172A"/>
-                </a:solidFill>
-              </a:rPr>
-              <a:t>notification</a:t>
-            </a:r>
-            <a:r>
-              <a:rPr sz="1700" b="0">
-                <a:solidFill>
-                  <a:srgbClr val="0F172A"/>
-                </a:solidFill>
-              </a:rPr>
-              <a:t> « C'est à toi de choisir ! » apparaît, quel que soit l'onglet.</a:t>
+                <a:spcPts val="800"/>
+              </a:spcAft>
+            </a:pPr>
+            <a:r>
+              <a:rPr sz="1500">
+                <a:solidFill>
+                  <a:srgbClr val="0F172A"/>
+                </a:solidFill>
+              </a:rPr>
+              <a:t>🟩  </a:t>
+            </a:r>
+            <a:r>
+              <a:rPr sz="1500" b="1">
+                <a:solidFill>
+                  <a:srgbClr val="0F172A"/>
+                </a:solidFill>
+              </a:rPr>
+              <a:t>Vert</a:t>
+            </a:r>
+            <a:r>
+              <a:rPr sz="1500" b="0">
+                <a:solidFill>
+                  <a:srgbClr val="0F172A"/>
+                </a:solidFill>
+              </a:rPr>
+              <a:t> = les gardes de la </a:t>
+            </a:r>
+            <a:r>
+              <a:rPr sz="1500" b="1">
+                <a:solidFill>
+                  <a:srgbClr val="0F172A"/>
+                </a:solidFill>
+              </a:rPr>
+              <a:t>personne en train de choisir</a:t>
+            </a:r>
+            <a:r>
+              <a:rPr sz="1500" b="0">
+                <a:solidFill>
+                  <a:srgbClr val="0F172A"/>
+                </a:solidFill>
+              </a:rPr>
+              <a:t> — pas les siennes.</a:t>
             </a:r>
           </a:p>
           <a:p>
@@ -3518,56 +3600,48 @@
                 <a:spcPct val="125000"/>
               </a:lnSpc>
               <a:spcAft>
-                <a:spcPts val="1200"/>
-              </a:spcAft>
-            </a:pPr>
-            <a:r>
-              <a:rPr sz="1700">
-                <a:solidFill>
-                  <a:srgbClr val="0F172A"/>
-                </a:solidFill>
-              </a:rPr>
-              <a:t>💙  </a:t>
-            </a:r>
-            <a:r>
-              <a:rPr sz="1700" b="0">
-                <a:solidFill>
-                  <a:srgbClr val="0F172A"/>
-                </a:solidFill>
-              </a:rPr>
-              <a:t>Sur le planning, les </a:t>
-            </a:r>
-            <a:r>
-              <a:rPr sz="1700" b="1">
-                <a:solidFill>
-                  <a:srgbClr val="0F172A"/>
-                </a:solidFill>
-              </a:rPr>
-              <a:t>vœux</a:t>
-            </a:r>
-            <a:r>
-              <a:rPr sz="1700" b="0">
-                <a:solidFill>
-                  <a:srgbClr val="0F172A"/>
-                </a:solidFill>
-              </a:rPr>
-              <a:t> (bleu) et les </a:t>
-            </a:r>
-            <a:r>
-              <a:rPr sz="1700" b="1">
-                <a:solidFill>
-                  <a:srgbClr val="0F172A"/>
-                </a:solidFill>
-              </a:rPr>
-              <a:t>indispos</a:t>
-            </a:r>
-            <a:r>
-              <a:rPr sz="1700" b="0">
-                <a:solidFill>
-                  <a:srgbClr val="0F172A"/>
-                </a:solidFill>
-              </a:rPr>
-              <a:t> (rouge 🚫) du médecin s'affichent pour repérer les bons jours.</a:t>
+                <a:spcPts val="800"/>
+              </a:spcAft>
+            </a:pPr>
+            <a:r>
+              <a:rPr sz="1500">
+                <a:solidFill>
+                  <a:srgbClr val="0F172A"/>
+                </a:solidFill>
+              </a:rPr>
+              <a:t>⬜  </a:t>
+            </a:r>
+            <a:r>
+              <a:rPr sz="1500" b="1">
+                <a:solidFill>
+                  <a:srgbClr val="0F172A"/>
+                </a:solidFill>
+              </a:rPr>
+              <a:t>Gris foncé</a:t>
+            </a:r>
+            <a:r>
+              <a:rPr sz="1500" b="0">
+                <a:solidFill>
+                  <a:srgbClr val="0F172A"/>
+                </a:solidFill>
+              </a:rPr>
+              <a:t> = jour </a:t>
+            </a:r>
+            <a:r>
+              <a:rPr sz="1500" b="1">
+                <a:solidFill>
+                  <a:srgbClr val="0F172A"/>
+                </a:solidFill>
+              </a:rPr>
+              <a:t>complet</a:t>
+            </a:r>
+            <a:r>
+              <a:rPr sz="1500" b="0">
+                <a:solidFill>
+                  <a:srgbClr val="0F172A"/>
+                </a:solidFill>
+              </a:rPr>
+              <a:t> (deux sites pris).</a:t>
             </a:r>
           </a:p>
           <a:p>
@@ -3576,11 +3650,11 @@
                 <a:spcPct val="125000"/>
               </a:lnSpc>
               <a:spcAft>
-                <a:spcPts val="1200"/>
-              </a:spcAft>
-            </a:pPr>
-            <a:r>
-              <a:rPr sz="1700">
+                <a:spcPts val="800"/>
+              </a:spcAft>
+            </a:pPr>
+            <a:r>
+              <a:rPr sz="1500">
                 <a:solidFill>
                   <a:srgbClr val="0F172A"/>
                 </a:solidFill>
@@ -3588,28 +3662,36 @@
               <a:t>🔵  </a:t>
             </a:r>
             <a:r>
-              <a:rPr sz="1700" b="0">
-                <a:solidFill>
-                  <a:srgbClr val="0F172A"/>
-                </a:solidFill>
-              </a:rPr>
-              <a:t>Les </a:t>
-            </a:r>
-            <a:r>
-              <a:rPr sz="1700" b="1">
-                <a:solidFill>
-                  <a:srgbClr val="0F172A"/>
-                </a:solidFill>
-              </a:rPr>
-              <a:t>dates choisissables</a:t>
-            </a:r>
-            <a:r>
-              <a:rPr sz="1700" b="0">
-                <a:solidFill>
-                  <a:srgbClr val="0F172A"/>
-                </a:solidFill>
-              </a:rPr>
-              <a:t> ressortent en liseré bleu.</a:t>
+              <a:rPr sz="1500" b="1">
+                <a:solidFill>
+                  <a:srgbClr val="0F172A"/>
+                </a:solidFill>
+              </a:rPr>
+              <a:t>Liseré bleu</a:t>
+            </a:r>
+            <a:r>
+              <a:rPr sz="1500" b="0">
+                <a:solidFill>
+                  <a:srgbClr val="0F172A"/>
+                </a:solidFill>
+              </a:rPr>
+              <a:t> = date encore </a:t>
+            </a:r>
+            <a:r>
+              <a:rPr sz="1500" b="1">
+                <a:solidFill>
+                  <a:srgbClr val="0F172A"/>
+                </a:solidFill>
+              </a:rPr>
+              <a:t>choisissable</a:t>
+            </a:r>
+            <a:r>
+              <a:rPr sz="1500" b="0">
+                <a:solidFill>
+                  <a:srgbClr val="0F172A"/>
+                </a:solidFill>
+              </a:rPr>
+              <a:t> par cette personne.</a:t>
             </a:r>
           </a:p>
           <a:p>
@@ -3618,60 +3700,234 @@
                 <a:spcPct val="125000"/>
               </a:lnSpc>
               <a:spcAft>
-                <a:spcPts val="1200"/>
-              </a:spcAft>
-            </a:pPr>
-            <a:r>
-              <a:rPr sz="1700">
-                <a:solidFill>
-                  <a:srgbClr val="0F172A"/>
-                </a:solidFill>
-              </a:rPr>
-              <a:t>🧑‍⚕️  </a:t>
-            </a:r>
-            <a:r>
-              <a:rPr sz="1700" b="0">
-                <a:solidFill>
-                  <a:srgbClr val="0F172A"/>
-                </a:solidFill>
-              </a:rPr>
-              <a:t>👉 </a:t>
-            </a:r>
-            <a:r>
-              <a:rPr sz="1700" b="1">
-                <a:solidFill>
-                  <a:srgbClr val="0F172A"/>
-                </a:solidFill>
-              </a:rPr>
-              <a:t>C'est l'admin qui pose la garde</a:t>
-            </a:r>
-            <a:r>
-              <a:rPr sz="1700" b="0">
-                <a:solidFill>
-                  <a:srgbClr val="0F172A"/>
-                </a:solidFill>
-              </a:rPr>
-              <a:t> — il suffit de lui communiquer le choix.</a:t>
-            </a:r>
-          </a:p>
-        </p:txBody>
-      </p:sp>
-      <p:sp>
-        <p:nvSpPr>
-          <p:cNvPr id="5" name="Rounded Rectangle 4"/>
+                <a:spcPts val="800"/>
+              </a:spcAft>
+            </a:pPr>
+            <a:r>
+              <a:rPr sz="1500">
+                <a:solidFill>
+                  <a:srgbClr val="0F172A"/>
+                </a:solidFill>
+              </a:rPr>
+              <a:t>🙈  </a:t>
+            </a:r>
+            <a:r>
+              <a:rPr sz="1500" b="0">
+                <a:solidFill>
+                  <a:srgbClr val="0F172A"/>
+                </a:solidFill>
+              </a:rPr>
+              <a:t>Les vœux / indispos ne sont visibles que par la personne concernée.</a:t>
+            </a:r>
+          </a:p>
+        </p:txBody>
+      </p:sp>
+      <p:sp>
+        <p:nvSpPr>
+          <p:cNvPr id="6" name="Rounded Rectangle 5"/>
           <p:cNvSpPr/>
           <p:nvPr/>
         </p:nvSpPr>
         <p:spPr>
           <a:xfrm>
-            <a:off x="7772400" y="2377440"/>
-            <a:ext cx="3474720" cy="2377440"/>
+            <a:off x="640080" y="5257800"/>
+            <a:ext cx="6309360" cy="914400"/>
           </a:xfrm>
           <a:prstGeom prst="roundRect">
             <a:avLst/>
           </a:prstGeom>
           <a:solidFill>
-            <a:srgbClr val="FFFFFF"/>
+            <a:srgbClr val="F0FDF4"/>
+          </a:solidFill>
+          <a:ln w="12700">
+            <a:solidFill>
+              <a:srgbClr val="BBF7D0"/>
+            </a:solidFill>
+          </a:ln>
+          <a:effectLst/>
+        </p:spPr>
+        <p:style>
+          <a:lnRef idx="1">
+            <a:schemeClr val="accent1"/>
+          </a:lnRef>
+          <a:fillRef idx="3">
+            <a:schemeClr val="accent1"/>
+          </a:fillRef>
+          <a:effectRef idx="2">
+            <a:schemeClr val="accent1"/>
+          </a:effectRef>
+          <a:fontRef idx="minor">
+            <a:schemeClr val="lt1"/>
+          </a:fontRef>
+        </p:style>
+        <p:txBody>
+          <a:bodyPr rtlCol="0" anchor="ctr" wrap="square" lIns="182880" rIns="182880"/>
+          <a:lstStyle/>
+          <a:p>
+            <a:pPr algn="l">
+              <a:lnSpc>
+                <a:spcPct val="125000"/>
+              </a:lnSpc>
+              <a:spcAft>
+                <a:spcPts val="0"/>
+              </a:spcAft>
+            </a:pPr>
+            <a:r>
+              <a:rPr sz="1400" b="0">
+                <a:solidFill>
+                  <a:srgbClr val="166534"/>
+                </a:solidFill>
+              </a:rPr>
+              <a:t>💡 Pour suivre </a:t>
+            </a:r>
+            <a:r>
+              <a:rPr sz="1400" b="1">
+                <a:solidFill>
+                  <a:srgbClr val="166534"/>
+                </a:solidFill>
+              </a:rPr>
+              <a:t>ses propres gardes</a:t>
+            </a:r>
+            <a:r>
+              <a:rPr sz="1400" b="0">
+                <a:solidFill>
+                  <a:srgbClr val="166534"/>
+                </a:solidFill>
+              </a:rPr>
+              <a:t>, ouvrir l'onglet </a:t>
+            </a:r>
+            <a:r>
+              <a:rPr sz="1400" b="1">
+                <a:solidFill>
+                  <a:srgbClr val="166534"/>
+                </a:solidFill>
+              </a:rPr>
+              <a:t>Perso</a:t>
+            </a:r>
+            <a:r>
+              <a:rPr sz="1400" b="0">
+                <a:solidFill>
+                  <a:srgbClr val="166534"/>
+                </a:solidFill>
+              </a:rPr>
+              <a:t> : le calendrier y reste centré sur soi.</a:t>
+            </a:r>
+          </a:p>
+        </p:txBody>
+      </p:sp>
+      <p:sp>
+        <p:nvSpPr>
+          <p:cNvPr id="7" name="Rounded Rectangle 6"/>
+          <p:cNvSpPr/>
+          <p:nvPr/>
+        </p:nvSpPr>
+        <p:spPr>
+          <a:xfrm>
+            <a:off x="7498079" y="2377440"/>
+            <a:ext cx="914400" cy="1051560"/>
+          </a:xfrm>
+          <a:prstGeom prst="roundRect">
+            <a:avLst/>
+          </a:prstGeom>
+          <a:solidFill>
+            <a:srgbClr val="DCFCE7"/>
+          </a:solidFill>
+          <a:ln w="25400">
+            <a:solidFill>
+              <a:srgbClr val="16A34A"/>
+            </a:solidFill>
+          </a:ln>
+          <a:effectLst/>
+        </p:spPr>
+        <p:style>
+          <a:lnRef idx="1">
+            <a:schemeClr val="accent1"/>
+          </a:lnRef>
+          <a:fillRef idx="3">
+            <a:schemeClr val="accent1"/>
+          </a:fillRef>
+          <a:effectRef idx="2">
+            <a:schemeClr val="accent1"/>
+          </a:effectRef>
+          <a:fontRef idx="minor">
+            <a:schemeClr val="lt1"/>
+          </a:fontRef>
+        </p:style>
+        <p:txBody>
+          <a:bodyPr rtlCol="0" anchor="ctr" wrap="none" lIns="45720" rIns="45720" tIns="36576" bIns="18288"/>
+          <a:lstStyle/>
+          <a:p>
+            <a:pPr algn="ctr">
+              <a:lnSpc>
+                <a:spcPct val="120000"/>
+              </a:lnSpc>
+              <a:spcAft>
+                <a:spcPts val="200"/>
+              </a:spcAft>
+            </a:pPr>
+            <a:r>
+              <a:rPr sz="1500" b="1">
+                <a:solidFill>
+                  <a:srgbClr val="0F172A"/>
+                </a:solidFill>
+              </a:rPr>
+              <a:t>3</a:t>
+            </a:r>
+          </a:p>
+          <a:p>
+            <a:pPr algn="l">
+              <a:lnSpc>
+                <a:spcPct val="120000"/>
+              </a:lnSpc>
+              <a:spcAft>
+                <a:spcPts val="100"/>
+              </a:spcAft>
+            </a:pPr>
+            <a:r>
+              <a:rPr sz="1100" b="1">
+                <a:solidFill>
+                  <a:srgbClr val="166534"/>
+                </a:solidFill>
+              </a:rPr>
+              <a:t>HMN</a:t>
+            </a:r>
+          </a:p>
+          <a:p>
+            <a:pPr algn="l">
+              <a:lnSpc>
+                <a:spcPct val="120000"/>
+              </a:lnSpc>
+              <a:spcAft>
+                <a:spcPts val="0"/>
+              </a:spcAft>
+            </a:pPr>
+            <a:r>
+              <a:rPr sz="1100" b="0">
+                <a:solidFill>
+                  <a:srgbClr val="64748B"/>
+                </a:solidFill>
+              </a:rPr>
+              <a:t>ACH</a:t>
+            </a:r>
+          </a:p>
+        </p:txBody>
+      </p:sp>
+      <p:sp>
+        <p:nvSpPr>
+          <p:cNvPr id="8" name="Rounded Rectangle 7"/>
+          <p:cNvSpPr/>
+          <p:nvPr/>
+        </p:nvSpPr>
+        <p:spPr>
+          <a:xfrm>
+            <a:off x="8458200" y="2377440"/>
+            <a:ext cx="914400" cy="1051560"/>
+          </a:xfrm>
+          <a:prstGeom prst="roundRect">
+            <a:avLst/>
+          </a:prstGeom>
+          <a:solidFill>
+            <a:srgbClr val="DDE3EB"/>
           </a:solidFill>
           <a:ln w="12700">
             <a:solidFill>
@@ -3695,33 +3951,7 @@
           </a:fontRef>
         </p:style>
         <p:txBody>
-          <a:bodyPr rtlCol="0" anchor="ctr"/>
-          <a:lstStyle/>
-          <a:p>
-            <a:pPr algn="ctr"/>
-          </a:p>
-        </p:txBody>
-      </p:sp>
-      <p:sp>
-        <p:nvSpPr>
-          <p:cNvPr id="6" name="TextBox 5"/>
-          <p:cNvSpPr txBox="1"/>
-          <p:nvPr/>
-        </p:nvSpPr>
-        <p:spPr>
-          <a:xfrm>
-            <a:off x="7772400" y="2514600"/>
-            <a:ext cx="3474720" cy="548640"/>
-          </a:xfrm>
-          <a:prstGeom prst="rect">
-            <a:avLst/>
-          </a:prstGeom>
-          <a:noFill/>
-        </p:spPr>
-        <p:txBody>
-          <a:bodyPr wrap="square" anchor="t">
-            <a:spAutoFit/>
-          </a:bodyPr>
+          <a:bodyPr rtlCol="0" anchor="ctr" wrap="none" lIns="45720" rIns="45720" tIns="36576" bIns="18288"/>
           <a:lstStyle/>
           <a:p>
             <a:pPr algn="ctr">
@@ -3729,98 +3959,52 @@
                 <a:spcPct val="120000"/>
               </a:lnSpc>
               <a:spcAft>
+                <a:spcPts val="200"/>
+              </a:spcAft>
+            </a:pPr>
+            <a:r>
+              <a:rPr sz="1500" b="1">
+                <a:solidFill>
+                  <a:srgbClr val="0F172A"/>
+                </a:solidFill>
+              </a:rPr>
+              <a:t>4</a:t>
+            </a:r>
+          </a:p>
+          <a:p>
+            <a:pPr algn="l">
+              <a:lnSpc>
+                <a:spcPct val="120000"/>
+              </a:lnSpc>
+              <a:spcAft>
+                <a:spcPts val="100"/>
+              </a:spcAft>
+            </a:pPr>
+            <a:r>
+              <a:rPr sz="1100" b="1">
+                <a:solidFill>
+                  <a:srgbClr val="475569"/>
+                </a:solidFill>
+              </a:rPr>
+              <a:t>HMN</a:t>
+            </a:r>
+          </a:p>
+          <a:p>
+            <a:pPr algn="l">
+              <a:lnSpc>
+                <a:spcPct val="120000"/>
+              </a:lnSpc>
+              <a:spcAft>
                 <a:spcPts val="0"/>
               </a:spcAft>
             </a:pPr>
             <a:r>
-              <a:rPr sz="3400" b="0">
-                <a:solidFill>
-                  <a:srgbClr val="0F172A"/>
-                </a:solidFill>
-              </a:rPr>
-              <a:t>🔔</a:t>
-            </a:r>
-          </a:p>
-        </p:txBody>
-      </p:sp>
-      <p:sp>
-        <p:nvSpPr>
-          <p:cNvPr id="7" name="TextBox 6"/>
-          <p:cNvSpPr txBox="1"/>
-          <p:nvPr/>
-        </p:nvSpPr>
-        <p:spPr>
-          <a:xfrm>
-            <a:off x="7772400" y="3200400"/>
-            <a:ext cx="3474720" cy="457200"/>
-          </a:xfrm>
-          <a:prstGeom prst="rect">
-            <a:avLst/>
-          </a:prstGeom>
-          <a:noFill/>
-        </p:spPr>
-        <p:txBody>
-          <a:bodyPr wrap="square" anchor="t">
-            <a:spAutoFit/>
-          </a:bodyPr>
-          <a:lstStyle/>
-          <a:p>
-            <a:pPr algn="ctr">
-              <a:lnSpc>
-                <a:spcPct val="120000"/>
-              </a:lnSpc>
-              <a:spcAft>
-                <a:spcPts val="0"/>
-              </a:spcAft>
-            </a:pPr>
-            <a:r>
-              <a:rPr sz="1800" b="1">
-                <a:solidFill>
-                  <a:srgbClr val="0F172A"/>
-                </a:solidFill>
-              </a:rPr>
-              <a:t>C'est à toi de choisir !</a:t>
-            </a:r>
-          </a:p>
-        </p:txBody>
-      </p:sp>
-      <p:sp>
-        <p:nvSpPr>
-          <p:cNvPr id="8" name="TextBox 7"/>
-          <p:cNvSpPr txBox="1"/>
-          <p:nvPr/>
-        </p:nvSpPr>
-        <p:spPr>
-          <a:xfrm>
-            <a:off x="7772400" y="3657600"/>
-            <a:ext cx="3474720" cy="457200"/>
-          </a:xfrm>
-          <a:prstGeom prst="rect">
-            <a:avLst/>
-          </a:prstGeom>
-          <a:noFill/>
-        </p:spPr>
-        <p:txBody>
-          <a:bodyPr wrap="square" anchor="t">
-            <a:spAutoFit/>
-          </a:bodyPr>
-          <a:lstStyle/>
-          <a:p>
-            <a:pPr algn="ctr">
-              <a:lnSpc>
-                <a:spcPct val="120000"/>
-              </a:lnSpc>
-              <a:spcAft>
-                <a:spcPts val="0"/>
-              </a:spcAft>
-            </a:pPr>
-            <a:r>
-              <a:rPr sz="1300" b="0">
-                <a:solidFill>
-                  <a:srgbClr val="64748B"/>
-                </a:solidFill>
-              </a:rPr>
-              <a:t>Tour 2 — à choisir : 1 semaine, 1 WE/férié.</a:t>
+              <a:rPr sz="1100" b="1">
+                <a:solidFill>
+                  <a:srgbClr val="475569"/>
+                </a:solidFill>
+              </a:rPr>
+              <a:t>ACH</a:t>
             </a:r>
           </a:p>
         </p:txBody>
@@ -3833,17 +4017,19 @@
         </p:nvSpPr>
         <p:spPr>
           <a:xfrm>
-            <a:off x="8138160" y="4206240"/>
-            <a:ext cx="1371600" cy="411480"/>
+            <a:off x="9418319" y="2377440"/>
+            <a:ext cx="914400" cy="1051560"/>
           </a:xfrm>
           <a:prstGeom prst="roundRect">
             <a:avLst/>
           </a:prstGeom>
           <a:solidFill>
-            <a:srgbClr val="2563EB"/>
+            <a:srgbClr val="EFF6FF"/>
           </a:solidFill>
-          <a:ln>
-            <a:noFill/>
+          <a:ln w="25400">
+            <a:solidFill>
+              <a:srgbClr val="2563EB"/>
+            </a:solidFill>
           </a:ln>
           <a:effectLst/>
         </p:spPr>
@@ -3862,7 +4048,7 @@
           </a:fontRef>
         </p:style>
         <p:txBody>
-          <a:bodyPr rtlCol="0" anchor="ctr"/>
+          <a:bodyPr rtlCol="0" anchor="ctr" wrap="none" lIns="45720" rIns="45720" tIns="36576" bIns="18288"/>
           <a:lstStyle/>
           <a:p>
             <a:pPr algn="ctr">
@@ -3870,16 +4056,52 @@
                 <a:spcPct val="120000"/>
               </a:lnSpc>
               <a:spcAft>
+                <a:spcPts val="200"/>
+              </a:spcAft>
+            </a:pPr>
+            <a:r>
+              <a:rPr sz="1500" b="1">
+                <a:solidFill>
+                  <a:srgbClr val="0F172A"/>
+                </a:solidFill>
+              </a:rPr>
+              <a:t>5</a:t>
+            </a:r>
+          </a:p>
+          <a:p>
+            <a:pPr algn="l">
+              <a:lnSpc>
+                <a:spcPct val="120000"/>
+              </a:lnSpc>
+              <a:spcAft>
+                <a:spcPts val="100"/>
+              </a:spcAft>
+            </a:pPr>
+            <a:r>
+              <a:rPr sz="1100" b="1">
+                <a:solidFill>
+                  <a:srgbClr val="1D4ED8"/>
+                </a:solidFill>
+              </a:rPr>
+              <a:t>HMN</a:t>
+            </a:r>
+          </a:p>
+          <a:p>
+            <a:pPr algn="l">
+              <a:lnSpc>
+                <a:spcPct val="120000"/>
+              </a:lnSpc>
+              <a:spcAft>
                 <a:spcPts val="0"/>
               </a:spcAft>
             </a:pPr>
             <a:r>
               <a:rPr sz="1100" b="1">
                 <a:solidFill>
-                  <a:srgbClr val="FFFFFF"/>
-                </a:solidFill>
-              </a:rPr>
-              <a:t>Voir le planning</a:t>
+                  <a:srgbClr val="1D4ED8"/>
+                </a:solidFill>
+              </a:rPr>
+              <a:t>ACH</a:t>
             </a:r>
           </a:p>
         </p:txBody>
@@ -3892,18 +4114,18 @@
         </p:nvSpPr>
         <p:spPr>
           <a:xfrm>
-            <a:off x="9601200" y="4206240"/>
-            <a:ext cx="914400" cy="411480"/>
+            <a:off x="10378440" y="2377440"/>
+            <a:ext cx="914400" cy="1051560"/>
           </a:xfrm>
           <a:prstGeom prst="roundRect">
             <a:avLst/>
           </a:prstGeom>
           <a:solidFill>
-            <a:srgbClr val="FFFFFF"/>
+            <a:srgbClr val="F8FAFC"/>
           </a:solidFill>
           <a:ln w="12700">
             <a:solidFill>
-              <a:srgbClr val="CBD5E1"/>
+              <a:srgbClr val="E2E8F0"/>
             </a:solidFill>
           </a:ln>
           <a:effectLst/>
@@ -3923,7 +4145,7 @@
           </a:fontRef>
         </p:style>
         <p:txBody>
-          <a:bodyPr rtlCol="0" anchor="ctr"/>
+          <a:bodyPr rtlCol="0" anchor="ctr" wrap="none" lIns="45720" rIns="45720" tIns="36576" bIns="18288"/>
           <a:lstStyle/>
           <a:p>
             <a:pPr algn="ctr">
@@ -3931,16 +4153,93 @@
                 <a:spcPct val="120000"/>
               </a:lnSpc>
               <a:spcAft>
+                <a:spcPts val="200"/>
+              </a:spcAft>
+            </a:pPr>
+            <a:r>
+              <a:rPr sz="1500" b="1">
+                <a:solidFill>
+                  <a:srgbClr val="0F172A"/>
+                </a:solidFill>
+              </a:rPr>
+              <a:t>6</a:t>
+            </a:r>
+          </a:p>
+          <a:p>
+            <a:pPr algn="l">
+              <a:lnSpc>
+                <a:spcPct val="120000"/>
+              </a:lnSpc>
+              <a:spcAft>
+                <a:spcPts val="100"/>
+              </a:spcAft>
+            </a:pPr>
+            <a:r>
+              <a:rPr sz="1100" b="0">
+                <a:solidFill>
+                  <a:srgbClr val="64748B"/>
+                </a:solidFill>
+              </a:rPr>
+              <a:t>HMN</a:t>
+            </a:r>
+          </a:p>
+          <a:p>
+            <a:pPr algn="l">
+              <a:lnSpc>
+                <a:spcPct val="120000"/>
+              </a:lnSpc>
+              <a:spcAft>
                 <a:spcPts val="0"/>
               </a:spcAft>
             </a:pPr>
             <a:r>
-              <a:rPr sz="1100" b="1">
-                <a:solidFill>
-                  <a:srgbClr val="0F172A"/>
-                </a:solidFill>
-              </a:rPr>
-              <a:t>OK</a:t>
+              <a:rPr sz="1100" b="0">
+                <a:solidFill>
+                  <a:srgbClr val="64748B"/>
+                </a:solidFill>
+              </a:rPr>
+              <a:t>ACH</a:t>
+            </a:r>
+          </a:p>
+        </p:txBody>
+      </p:sp>
+      <p:sp>
+        <p:nvSpPr>
+          <p:cNvPr id="11" name="TextBox 10"/>
+          <p:cNvSpPr txBox="1"/>
+          <p:nvPr/>
+        </p:nvSpPr>
+        <p:spPr>
+          <a:xfrm>
+            <a:off x="7315199" y="3566160"/>
+            <a:ext cx="4114800" cy="822960"/>
+          </a:xfrm>
+          <a:prstGeom prst="rect">
+            <a:avLst/>
+          </a:prstGeom>
+          <a:noFill/>
+        </p:spPr>
+        <p:txBody>
+          <a:bodyPr wrap="square" anchor="t">
+            <a:spAutoFit/>
+          </a:bodyPr>
+          <a:lstStyle/>
+          <a:p>
+            <a:pPr algn="ctr">
+              <a:lnSpc>
+                <a:spcPct val="130000"/>
+              </a:lnSpc>
+              <a:spcAft>
+                <a:spcPts val="0"/>
+              </a:spcAft>
+            </a:pPr>
+            <a:r>
+              <a:rPr sz="1200" b="0">
+                <a:solidFill>
+                  <a:srgbClr val="64748B"/>
+                </a:solidFill>
+              </a:rPr>
+              <a:t>Vert = garde de la personne qui choisit · jour complet · date choisissable · jour libre</a:t>
             </a:r>
           </a:p>
         </p:txBody>
@@ -3999,7 +4298,7 @@
                   <a:srgbClr val="2563EB"/>
                 </a:solidFill>
               </a:rPr>
-              <a:t>AIDE-MÉMOIRE</a:t>
+              <a:t>AFFICHAGE</a:t>
             </a:r>
           </a:p>
         </p:txBody>
@@ -4040,31 +4339,262 @@
                   <a:srgbClr val="0F172A"/>
                 </a:solidFill>
               </a:rPr>
-              <a:t>La légende des couleurs</a:t>
-            </a:r>
-          </a:p>
-        </p:txBody>
-      </p:sp>
-      <p:sp>
-        <p:nvSpPr>
-          <p:cNvPr id="4" name="Rounded Rectangle 3"/>
+              <a:t>Quand c'est à son tour de choisir</a:t>
+            </a:r>
+          </a:p>
+        </p:txBody>
+      </p:sp>
+      <p:sp>
+        <p:nvSpPr>
+          <p:cNvPr id="4" name="TextBox 3"/>
+          <p:cNvSpPr txBox="1"/>
+          <p:nvPr/>
+        </p:nvSpPr>
+        <p:spPr>
+          <a:xfrm>
+            <a:off x="640080" y="1965960"/>
+            <a:ext cx="6400800" cy="4572000"/>
+          </a:xfrm>
+          <a:prstGeom prst="rect">
+            <a:avLst/>
+          </a:prstGeom>
+          <a:noFill/>
+        </p:spPr>
+        <p:txBody>
+          <a:bodyPr wrap="square" anchor="t">
+            <a:spAutoFit/>
+          </a:bodyPr>
+          <a:lstStyle/>
+          <a:p>
+            <a:pPr algn="l">
+              <a:lnSpc>
+                <a:spcPct val="125000"/>
+              </a:lnSpc>
+              <a:spcAft>
+                <a:spcPts val="900"/>
+              </a:spcAft>
+            </a:pPr>
+            <a:r>
+              <a:rPr sz="1500">
+                <a:solidFill>
+                  <a:srgbClr val="0F172A"/>
+                </a:solidFill>
+              </a:rPr>
+              <a:t>🔔  </a:t>
+            </a:r>
+            <a:r>
+              <a:rPr sz="1500" b="0">
+                <a:solidFill>
+                  <a:srgbClr val="0F172A"/>
+                </a:solidFill>
+              </a:rPr>
+              <a:t>Une </a:t>
+            </a:r>
+            <a:r>
+              <a:rPr sz="1500" b="1">
+                <a:solidFill>
+                  <a:srgbClr val="0F172A"/>
+                </a:solidFill>
+              </a:rPr>
+              <a:t>notification</a:t>
+            </a:r>
+            <a:r>
+              <a:rPr sz="1500" b="0">
+                <a:solidFill>
+                  <a:srgbClr val="0F172A"/>
+                </a:solidFill>
+              </a:rPr>
+              <a:t> « C'est à toi de choisir ! » apparaît, quel que soit l'onglet.</a:t>
+            </a:r>
+          </a:p>
+          <a:p>
+            <a:pPr algn="l">
+              <a:lnSpc>
+                <a:spcPct val="125000"/>
+              </a:lnSpc>
+              <a:spcAft>
+                <a:spcPts val="900"/>
+              </a:spcAft>
+            </a:pPr>
+            <a:r>
+              <a:rPr sz="1500">
+                <a:solidFill>
+                  <a:srgbClr val="0F172A"/>
+                </a:solidFill>
+              </a:rPr>
+              <a:t>💙  </a:t>
+            </a:r>
+            <a:r>
+              <a:rPr sz="1500" b="0">
+                <a:solidFill>
+                  <a:srgbClr val="0F172A"/>
+                </a:solidFill>
+              </a:rPr>
+              <a:t>Sur </a:t>
+            </a:r>
+            <a:r>
+              <a:rPr sz="1500" b="1">
+                <a:solidFill>
+                  <a:srgbClr val="0F172A"/>
+                </a:solidFill>
+              </a:rPr>
+              <a:t>son propre écran</a:t>
+            </a:r>
+            <a:r>
+              <a:rPr sz="1500" b="0">
+                <a:solidFill>
+                  <a:srgbClr val="0F172A"/>
+                </a:solidFill>
+              </a:rPr>
+              <a:t> (connecté à son compte), </a:t>
+            </a:r>
+            <a:r>
+              <a:rPr sz="1500" b="1">
+                <a:solidFill>
+                  <a:srgbClr val="0F172A"/>
+                </a:solidFill>
+              </a:rPr>
+              <a:t>ses vœux</a:t>
+            </a:r>
+            <a:r>
+              <a:rPr sz="1500" b="0">
+                <a:solidFill>
+                  <a:srgbClr val="0F172A"/>
+                </a:solidFill>
+              </a:rPr>
+              <a:t> (bleu) et </a:t>
+            </a:r>
+            <a:r>
+              <a:rPr sz="1500" b="1">
+                <a:solidFill>
+                  <a:srgbClr val="0F172A"/>
+                </a:solidFill>
+              </a:rPr>
+              <a:t>ses indispos</a:t>
+            </a:r>
+            <a:r>
+              <a:rPr sz="1500" b="0">
+                <a:solidFill>
+                  <a:srgbClr val="0F172A"/>
+                </a:solidFill>
+              </a:rPr>
+              <a:t> (rouge 🚫) s'affichent pour repérer les bons jours.</a:t>
+            </a:r>
+          </a:p>
+          <a:p>
+            <a:pPr algn="l">
+              <a:lnSpc>
+                <a:spcPct val="125000"/>
+              </a:lnSpc>
+              <a:spcAft>
+                <a:spcPts val="900"/>
+              </a:spcAft>
+            </a:pPr>
+            <a:r>
+              <a:rPr sz="1500">
+                <a:solidFill>
+                  <a:srgbClr val="0F172A"/>
+                </a:solidFill>
+              </a:rPr>
+              <a:t>👁  </a:t>
+            </a:r>
+            <a:r>
+              <a:rPr sz="1500" b="1">
+                <a:solidFill>
+                  <a:srgbClr val="0F172A"/>
+                </a:solidFill>
+              </a:rPr>
+              <a:t>Sur l'écran partagé de l'admin</a:t>
+            </a:r>
+            <a:r>
+              <a:rPr sz="1500" b="0">
+                <a:solidFill>
+                  <a:srgbClr val="0F172A"/>
+                </a:solidFill>
+              </a:rPr>
+              <a:t> (vue admin), ces vœux/indispos </a:t>
+            </a:r>
+            <a:r>
+              <a:rPr sz="1500" b="1">
+                <a:solidFill>
+                  <a:srgbClr val="0F172A"/>
+                </a:solidFill>
+              </a:rPr>
+              <a:t>ne sont pas visibles</a:t>
+            </a:r>
+            <a:r>
+              <a:rPr sz="1500" b="0">
+                <a:solidFill>
+                  <a:srgbClr val="0F172A"/>
+                </a:solidFill>
+              </a:rPr>
+              <a:t> — seules les gardes et les dates choisissables le sont.</a:t>
+            </a:r>
+          </a:p>
+          <a:p>
+            <a:pPr algn="l">
+              <a:lnSpc>
+                <a:spcPct val="125000"/>
+              </a:lnSpc>
+              <a:spcAft>
+                <a:spcPts val="900"/>
+              </a:spcAft>
+            </a:pPr>
+            <a:r>
+              <a:rPr sz="1500">
+                <a:solidFill>
+                  <a:srgbClr val="0F172A"/>
+                </a:solidFill>
+              </a:rPr>
+              <a:t>🧑‍⚕️  </a:t>
+            </a:r>
+            <a:r>
+              <a:rPr sz="1500" b="0">
+                <a:solidFill>
+                  <a:srgbClr val="0F172A"/>
+                </a:solidFill>
+              </a:rPr>
+              <a:t>👉 </a:t>
+            </a:r>
+            <a:r>
+              <a:rPr sz="1500" b="1">
+                <a:solidFill>
+                  <a:srgbClr val="0F172A"/>
+                </a:solidFill>
+              </a:rPr>
+              <a:t>C'est l'admin qui pose la garde</a:t>
+            </a:r>
+            <a:r>
+              <a:rPr sz="1500" b="0">
+                <a:solidFill>
+                  <a:srgbClr val="0F172A"/>
+                </a:solidFill>
+              </a:rPr>
+              <a:t> — il suffit de lui communiquer le choix.</a:t>
+            </a:r>
+          </a:p>
+        </p:txBody>
+      </p:sp>
+      <p:sp>
+        <p:nvSpPr>
+          <p:cNvPr id="5" name="Rounded Rectangle 4"/>
           <p:cNvSpPr/>
           <p:nvPr/>
         </p:nvSpPr>
         <p:spPr>
           <a:xfrm>
-            <a:off x="640080" y="2057400"/>
-            <a:ext cx="640080" cy="457200"/>
+            <a:off x="640080" y="5074920"/>
+            <a:ext cx="6400800" cy="1234440"/>
           </a:xfrm>
           <a:prstGeom prst="roundRect">
             <a:avLst/>
           </a:prstGeom>
           <a:solidFill>
-            <a:srgbClr val="DCFCE7"/>
+            <a:srgbClr val="EFF6FF"/>
           </a:solidFill>
-          <a:ln w="25400">
+          <a:ln w="12700">
             <a:solidFill>
-              <a:srgbClr val="16A34A"/>
+              <a:srgbClr val="BFDBFE"/>
             </a:solidFill>
           </a:ln>
           <a:effectLst/>
@@ -4084,50 +4614,56 @@
           </a:fontRef>
         </p:style>
         <p:txBody>
-          <a:bodyPr rtlCol="0" anchor="ctr"/>
-          <a:lstStyle/>
-          <a:p>
-            <a:pPr algn="ctr"/>
-          </a:p>
-        </p:txBody>
-      </p:sp>
-      <p:sp>
-        <p:nvSpPr>
-          <p:cNvPr id="5" name="TextBox 4"/>
-          <p:cNvSpPr txBox="1"/>
-          <p:nvPr/>
-        </p:nvSpPr>
-        <p:spPr>
-          <a:xfrm>
-            <a:off x="1417319" y="2029968"/>
-            <a:ext cx="4754880" cy="548640"/>
-          </a:xfrm>
-          <a:prstGeom prst="rect">
-            <a:avLst/>
-          </a:prstGeom>
-          <a:noFill/>
-        </p:spPr>
-        <p:txBody>
-          <a:bodyPr wrap="square" anchor="ctr">
-            <a:spAutoFit/>
-          </a:bodyPr>
-          <a:lstStyle/>
-          <a:p>
-            <a:pPr algn="l">
-              <a:lnSpc>
-                <a:spcPct val="110000"/>
+          <a:bodyPr rtlCol="0" anchor="ctr" wrap="square" lIns="182880" rIns="182880"/>
+          <a:lstStyle/>
+          <a:p>
+            <a:pPr algn="l">
+              <a:lnSpc>
+                <a:spcPct val="125000"/>
               </a:lnSpc>
               <a:spcAft>
                 <a:spcPts val="0"/>
               </a:spcAft>
             </a:pPr>
             <a:r>
-              <a:rPr sz="1500" b="0">
-                <a:solidFill>
-                  <a:srgbClr val="0F172A"/>
-                </a:solidFill>
-              </a:rPr>
-              <a:t>Garde attribuée  (du choisisseur sur Planning, de soi sur Perso)</a:t>
+              <a:rPr sz="1400" b="0">
+                <a:solidFill>
+                  <a:srgbClr val="1E3A8A"/>
+                </a:solidFill>
+              </a:rPr>
+              <a:t>En pratique : l'admin </a:t>
+            </a:r>
+            <a:r>
+              <a:rPr sz="1400" b="1">
+                <a:solidFill>
+                  <a:srgbClr val="1E3A8A"/>
+                </a:solidFill>
+              </a:rPr>
+              <a:t>partage son écran (Zoom)</a:t>
+            </a:r>
+            <a:r>
+              <a:rPr sz="1400" b="0">
+                <a:solidFill>
+                  <a:srgbClr val="1E3A8A"/>
+                </a:solidFill>
+              </a:rPr>
+              <a:t> pour tout le monde ; chacun peut en parallèle </a:t>
+            </a:r>
+            <a:r>
+              <a:rPr sz="1400" b="1">
+                <a:solidFill>
+                  <a:srgbClr val="1E3A8A"/>
+                </a:solidFill>
+              </a:rPr>
+              <a:t>se connecter avec son compte</a:t>
+            </a:r>
+            <a:r>
+              <a:rPr sz="1400" b="0">
+                <a:solidFill>
+                  <a:srgbClr val="1E3A8A"/>
+                </a:solidFill>
+              </a:rPr>
+              <a:t> pour mieux voir ses propres gardes, vœux et indispos.</a:t>
             </a:r>
           </a:p>
         </p:txBody>
@@ -4140,530 +4676,8 @@
         </p:nvSpPr>
         <p:spPr>
           <a:xfrm>
-            <a:off x="640080" y="2743200"/>
-            <a:ext cx="640080" cy="457200"/>
-          </a:xfrm>
-          <a:prstGeom prst="roundRect">
-            <a:avLst/>
-          </a:prstGeom>
-          <a:solidFill>
-            <a:srgbClr val="BFDBFE"/>
-          </a:solidFill>
-          <a:ln w="12700">
-            <a:solidFill>
-              <a:srgbClr val="E2E8F0"/>
-            </a:solidFill>
-          </a:ln>
-          <a:effectLst/>
-        </p:spPr>
-        <p:style>
-          <a:lnRef idx="1">
-            <a:schemeClr val="accent1"/>
-          </a:lnRef>
-          <a:fillRef idx="3">
-            <a:schemeClr val="accent1"/>
-          </a:fillRef>
-          <a:effectRef idx="2">
-            <a:schemeClr val="accent1"/>
-          </a:effectRef>
-          <a:fontRef idx="minor">
-            <a:schemeClr val="lt1"/>
-          </a:fontRef>
-        </p:style>
-        <p:txBody>
-          <a:bodyPr rtlCol="0" anchor="ctr"/>
-          <a:lstStyle/>
-          <a:p>
-            <a:pPr algn="ctr"/>
-          </a:p>
-        </p:txBody>
-      </p:sp>
-      <p:sp>
-        <p:nvSpPr>
-          <p:cNvPr id="7" name="TextBox 6"/>
-          <p:cNvSpPr txBox="1"/>
-          <p:nvPr/>
-        </p:nvSpPr>
-        <p:spPr>
-          <a:xfrm>
-            <a:off x="1417319" y="2715768"/>
-            <a:ext cx="4754880" cy="548640"/>
-          </a:xfrm>
-          <a:prstGeom prst="rect">
-            <a:avLst/>
-          </a:prstGeom>
-          <a:noFill/>
-        </p:spPr>
-        <p:txBody>
-          <a:bodyPr wrap="square" anchor="ctr">
-            <a:spAutoFit/>
-          </a:bodyPr>
-          <a:lstStyle/>
-          <a:p>
-            <a:pPr algn="l">
-              <a:lnSpc>
-                <a:spcPct val="110000"/>
-              </a:lnSpc>
-              <a:spcAft>
-                <a:spcPts val="0"/>
-              </a:spcAft>
-            </a:pPr>
-            <a:r>
-              <a:rPr sz="1500" b="0">
-                <a:solidFill>
-                  <a:srgbClr val="0F172A"/>
-                </a:solidFill>
-              </a:rPr>
-              <a:t>Vœu 💙  (visible à son tour)</a:t>
-            </a:r>
-          </a:p>
-        </p:txBody>
-      </p:sp>
-      <p:sp>
-        <p:nvSpPr>
-          <p:cNvPr id="8" name="Rounded Rectangle 7"/>
-          <p:cNvSpPr/>
-          <p:nvPr/>
-        </p:nvSpPr>
-        <p:spPr>
-          <a:xfrm>
-            <a:off x="640080" y="3429000"/>
-            <a:ext cx="640080" cy="457200"/>
-          </a:xfrm>
-          <a:prstGeom prst="roundRect">
-            <a:avLst/>
-          </a:prstGeom>
-          <a:solidFill>
-            <a:srgbClr val="FEF2F2"/>
-          </a:solidFill>
-          <a:ln w="19050">
-            <a:solidFill>
-              <a:srgbClr val="FCA5A5"/>
-            </a:solidFill>
-          </a:ln>
-          <a:effectLst/>
-        </p:spPr>
-        <p:style>
-          <a:lnRef idx="1">
-            <a:schemeClr val="accent1"/>
-          </a:lnRef>
-          <a:fillRef idx="3">
-            <a:schemeClr val="accent1"/>
-          </a:fillRef>
-          <a:effectRef idx="2">
-            <a:schemeClr val="accent1"/>
-          </a:effectRef>
-          <a:fontRef idx="minor">
-            <a:schemeClr val="lt1"/>
-          </a:fontRef>
-        </p:style>
-        <p:txBody>
-          <a:bodyPr rtlCol="0" anchor="ctr"/>
-          <a:lstStyle/>
-          <a:p>
-            <a:pPr algn="ctr"/>
-          </a:p>
-        </p:txBody>
-      </p:sp>
-      <p:sp>
-        <p:nvSpPr>
-          <p:cNvPr id="9" name="TextBox 8"/>
-          <p:cNvSpPr txBox="1"/>
-          <p:nvPr/>
-        </p:nvSpPr>
-        <p:spPr>
-          <a:xfrm>
-            <a:off x="1417319" y="3401568"/>
-            <a:ext cx="4754880" cy="548640"/>
-          </a:xfrm>
-          <a:prstGeom prst="rect">
-            <a:avLst/>
-          </a:prstGeom>
-          <a:noFill/>
-        </p:spPr>
-        <p:txBody>
-          <a:bodyPr wrap="square" anchor="ctr">
-            <a:spAutoFit/>
-          </a:bodyPr>
-          <a:lstStyle/>
-          <a:p>
-            <a:pPr algn="l">
-              <a:lnSpc>
-                <a:spcPct val="110000"/>
-              </a:lnSpc>
-              <a:spcAft>
-                <a:spcPts val="0"/>
-              </a:spcAft>
-            </a:pPr>
-            <a:r>
-              <a:rPr sz="1500" b="0">
-                <a:solidFill>
-                  <a:srgbClr val="0F172A"/>
-                </a:solidFill>
-              </a:rPr>
-              <a:t>Indispo 🚫  (visible à son tour)</a:t>
-            </a:r>
-          </a:p>
-        </p:txBody>
-      </p:sp>
-      <p:sp>
-        <p:nvSpPr>
-          <p:cNvPr id="10" name="Rounded Rectangle 9"/>
-          <p:cNvSpPr/>
-          <p:nvPr/>
-        </p:nvSpPr>
-        <p:spPr>
-          <a:xfrm>
-            <a:off x="640080" y="4114800"/>
-            <a:ext cx="640080" cy="457200"/>
-          </a:xfrm>
-          <a:prstGeom prst="roundRect">
-            <a:avLst/>
-          </a:prstGeom>
-          <a:solidFill>
-            <a:srgbClr val="EFF6FF"/>
-          </a:solidFill>
-          <a:ln w="25400">
-            <a:solidFill>
-              <a:srgbClr val="2563EB"/>
-            </a:solidFill>
-          </a:ln>
-          <a:effectLst/>
-        </p:spPr>
-        <p:style>
-          <a:lnRef idx="1">
-            <a:schemeClr val="accent1"/>
-          </a:lnRef>
-          <a:fillRef idx="3">
-            <a:schemeClr val="accent1"/>
-          </a:fillRef>
-          <a:effectRef idx="2">
-            <a:schemeClr val="accent1"/>
-          </a:effectRef>
-          <a:fontRef idx="minor">
-            <a:schemeClr val="lt1"/>
-          </a:fontRef>
-        </p:style>
-        <p:txBody>
-          <a:bodyPr rtlCol="0" anchor="ctr"/>
-          <a:lstStyle/>
-          <a:p>
-            <a:pPr algn="ctr"/>
-          </a:p>
-        </p:txBody>
-      </p:sp>
-      <p:sp>
-        <p:nvSpPr>
-          <p:cNvPr id="11" name="TextBox 10"/>
-          <p:cNvSpPr txBox="1"/>
-          <p:nvPr/>
-        </p:nvSpPr>
-        <p:spPr>
-          <a:xfrm>
-            <a:off x="1417319" y="4087368"/>
-            <a:ext cx="4754880" cy="548640"/>
-          </a:xfrm>
-          <a:prstGeom prst="rect">
-            <a:avLst/>
-          </a:prstGeom>
-          <a:noFill/>
-        </p:spPr>
-        <p:txBody>
-          <a:bodyPr wrap="square" anchor="ctr">
-            <a:spAutoFit/>
-          </a:bodyPr>
-          <a:lstStyle/>
-          <a:p>
-            <a:pPr algn="l">
-              <a:lnSpc>
-                <a:spcPct val="110000"/>
-              </a:lnSpc>
-              <a:spcAft>
-                <a:spcPts val="0"/>
-              </a:spcAft>
-            </a:pPr>
-            <a:r>
-              <a:rPr sz="1500" b="0">
-                <a:solidFill>
-                  <a:srgbClr val="0F172A"/>
-                </a:solidFill>
-              </a:rPr>
-              <a:t>Date choisissable</a:t>
-            </a:r>
-          </a:p>
-        </p:txBody>
-      </p:sp>
-      <p:sp>
-        <p:nvSpPr>
-          <p:cNvPr id="12" name="Rounded Rectangle 11"/>
-          <p:cNvSpPr/>
-          <p:nvPr/>
-        </p:nvSpPr>
-        <p:spPr>
-          <a:xfrm>
-            <a:off x="6309360" y="2057400"/>
-            <a:ext cx="640080" cy="457200"/>
-          </a:xfrm>
-          <a:prstGeom prst="roundRect">
-            <a:avLst/>
-          </a:prstGeom>
-          <a:solidFill>
-            <a:srgbClr val="DDE3EB"/>
-          </a:solidFill>
-          <a:ln w="12700">
-            <a:solidFill>
-              <a:srgbClr val="E2E8F0"/>
-            </a:solidFill>
-          </a:ln>
-          <a:effectLst/>
-        </p:spPr>
-        <p:style>
-          <a:lnRef idx="1">
-            <a:schemeClr val="accent1"/>
-          </a:lnRef>
-          <a:fillRef idx="3">
-            <a:schemeClr val="accent1"/>
-          </a:fillRef>
-          <a:effectRef idx="2">
-            <a:schemeClr val="accent1"/>
-          </a:effectRef>
-          <a:fontRef idx="minor">
-            <a:schemeClr val="lt1"/>
-          </a:fontRef>
-        </p:style>
-        <p:txBody>
-          <a:bodyPr rtlCol="0" anchor="ctr"/>
-          <a:lstStyle/>
-          <a:p>
-            <a:pPr algn="ctr"/>
-          </a:p>
-        </p:txBody>
-      </p:sp>
-      <p:sp>
-        <p:nvSpPr>
-          <p:cNvPr id="13" name="TextBox 12"/>
-          <p:cNvSpPr txBox="1"/>
-          <p:nvPr/>
-        </p:nvSpPr>
-        <p:spPr>
-          <a:xfrm>
-            <a:off x="7086600" y="2029968"/>
-            <a:ext cx="4754880" cy="548640"/>
-          </a:xfrm>
-          <a:prstGeom prst="rect">
-            <a:avLst/>
-          </a:prstGeom>
-          <a:noFill/>
-        </p:spPr>
-        <p:txBody>
-          <a:bodyPr wrap="square" anchor="ctr">
-            <a:spAutoFit/>
-          </a:bodyPr>
-          <a:lstStyle/>
-          <a:p>
-            <a:pPr algn="l">
-              <a:lnSpc>
-                <a:spcPct val="110000"/>
-              </a:lnSpc>
-              <a:spcAft>
-                <a:spcPts val="0"/>
-              </a:spcAft>
-            </a:pPr>
-            <a:r>
-              <a:rPr sz="1500" b="0">
-                <a:solidFill>
-                  <a:srgbClr val="0F172A"/>
-                </a:solidFill>
-              </a:rPr>
-              <a:t>Jour complet</a:t>
-            </a:r>
-          </a:p>
-        </p:txBody>
-      </p:sp>
-      <p:sp>
-        <p:nvSpPr>
-          <p:cNvPr id="14" name="Rounded Rectangle 13"/>
-          <p:cNvSpPr/>
-          <p:nvPr/>
-        </p:nvSpPr>
-        <p:spPr>
-          <a:xfrm>
-            <a:off x="6309360" y="2743200"/>
-            <a:ext cx="640080" cy="457200"/>
-          </a:xfrm>
-          <a:prstGeom prst="roundRect">
-            <a:avLst/>
-          </a:prstGeom>
-          <a:solidFill>
-            <a:srgbClr val="F1F5F9"/>
-          </a:solidFill>
-          <a:ln w="12700">
-            <a:solidFill>
-              <a:srgbClr val="E2E8F0"/>
-            </a:solidFill>
-          </a:ln>
-          <a:effectLst/>
-        </p:spPr>
-        <p:style>
-          <a:lnRef idx="1">
-            <a:schemeClr val="accent1"/>
-          </a:lnRef>
-          <a:fillRef idx="3">
-            <a:schemeClr val="accent1"/>
-          </a:fillRef>
-          <a:effectRef idx="2">
-            <a:schemeClr val="accent1"/>
-          </a:effectRef>
-          <a:fontRef idx="minor">
-            <a:schemeClr val="lt1"/>
-          </a:fontRef>
-        </p:style>
-        <p:txBody>
-          <a:bodyPr rtlCol="0" anchor="ctr"/>
-          <a:lstStyle/>
-          <a:p>
-            <a:pPr algn="ctr"/>
-          </a:p>
-        </p:txBody>
-      </p:sp>
-      <p:sp>
-        <p:nvSpPr>
-          <p:cNvPr id="15" name="TextBox 14"/>
-          <p:cNvSpPr txBox="1"/>
-          <p:nvPr/>
-        </p:nvSpPr>
-        <p:spPr>
-          <a:xfrm>
-            <a:off x="7086600" y="2715768"/>
-            <a:ext cx="4754880" cy="548640"/>
-          </a:xfrm>
-          <a:prstGeom prst="rect">
-            <a:avLst/>
-          </a:prstGeom>
-          <a:noFill/>
-        </p:spPr>
-        <p:txBody>
-          <a:bodyPr wrap="square" anchor="ctr">
-            <a:spAutoFit/>
-          </a:bodyPr>
-          <a:lstStyle/>
-          <a:p>
-            <a:pPr algn="l">
-              <a:lnSpc>
-                <a:spcPct val="110000"/>
-              </a:lnSpc>
-              <a:spcAft>
-                <a:spcPts val="0"/>
-              </a:spcAft>
-            </a:pPr>
-            <a:r>
-              <a:rPr sz="1500" b="0">
-                <a:solidFill>
-                  <a:srgbClr val="0F172A"/>
-                </a:solidFill>
-              </a:rPr>
-              <a:t>Week-end / férié</a:t>
-            </a:r>
-          </a:p>
-        </p:txBody>
-      </p:sp>
-      <p:sp>
-        <p:nvSpPr>
-          <p:cNvPr id="16" name="Rounded Rectangle 15"/>
-          <p:cNvSpPr/>
-          <p:nvPr/>
-        </p:nvSpPr>
-        <p:spPr>
-          <a:xfrm>
-            <a:off x="6309360" y="3429000"/>
-            <a:ext cx="640080" cy="457200"/>
-          </a:xfrm>
-          <a:prstGeom prst="roundRect">
-            <a:avLst/>
-          </a:prstGeom>
-          <a:solidFill>
-            <a:srgbClr val="F8FAFC"/>
-          </a:solidFill>
-          <a:ln w="12700">
-            <a:solidFill>
-              <a:srgbClr val="E2E8F0"/>
-            </a:solidFill>
-          </a:ln>
-          <a:effectLst/>
-        </p:spPr>
-        <p:style>
-          <a:lnRef idx="1">
-            <a:schemeClr val="accent1"/>
-          </a:lnRef>
-          <a:fillRef idx="3">
-            <a:schemeClr val="accent1"/>
-          </a:fillRef>
-          <a:effectRef idx="2">
-            <a:schemeClr val="accent1"/>
-          </a:effectRef>
-          <a:fontRef idx="minor">
-            <a:schemeClr val="lt1"/>
-          </a:fontRef>
-        </p:style>
-        <p:txBody>
-          <a:bodyPr rtlCol="0" anchor="ctr"/>
-          <a:lstStyle/>
-          <a:p>
-            <a:pPr algn="ctr"/>
-          </a:p>
-        </p:txBody>
-      </p:sp>
-      <p:sp>
-        <p:nvSpPr>
-          <p:cNvPr id="17" name="TextBox 16"/>
-          <p:cNvSpPr txBox="1"/>
-          <p:nvPr/>
-        </p:nvSpPr>
-        <p:spPr>
-          <a:xfrm>
-            <a:off x="7086600" y="3401568"/>
-            <a:ext cx="4754880" cy="548640"/>
-          </a:xfrm>
-          <a:prstGeom prst="rect">
-            <a:avLst/>
-          </a:prstGeom>
-          <a:noFill/>
-        </p:spPr>
-        <p:txBody>
-          <a:bodyPr wrap="square" anchor="ctr">
-            <a:spAutoFit/>
-          </a:bodyPr>
-          <a:lstStyle/>
-          <a:p>
-            <a:pPr algn="l">
-              <a:lnSpc>
-                <a:spcPct val="110000"/>
-              </a:lnSpc>
-              <a:spcAft>
-                <a:spcPts val="0"/>
-              </a:spcAft>
-            </a:pPr>
-            <a:r>
-              <a:rPr sz="1500" b="0">
-                <a:solidFill>
-                  <a:srgbClr val="0F172A"/>
-                </a:solidFill>
-              </a:rPr>
-              <a:t>Vendredi</a:t>
-            </a:r>
-          </a:p>
-        </p:txBody>
-      </p:sp>
-      <p:sp>
-        <p:nvSpPr>
-          <p:cNvPr id="18" name="Rounded Rectangle 17"/>
-          <p:cNvSpPr/>
-          <p:nvPr/>
-        </p:nvSpPr>
-        <p:spPr>
-          <a:xfrm>
-            <a:off x="6309360" y="4114800"/>
-            <a:ext cx="640080" cy="457200"/>
+            <a:off x="7772400" y="2377440"/>
+            <a:ext cx="3474720" cy="2377440"/>
           </a:xfrm>
           <a:prstGeom prst="roundRect">
             <a:avLst/>
@@ -4702,14 +4716,14 @@
       </p:sp>
       <p:sp>
         <p:nvSpPr>
-          <p:cNvPr id="19" name="TextBox 18"/>
+          <p:cNvPr id="7" name="TextBox 6"/>
           <p:cNvSpPr txBox="1"/>
           <p:nvPr/>
         </p:nvSpPr>
         <p:spPr>
           <a:xfrm>
-            <a:off x="7086600" y="4087368"/>
-            <a:ext cx="4754880" cy="548640"/>
+            <a:off x="7772400" y="2514600"/>
+            <a:ext cx="3474720" cy="548640"/>
           </a:xfrm>
           <a:prstGeom prst="rect">
             <a:avLst/>
@@ -4717,51 +4731,131 @@
           <a:noFill/>
         </p:spPr>
         <p:txBody>
-          <a:bodyPr wrap="square" anchor="ctr">
+          <a:bodyPr wrap="square" anchor="t">
             <a:spAutoFit/>
           </a:bodyPr>
           <a:lstStyle/>
           <a:p>
-            <a:pPr algn="l">
-              <a:lnSpc>
-                <a:spcPct val="110000"/>
+            <a:pPr algn="ctr">
+              <a:lnSpc>
+                <a:spcPct val="120000"/>
               </a:lnSpc>
               <a:spcAft>
                 <a:spcPts val="0"/>
               </a:spcAft>
             </a:pPr>
             <a:r>
-              <a:rPr sz="1500" b="0">
-                <a:solidFill>
-                  <a:srgbClr val="0F172A"/>
-                </a:solidFill>
-              </a:rPr>
-              <a:t>Jour de semaine libre</a:t>
-            </a:r>
-          </a:p>
-        </p:txBody>
-      </p:sp>
-      <p:sp>
-        <p:nvSpPr>
-          <p:cNvPr id="20" name="Rounded Rectangle 19"/>
+              <a:rPr sz="3400" b="0">
+                <a:solidFill>
+                  <a:srgbClr val="0F172A"/>
+                </a:solidFill>
+              </a:rPr>
+              <a:t>🔔</a:t>
+            </a:r>
+          </a:p>
+        </p:txBody>
+      </p:sp>
+      <p:sp>
+        <p:nvSpPr>
+          <p:cNvPr id="8" name="TextBox 7"/>
+          <p:cNvSpPr txBox="1"/>
+          <p:nvPr/>
+        </p:nvSpPr>
+        <p:spPr>
+          <a:xfrm>
+            <a:off x="7772400" y="3200400"/>
+            <a:ext cx="3474720" cy="457200"/>
+          </a:xfrm>
+          <a:prstGeom prst="rect">
+            <a:avLst/>
+          </a:prstGeom>
+          <a:noFill/>
+        </p:spPr>
+        <p:txBody>
+          <a:bodyPr wrap="square" anchor="t">
+            <a:spAutoFit/>
+          </a:bodyPr>
+          <a:lstStyle/>
+          <a:p>
+            <a:pPr algn="ctr">
+              <a:lnSpc>
+                <a:spcPct val="120000"/>
+              </a:lnSpc>
+              <a:spcAft>
+                <a:spcPts val="0"/>
+              </a:spcAft>
+            </a:pPr>
+            <a:r>
+              <a:rPr sz="1800" b="1">
+                <a:solidFill>
+                  <a:srgbClr val="0F172A"/>
+                </a:solidFill>
+              </a:rPr>
+              <a:t>C'est à toi de choisir !</a:t>
+            </a:r>
+          </a:p>
+        </p:txBody>
+      </p:sp>
+      <p:sp>
+        <p:nvSpPr>
+          <p:cNvPr id="9" name="TextBox 8"/>
+          <p:cNvSpPr txBox="1"/>
+          <p:nvPr/>
+        </p:nvSpPr>
+        <p:spPr>
+          <a:xfrm>
+            <a:off x="7772400" y="3657600"/>
+            <a:ext cx="3474720" cy="457200"/>
+          </a:xfrm>
+          <a:prstGeom prst="rect">
+            <a:avLst/>
+          </a:prstGeom>
+          <a:noFill/>
+        </p:spPr>
+        <p:txBody>
+          <a:bodyPr wrap="square" anchor="t">
+            <a:spAutoFit/>
+          </a:bodyPr>
+          <a:lstStyle/>
+          <a:p>
+            <a:pPr algn="ctr">
+              <a:lnSpc>
+                <a:spcPct val="120000"/>
+              </a:lnSpc>
+              <a:spcAft>
+                <a:spcPts val="0"/>
+              </a:spcAft>
+            </a:pPr>
+            <a:r>
+              <a:rPr sz="1300" b="0">
+                <a:solidFill>
+                  <a:srgbClr val="64748B"/>
+                </a:solidFill>
+              </a:rPr>
+              <a:t>Tour 2 — à choisir : 1 semaine, 1 WE/férié.</a:t>
+            </a:r>
+          </a:p>
+        </p:txBody>
+      </p:sp>
+      <p:sp>
+        <p:nvSpPr>
+          <p:cNvPr id="10" name="Rounded Rectangle 9"/>
           <p:cNvSpPr/>
           <p:nvPr/>
         </p:nvSpPr>
         <p:spPr>
           <a:xfrm>
-            <a:off x="640080" y="5074920"/>
-            <a:ext cx="10789920" cy="914400"/>
+            <a:off x="8138160" y="4206240"/>
+            <a:ext cx="1371600" cy="411480"/>
           </a:xfrm>
           <a:prstGeom prst="roundRect">
             <a:avLst/>
           </a:prstGeom>
           <a:solidFill>
-            <a:srgbClr val="F0FDF4"/>
+            <a:srgbClr val="2563EB"/>
           </a:solidFill>
-          <a:ln w="12700">
-            <a:solidFill>
-              <a:srgbClr val="BBF7D0"/>
-            </a:solidFill>
+          <a:ln>
+            <a:noFill/>
           </a:ln>
           <a:effectLst/>
         </p:spPr>
@@ -4780,40 +4874,85 @@
           </a:fontRef>
         </p:style>
         <p:txBody>
-          <a:bodyPr rtlCol="0" anchor="ctr" wrap="square" lIns="182880" rIns="182880"/>
-          <a:lstStyle/>
-          <a:p>
-            <a:pPr algn="l">
-              <a:lnSpc>
-                <a:spcPct val="125000"/>
+          <a:bodyPr rtlCol="0" anchor="ctr"/>
+          <a:lstStyle/>
+          <a:p>
+            <a:pPr algn="ctr">
+              <a:lnSpc>
+                <a:spcPct val="120000"/>
               </a:lnSpc>
               <a:spcAft>
                 <a:spcPts val="0"/>
               </a:spcAft>
             </a:pPr>
             <a:r>
-              <a:rPr sz="1500" b="0">
-                <a:solidFill>
-                  <a:srgbClr val="166534"/>
-                </a:solidFill>
-              </a:rPr>
-              <a:t>Une </a:t>
-            </a:r>
-            <a:r>
-              <a:rPr sz="1500" b="1">
-                <a:solidFill>
-                  <a:srgbClr val="166534"/>
-                </a:solidFill>
-              </a:rPr>
-              <a:t>garde attribuée (vert)</a:t>
-            </a:r>
-            <a:r>
-              <a:rPr sz="1500" b="0">
-                <a:solidFill>
-                  <a:srgbClr val="166534"/>
-                </a:solidFill>
-              </a:rPr>
-              <a:t> prime toujours : si un vœu tombe sur ce jour, la case reste verte.</a:t>
+              <a:rPr sz="1100" b="1">
+                <a:solidFill>
+                  <a:srgbClr val="FFFFFF"/>
+                </a:solidFill>
+              </a:rPr>
+              <a:t>Voir le planning</a:t>
+            </a:r>
+          </a:p>
+        </p:txBody>
+      </p:sp>
+      <p:sp>
+        <p:nvSpPr>
+          <p:cNvPr id="11" name="Rounded Rectangle 10"/>
+          <p:cNvSpPr/>
+          <p:nvPr/>
+        </p:nvSpPr>
+        <p:spPr>
+          <a:xfrm>
+            <a:off x="9601200" y="4206240"/>
+            <a:ext cx="914400" cy="411480"/>
+          </a:xfrm>
+          <a:prstGeom prst="roundRect">
+            <a:avLst/>
+          </a:prstGeom>
+          <a:solidFill>
+            <a:srgbClr val="FFFFFF"/>
+          </a:solidFill>
+          <a:ln w="12700">
+            <a:solidFill>
+              <a:srgbClr val="CBD5E1"/>
+            </a:solidFill>
+          </a:ln>
+          <a:effectLst/>
+        </p:spPr>
+        <p:style>
+          <a:lnRef idx="1">
+            <a:schemeClr val="accent1"/>
+          </a:lnRef>
+          <a:fillRef idx="3">
+            <a:schemeClr val="accent1"/>
+          </a:fillRef>
+          <a:effectRef idx="2">
+            <a:schemeClr val="accent1"/>
+          </a:effectRef>
+          <a:fontRef idx="minor">
+            <a:schemeClr val="lt1"/>
+          </a:fontRef>
+        </p:style>
+        <p:txBody>
+          <a:bodyPr rtlCol="0" anchor="ctr"/>
+          <a:lstStyle/>
+          <a:p>
+            <a:pPr algn="ctr">
+              <a:lnSpc>
+                <a:spcPct val="120000"/>
+              </a:lnSpc>
+              <a:spcAft>
+                <a:spcPts val="0"/>
+              </a:spcAft>
+            </a:pPr>
+            <a:r>
+              <a:rPr sz="1100" b="1">
+                <a:solidFill>
+                  <a:srgbClr val="0F172A"/>
+                </a:solidFill>
+              </a:rPr>
+              <a:t>OK</a:t>
             </a:r>
           </a:p>
         </p:txBody>
@@ -4872,6 +5011,879 @@
                   <a:srgbClr val="2563EB"/>
                 </a:solidFill>
               </a:rPr>
+              <a:t>AIDE-MÉMOIRE</a:t>
+            </a:r>
+          </a:p>
+        </p:txBody>
+      </p:sp>
+      <p:sp>
+        <p:nvSpPr>
+          <p:cNvPr id="3" name="TextBox 2"/>
+          <p:cNvSpPr txBox="1"/>
+          <p:nvPr/>
+        </p:nvSpPr>
+        <p:spPr>
+          <a:xfrm>
+            <a:off x="640080" y="868680"/>
+            <a:ext cx="10972800" cy="1280160"/>
+          </a:xfrm>
+          <a:prstGeom prst="rect">
+            <a:avLst/>
+          </a:prstGeom>
+          <a:noFill/>
+        </p:spPr>
+        <p:txBody>
+          <a:bodyPr wrap="square" anchor="t">
+            <a:spAutoFit/>
+          </a:bodyPr>
+          <a:lstStyle/>
+          <a:p>
+            <a:pPr algn="l">
+              <a:lnSpc>
+                <a:spcPct val="110000"/>
+              </a:lnSpc>
+              <a:spcAft>
+                <a:spcPts val="200"/>
+              </a:spcAft>
+            </a:pPr>
+            <a:r>
+              <a:rPr sz="3000" b="1">
+                <a:solidFill>
+                  <a:srgbClr val="0F172A"/>
+                </a:solidFill>
+              </a:rPr>
+              <a:t>La légende des couleurs</a:t>
+            </a:r>
+          </a:p>
+        </p:txBody>
+      </p:sp>
+      <p:sp>
+        <p:nvSpPr>
+          <p:cNvPr id="4" name="Rounded Rectangle 3"/>
+          <p:cNvSpPr/>
+          <p:nvPr/>
+        </p:nvSpPr>
+        <p:spPr>
+          <a:xfrm>
+            <a:off x="640080" y="2057400"/>
+            <a:ext cx="640080" cy="457200"/>
+          </a:xfrm>
+          <a:prstGeom prst="roundRect">
+            <a:avLst/>
+          </a:prstGeom>
+          <a:solidFill>
+            <a:srgbClr val="DCFCE7"/>
+          </a:solidFill>
+          <a:ln w="25400">
+            <a:solidFill>
+              <a:srgbClr val="16A34A"/>
+            </a:solidFill>
+          </a:ln>
+          <a:effectLst/>
+        </p:spPr>
+        <p:style>
+          <a:lnRef idx="1">
+            <a:schemeClr val="accent1"/>
+          </a:lnRef>
+          <a:fillRef idx="3">
+            <a:schemeClr val="accent1"/>
+          </a:fillRef>
+          <a:effectRef idx="2">
+            <a:schemeClr val="accent1"/>
+          </a:effectRef>
+          <a:fontRef idx="minor">
+            <a:schemeClr val="lt1"/>
+          </a:fontRef>
+        </p:style>
+        <p:txBody>
+          <a:bodyPr rtlCol="0" anchor="ctr"/>
+          <a:lstStyle/>
+          <a:p>
+            <a:pPr algn="ctr"/>
+          </a:p>
+        </p:txBody>
+      </p:sp>
+      <p:sp>
+        <p:nvSpPr>
+          <p:cNvPr id="5" name="TextBox 4"/>
+          <p:cNvSpPr txBox="1"/>
+          <p:nvPr/>
+        </p:nvSpPr>
+        <p:spPr>
+          <a:xfrm>
+            <a:off x="1417319" y="2029968"/>
+            <a:ext cx="4754880" cy="548640"/>
+          </a:xfrm>
+          <a:prstGeom prst="rect">
+            <a:avLst/>
+          </a:prstGeom>
+          <a:noFill/>
+        </p:spPr>
+        <p:txBody>
+          <a:bodyPr wrap="square" anchor="ctr">
+            <a:spAutoFit/>
+          </a:bodyPr>
+          <a:lstStyle/>
+          <a:p>
+            <a:pPr algn="l">
+              <a:lnSpc>
+                <a:spcPct val="110000"/>
+              </a:lnSpc>
+              <a:spcAft>
+                <a:spcPts val="0"/>
+              </a:spcAft>
+            </a:pPr>
+            <a:r>
+              <a:rPr sz="1500" b="0">
+                <a:solidFill>
+                  <a:srgbClr val="0F172A"/>
+                </a:solidFill>
+              </a:rPr>
+              <a:t>Garde attribuée  (du choisisseur sur Planning, de soi sur Perso)</a:t>
+            </a:r>
+          </a:p>
+        </p:txBody>
+      </p:sp>
+      <p:sp>
+        <p:nvSpPr>
+          <p:cNvPr id="6" name="Rounded Rectangle 5"/>
+          <p:cNvSpPr/>
+          <p:nvPr/>
+        </p:nvSpPr>
+        <p:spPr>
+          <a:xfrm>
+            <a:off x="640080" y="2743200"/>
+            <a:ext cx="640080" cy="457200"/>
+          </a:xfrm>
+          <a:prstGeom prst="roundRect">
+            <a:avLst/>
+          </a:prstGeom>
+          <a:solidFill>
+            <a:srgbClr val="BFDBFE"/>
+          </a:solidFill>
+          <a:ln w="12700">
+            <a:solidFill>
+              <a:srgbClr val="E2E8F0"/>
+            </a:solidFill>
+          </a:ln>
+          <a:effectLst/>
+        </p:spPr>
+        <p:style>
+          <a:lnRef idx="1">
+            <a:schemeClr val="accent1"/>
+          </a:lnRef>
+          <a:fillRef idx="3">
+            <a:schemeClr val="accent1"/>
+          </a:fillRef>
+          <a:effectRef idx="2">
+            <a:schemeClr val="accent1"/>
+          </a:effectRef>
+          <a:fontRef idx="minor">
+            <a:schemeClr val="lt1"/>
+          </a:fontRef>
+        </p:style>
+        <p:txBody>
+          <a:bodyPr rtlCol="0" anchor="ctr"/>
+          <a:lstStyle/>
+          <a:p>
+            <a:pPr algn="ctr"/>
+          </a:p>
+        </p:txBody>
+      </p:sp>
+      <p:sp>
+        <p:nvSpPr>
+          <p:cNvPr id="7" name="TextBox 6"/>
+          <p:cNvSpPr txBox="1"/>
+          <p:nvPr/>
+        </p:nvSpPr>
+        <p:spPr>
+          <a:xfrm>
+            <a:off x="1417319" y="2715768"/>
+            <a:ext cx="4754880" cy="548640"/>
+          </a:xfrm>
+          <a:prstGeom prst="rect">
+            <a:avLst/>
+          </a:prstGeom>
+          <a:noFill/>
+        </p:spPr>
+        <p:txBody>
+          <a:bodyPr wrap="square" anchor="ctr">
+            <a:spAutoFit/>
+          </a:bodyPr>
+          <a:lstStyle/>
+          <a:p>
+            <a:pPr algn="l">
+              <a:lnSpc>
+                <a:spcPct val="110000"/>
+              </a:lnSpc>
+              <a:spcAft>
+                <a:spcPts val="0"/>
+              </a:spcAft>
+            </a:pPr>
+            <a:r>
+              <a:rPr sz="1500" b="0">
+                <a:solidFill>
+                  <a:srgbClr val="0F172A"/>
+                </a:solidFill>
+              </a:rPr>
+              <a:t>Vœu 💙  (visible à son tour)</a:t>
+            </a:r>
+          </a:p>
+        </p:txBody>
+      </p:sp>
+      <p:sp>
+        <p:nvSpPr>
+          <p:cNvPr id="8" name="Rounded Rectangle 7"/>
+          <p:cNvSpPr/>
+          <p:nvPr/>
+        </p:nvSpPr>
+        <p:spPr>
+          <a:xfrm>
+            <a:off x="640080" y="3429000"/>
+            <a:ext cx="640080" cy="457200"/>
+          </a:xfrm>
+          <a:prstGeom prst="roundRect">
+            <a:avLst/>
+          </a:prstGeom>
+          <a:solidFill>
+            <a:srgbClr val="FEF2F2"/>
+          </a:solidFill>
+          <a:ln w="19050">
+            <a:solidFill>
+              <a:srgbClr val="FCA5A5"/>
+            </a:solidFill>
+          </a:ln>
+          <a:effectLst/>
+        </p:spPr>
+        <p:style>
+          <a:lnRef idx="1">
+            <a:schemeClr val="accent1"/>
+          </a:lnRef>
+          <a:fillRef idx="3">
+            <a:schemeClr val="accent1"/>
+          </a:fillRef>
+          <a:effectRef idx="2">
+            <a:schemeClr val="accent1"/>
+          </a:effectRef>
+          <a:fontRef idx="minor">
+            <a:schemeClr val="lt1"/>
+          </a:fontRef>
+        </p:style>
+        <p:txBody>
+          <a:bodyPr rtlCol="0" anchor="ctr"/>
+          <a:lstStyle/>
+          <a:p>
+            <a:pPr algn="ctr"/>
+          </a:p>
+        </p:txBody>
+      </p:sp>
+      <p:sp>
+        <p:nvSpPr>
+          <p:cNvPr id="9" name="TextBox 8"/>
+          <p:cNvSpPr txBox="1"/>
+          <p:nvPr/>
+        </p:nvSpPr>
+        <p:spPr>
+          <a:xfrm>
+            <a:off x="1417319" y="3401568"/>
+            <a:ext cx="4754880" cy="548640"/>
+          </a:xfrm>
+          <a:prstGeom prst="rect">
+            <a:avLst/>
+          </a:prstGeom>
+          <a:noFill/>
+        </p:spPr>
+        <p:txBody>
+          <a:bodyPr wrap="square" anchor="ctr">
+            <a:spAutoFit/>
+          </a:bodyPr>
+          <a:lstStyle/>
+          <a:p>
+            <a:pPr algn="l">
+              <a:lnSpc>
+                <a:spcPct val="110000"/>
+              </a:lnSpc>
+              <a:spcAft>
+                <a:spcPts val="0"/>
+              </a:spcAft>
+            </a:pPr>
+            <a:r>
+              <a:rPr sz="1500" b="0">
+                <a:solidFill>
+                  <a:srgbClr val="0F172A"/>
+                </a:solidFill>
+              </a:rPr>
+              <a:t>Indispo 🚫  (visible à son tour)</a:t>
+            </a:r>
+          </a:p>
+        </p:txBody>
+      </p:sp>
+      <p:sp>
+        <p:nvSpPr>
+          <p:cNvPr id="10" name="Rounded Rectangle 9"/>
+          <p:cNvSpPr/>
+          <p:nvPr/>
+        </p:nvSpPr>
+        <p:spPr>
+          <a:xfrm>
+            <a:off x="640080" y="4114800"/>
+            <a:ext cx="640080" cy="457200"/>
+          </a:xfrm>
+          <a:prstGeom prst="roundRect">
+            <a:avLst/>
+          </a:prstGeom>
+          <a:solidFill>
+            <a:srgbClr val="EFF6FF"/>
+          </a:solidFill>
+          <a:ln w="25400">
+            <a:solidFill>
+              <a:srgbClr val="2563EB"/>
+            </a:solidFill>
+          </a:ln>
+          <a:effectLst/>
+        </p:spPr>
+        <p:style>
+          <a:lnRef idx="1">
+            <a:schemeClr val="accent1"/>
+          </a:lnRef>
+          <a:fillRef idx="3">
+            <a:schemeClr val="accent1"/>
+          </a:fillRef>
+          <a:effectRef idx="2">
+            <a:schemeClr val="accent1"/>
+          </a:effectRef>
+          <a:fontRef idx="minor">
+            <a:schemeClr val="lt1"/>
+          </a:fontRef>
+        </p:style>
+        <p:txBody>
+          <a:bodyPr rtlCol="0" anchor="ctr"/>
+          <a:lstStyle/>
+          <a:p>
+            <a:pPr algn="ctr"/>
+          </a:p>
+        </p:txBody>
+      </p:sp>
+      <p:sp>
+        <p:nvSpPr>
+          <p:cNvPr id="11" name="TextBox 10"/>
+          <p:cNvSpPr txBox="1"/>
+          <p:nvPr/>
+        </p:nvSpPr>
+        <p:spPr>
+          <a:xfrm>
+            <a:off x="1417319" y="4087368"/>
+            <a:ext cx="4754880" cy="548640"/>
+          </a:xfrm>
+          <a:prstGeom prst="rect">
+            <a:avLst/>
+          </a:prstGeom>
+          <a:noFill/>
+        </p:spPr>
+        <p:txBody>
+          <a:bodyPr wrap="square" anchor="ctr">
+            <a:spAutoFit/>
+          </a:bodyPr>
+          <a:lstStyle/>
+          <a:p>
+            <a:pPr algn="l">
+              <a:lnSpc>
+                <a:spcPct val="110000"/>
+              </a:lnSpc>
+              <a:spcAft>
+                <a:spcPts val="0"/>
+              </a:spcAft>
+            </a:pPr>
+            <a:r>
+              <a:rPr sz="1500" b="0">
+                <a:solidFill>
+                  <a:srgbClr val="0F172A"/>
+                </a:solidFill>
+              </a:rPr>
+              <a:t>Date choisissable</a:t>
+            </a:r>
+          </a:p>
+        </p:txBody>
+      </p:sp>
+      <p:sp>
+        <p:nvSpPr>
+          <p:cNvPr id="12" name="Rounded Rectangle 11"/>
+          <p:cNvSpPr/>
+          <p:nvPr/>
+        </p:nvSpPr>
+        <p:spPr>
+          <a:xfrm>
+            <a:off x="6309360" y="2057400"/>
+            <a:ext cx="640080" cy="457200"/>
+          </a:xfrm>
+          <a:prstGeom prst="roundRect">
+            <a:avLst/>
+          </a:prstGeom>
+          <a:solidFill>
+            <a:srgbClr val="DDE3EB"/>
+          </a:solidFill>
+          <a:ln w="12700">
+            <a:solidFill>
+              <a:srgbClr val="E2E8F0"/>
+            </a:solidFill>
+          </a:ln>
+          <a:effectLst/>
+        </p:spPr>
+        <p:style>
+          <a:lnRef idx="1">
+            <a:schemeClr val="accent1"/>
+          </a:lnRef>
+          <a:fillRef idx="3">
+            <a:schemeClr val="accent1"/>
+          </a:fillRef>
+          <a:effectRef idx="2">
+            <a:schemeClr val="accent1"/>
+          </a:effectRef>
+          <a:fontRef idx="minor">
+            <a:schemeClr val="lt1"/>
+          </a:fontRef>
+        </p:style>
+        <p:txBody>
+          <a:bodyPr rtlCol="0" anchor="ctr"/>
+          <a:lstStyle/>
+          <a:p>
+            <a:pPr algn="ctr"/>
+          </a:p>
+        </p:txBody>
+      </p:sp>
+      <p:sp>
+        <p:nvSpPr>
+          <p:cNvPr id="13" name="TextBox 12"/>
+          <p:cNvSpPr txBox="1"/>
+          <p:nvPr/>
+        </p:nvSpPr>
+        <p:spPr>
+          <a:xfrm>
+            <a:off x="7086600" y="2029968"/>
+            <a:ext cx="4754880" cy="548640"/>
+          </a:xfrm>
+          <a:prstGeom prst="rect">
+            <a:avLst/>
+          </a:prstGeom>
+          <a:noFill/>
+        </p:spPr>
+        <p:txBody>
+          <a:bodyPr wrap="square" anchor="ctr">
+            <a:spAutoFit/>
+          </a:bodyPr>
+          <a:lstStyle/>
+          <a:p>
+            <a:pPr algn="l">
+              <a:lnSpc>
+                <a:spcPct val="110000"/>
+              </a:lnSpc>
+              <a:spcAft>
+                <a:spcPts val="0"/>
+              </a:spcAft>
+            </a:pPr>
+            <a:r>
+              <a:rPr sz="1500" b="0">
+                <a:solidFill>
+                  <a:srgbClr val="0F172A"/>
+                </a:solidFill>
+              </a:rPr>
+              <a:t>Jour complet</a:t>
+            </a:r>
+          </a:p>
+        </p:txBody>
+      </p:sp>
+      <p:sp>
+        <p:nvSpPr>
+          <p:cNvPr id="14" name="Rounded Rectangle 13"/>
+          <p:cNvSpPr/>
+          <p:nvPr/>
+        </p:nvSpPr>
+        <p:spPr>
+          <a:xfrm>
+            <a:off x="6309360" y="2743200"/>
+            <a:ext cx="640080" cy="457200"/>
+          </a:xfrm>
+          <a:prstGeom prst="roundRect">
+            <a:avLst/>
+          </a:prstGeom>
+          <a:solidFill>
+            <a:srgbClr val="F1F5F9"/>
+          </a:solidFill>
+          <a:ln w="12700">
+            <a:solidFill>
+              <a:srgbClr val="E2E8F0"/>
+            </a:solidFill>
+          </a:ln>
+          <a:effectLst/>
+        </p:spPr>
+        <p:style>
+          <a:lnRef idx="1">
+            <a:schemeClr val="accent1"/>
+          </a:lnRef>
+          <a:fillRef idx="3">
+            <a:schemeClr val="accent1"/>
+          </a:fillRef>
+          <a:effectRef idx="2">
+            <a:schemeClr val="accent1"/>
+          </a:effectRef>
+          <a:fontRef idx="minor">
+            <a:schemeClr val="lt1"/>
+          </a:fontRef>
+        </p:style>
+        <p:txBody>
+          <a:bodyPr rtlCol="0" anchor="ctr"/>
+          <a:lstStyle/>
+          <a:p>
+            <a:pPr algn="ctr"/>
+          </a:p>
+        </p:txBody>
+      </p:sp>
+      <p:sp>
+        <p:nvSpPr>
+          <p:cNvPr id="15" name="TextBox 14"/>
+          <p:cNvSpPr txBox="1"/>
+          <p:nvPr/>
+        </p:nvSpPr>
+        <p:spPr>
+          <a:xfrm>
+            <a:off x="7086600" y="2715768"/>
+            <a:ext cx="4754880" cy="548640"/>
+          </a:xfrm>
+          <a:prstGeom prst="rect">
+            <a:avLst/>
+          </a:prstGeom>
+          <a:noFill/>
+        </p:spPr>
+        <p:txBody>
+          <a:bodyPr wrap="square" anchor="ctr">
+            <a:spAutoFit/>
+          </a:bodyPr>
+          <a:lstStyle/>
+          <a:p>
+            <a:pPr algn="l">
+              <a:lnSpc>
+                <a:spcPct val="110000"/>
+              </a:lnSpc>
+              <a:spcAft>
+                <a:spcPts val="0"/>
+              </a:spcAft>
+            </a:pPr>
+            <a:r>
+              <a:rPr sz="1500" b="0">
+                <a:solidFill>
+                  <a:srgbClr val="0F172A"/>
+                </a:solidFill>
+              </a:rPr>
+              <a:t>Week-end / férié</a:t>
+            </a:r>
+          </a:p>
+        </p:txBody>
+      </p:sp>
+      <p:sp>
+        <p:nvSpPr>
+          <p:cNvPr id="16" name="Rounded Rectangle 15"/>
+          <p:cNvSpPr/>
+          <p:nvPr/>
+        </p:nvSpPr>
+        <p:spPr>
+          <a:xfrm>
+            <a:off x="6309360" y="3429000"/>
+            <a:ext cx="640080" cy="457200"/>
+          </a:xfrm>
+          <a:prstGeom prst="roundRect">
+            <a:avLst/>
+          </a:prstGeom>
+          <a:solidFill>
+            <a:srgbClr val="F8FAFC"/>
+          </a:solidFill>
+          <a:ln w="12700">
+            <a:solidFill>
+              <a:srgbClr val="E2E8F0"/>
+            </a:solidFill>
+          </a:ln>
+          <a:effectLst/>
+        </p:spPr>
+        <p:style>
+          <a:lnRef idx="1">
+            <a:schemeClr val="accent1"/>
+          </a:lnRef>
+          <a:fillRef idx="3">
+            <a:schemeClr val="accent1"/>
+          </a:fillRef>
+          <a:effectRef idx="2">
+            <a:schemeClr val="accent1"/>
+          </a:effectRef>
+          <a:fontRef idx="minor">
+            <a:schemeClr val="lt1"/>
+          </a:fontRef>
+        </p:style>
+        <p:txBody>
+          <a:bodyPr rtlCol="0" anchor="ctr"/>
+          <a:lstStyle/>
+          <a:p>
+            <a:pPr algn="ctr"/>
+          </a:p>
+        </p:txBody>
+      </p:sp>
+      <p:sp>
+        <p:nvSpPr>
+          <p:cNvPr id="17" name="TextBox 16"/>
+          <p:cNvSpPr txBox="1"/>
+          <p:nvPr/>
+        </p:nvSpPr>
+        <p:spPr>
+          <a:xfrm>
+            <a:off x="7086600" y="3401568"/>
+            <a:ext cx="4754880" cy="548640"/>
+          </a:xfrm>
+          <a:prstGeom prst="rect">
+            <a:avLst/>
+          </a:prstGeom>
+          <a:noFill/>
+        </p:spPr>
+        <p:txBody>
+          <a:bodyPr wrap="square" anchor="ctr">
+            <a:spAutoFit/>
+          </a:bodyPr>
+          <a:lstStyle/>
+          <a:p>
+            <a:pPr algn="l">
+              <a:lnSpc>
+                <a:spcPct val="110000"/>
+              </a:lnSpc>
+              <a:spcAft>
+                <a:spcPts val="0"/>
+              </a:spcAft>
+            </a:pPr>
+            <a:r>
+              <a:rPr sz="1500" b="0">
+                <a:solidFill>
+                  <a:srgbClr val="0F172A"/>
+                </a:solidFill>
+              </a:rPr>
+              <a:t>Vendredi</a:t>
+            </a:r>
+          </a:p>
+        </p:txBody>
+      </p:sp>
+      <p:sp>
+        <p:nvSpPr>
+          <p:cNvPr id="18" name="Rounded Rectangle 17"/>
+          <p:cNvSpPr/>
+          <p:nvPr/>
+        </p:nvSpPr>
+        <p:spPr>
+          <a:xfrm>
+            <a:off x="6309360" y="4114800"/>
+            <a:ext cx="640080" cy="457200"/>
+          </a:xfrm>
+          <a:prstGeom prst="roundRect">
+            <a:avLst/>
+          </a:prstGeom>
+          <a:solidFill>
+            <a:srgbClr val="FFFFFF"/>
+          </a:solidFill>
+          <a:ln w="12700">
+            <a:solidFill>
+              <a:srgbClr val="E2E8F0"/>
+            </a:solidFill>
+          </a:ln>
+          <a:effectLst/>
+        </p:spPr>
+        <p:style>
+          <a:lnRef idx="1">
+            <a:schemeClr val="accent1"/>
+          </a:lnRef>
+          <a:fillRef idx="3">
+            <a:schemeClr val="accent1"/>
+          </a:fillRef>
+          <a:effectRef idx="2">
+            <a:schemeClr val="accent1"/>
+          </a:effectRef>
+          <a:fontRef idx="minor">
+            <a:schemeClr val="lt1"/>
+          </a:fontRef>
+        </p:style>
+        <p:txBody>
+          <a:bodyPr rtlCol="0" anchor="ctr"/>
+          <a:lstStyle/>
+          <a:p>
+            <a:pPr algn="ctr"/>
+          </a:p>
+        </p:txBody>
+      </p:sp>
+      <p:sp>
+        <p:nvSpPr>
+          <p:cNvPr id="19" name="TextBox 18"/>
+          <p:cNvSpPr txBox="1"/>
+          <p:nvPr/>
+        </p:nvSpPr>
+        <p:spPr>
+          <a:xfrm>
+            <a:off x="7086600" y="4087368"/>
+            <a:ext cx="4754880" cy="548640"/>
+          </a:xfrm>
+          <a:prstGeom prst="rect">
+            <a:avLst/>
+          </a:prstGeom>
+          <a:noFill/>
+        </p:spPr>
+        <p:txBody>
+          <a:bodyPr wrap="square" anchor="ctr">
+            <a:spAutoFit/>
+          </a:bodyPr>
+          <a:lstStyle/>
+          <a:p>
+            <a:pPr algn="l">
+              <a:lnSpc>
+                <a:spcPct val="110000"/>
+              </a:lnSpc>
+              <a:spcAft>
+                <a:spcPts val="0"/>
+              </a:spcAft>
+            </a:pPr>
+            <a:r>
+              <a:rPr sz="1500" b="0">
+                <a:solidFill>
+                  <a:srgbClr val="0F172A"/>
+                </a:solidFill>
+              </a:rPr>
+              <a:t>Jour de semaine libre</a:t>
+            </a:r>
+          </a:p>
+        </p:txBody>
+      </p:sp>
+      <p:sp>
+        <p:nvSpPr>
+          <p:cNvPr id="20" name="Rounded Rectangle 19"/>
+          <p:cNvSpPr/>
+          <p:nvPr/>
+        </p:nvSpPr>
+        <p:spPr>
+          <a:xfrm>
+            <a:off x="640080" y="5074920"/>
+            <a:ext cx="10789920" cy="914400"/>
+          </a:xfrm>
+          <a:prstGeom prst="roundRect">
+            <a:avLst/>
+          </a:prstGeom>
+          <a:solidFill>
+            <a:srgbClr val="F0FDF4"/>
+          </a:solidFill>
+          <a:ln w="12700">
+            <a:solidFill>
+              <a:srgbClr val="BBF7D0"/>
+            </a:solidFill>
+          </a:ln>
+          <a:effectLst/>
+        </p:spPr>
+        <p:style>
+          <a:lnRef idx="1">
+            <a:schemeClr val="accent1"/>
+          </a:lnRef>
+          <a:fillRef idx="3">
+            <a:schemeClr val="accent1"/>
+          </a:fillRef>
+          <a:effectRef idx="2">
+            <a:schemeClr val="accent1"/>
+          </a:effectRef>
+          <a:fontRef idx="minor">
+            <a:schemeClr val="lt1"/>
+          </a:fontRef>
+        </p:style>
+        <p:txBody>
+          <a:bodyPr rtlCol="0" anchor="ctr" wrap="square" lIns="182880" rIns="182880"/>
+          <a:lstStyle/>
+          <a:p>
+            <a:pPr algn="l">
+              <a:lnSpc>
+                <a:spcPct val="125000"/>
+              </a:lnSpc>
+              <a:spcAft>
+                <a:spcPts val="0"/>
+              </a:spcAft>
+            </a:pPr>
+            <a:r>
+              <a:rPr sz="1500" b="0">
+                <a:solidFill>
+                  <a:srgbClr val="166534"/>
+                </a:solidFill>
+              </a:rPr>
+              <a:t>Une </a:t>
+            </a:r>
+            <a:r>
+              <a:rPr sz="1500" b="1">
+                <a:solidFill>
+                  <a:srgbClr val="166534"/>
+                </a:solidFill>
+              </a:rPr>
+              <a:t>garde attribuée (vert)</a:t>
+            </a:r>
+            <a:r>
+              <a:rPr sz="1500" b="0">
+                <a:solidFill>
+                  <a:srgbClr val="166534"/>
+                </a:solidFill>
+              </a:rPr>
+              <a:t> prime toujours : si un vœu tombe sur ce jour, la case reste verte.</a:t>
+            </a:r>
+          </a:p>
+        </p:txBody>
+      </p:sp>
+    </p:spTree>
+  </p:cSld>
+  <p:clrMapOvr>
+    <a:masterClrMapping/>
+  </p:clrMapOvr>
+</p:sld>
+</file>
+
+<file path=ppt/slides/slide13.xml><?xml version="1.0" encoding="utf-8"?>
+<p:sld xmlns:a="http://schemas.openxmlformats.org/drawingml/2006/main" xmlns:p="http://schemas.openxmlformats.org/presentationml/2006/main" xmlns:r="http://schemas.openxmlformats.org/officeDocument/2006/relationships">
+  <p:cSld>
+    <p:spTree>
+      <p:nvGrpSpPr>
+        <p:cNvPr id="1" name=""/>
+        <p:cNvGrpSpPr/>
+        <p:nvPr/>
+      </p:nvGrpSpPr>
+      <p:grpSpPr/>
+      <p:sp>
+        <p:nvSpPr>
+          <p:cNvPr id="2" name="TextBox 1"/>
+          <p:cNvSpPr txBox="1"/>
+          <p:nvPr/>
+        </p:nvSpPr>
+        <p:spPr>
+          <a:xfrm>
+            <a:off x="640080" y="457200"/>
+            <a:ext cx="10972800" cy="457200"/>
+          </a:xfrm>
+          <a:prstGeom prst="rect">
+            <a:avLst/>
+          </a:prstGeom>
+          <a:noFill/>
+        </p:spPr>
+        <p:txBody>
+          <a:bodyPr wrap="square" anchor="t">
+            <a:spAutoFit/>
+          </a:bodyPr>
+          <a:lstStyle/>
+          <a:p>
+            <a:pPr algn="l">
+              <a:lnSpc>
+                <a:spcPct val="120000"/>
+              </a:lnSpc>
+              <a:spcAft>
+                <a:spcPts val="0"/>
+              </a:spcAft>
+            </a:pPr>
+            <a:r>
+              <a:rPr sz="1300" b="1">
+                <a:solidFill>
+                  <a:srgbClr val="2563EB"/>
+                </a:solidFill>
+              </a:rPr>
               <a:t>C'EST TOUT !</a:t>
             </a:r>
           </a:p>
@@ -5192,7 +6204,7 @@
                   <a:srgbClr val="2563EB"/>
                 </a:solidFill>
               </a:rPr>
-              <a:t>ÉTAPE 1 · COMPTE</a:t>
+              <a:t>LE PRINCIPE</a:t>
             </a:r>
           </a:p>
         </p:txBody>
@@ -5233,7 +6245,7 @@
                   <a:srgbClr val="0F172A"/>
                 </a:solidFill>
               </a:rPr>
-              <a:t>Créer son compte</a:t>
+              <a:t>Des dates « choisissables » calculées à chaque tour</a:t>
             </a:r>
           </a:p>
         </p:txBody>
@@ -5246,8 +6258,8 @@
         </p:nvSpPr>
         <p:spPr>
           <a:xfrm>
-            <a:off x="640080" y="2011680"/>
-            <a:ext cx="6035040" cy="4572000"/>
+            <a:off x="640080" y="1920240"/>
+            <a:ext cx="6400800" cy="1280160"/>
           </a:xfrm>
           <a:prstGeom prst="rect">
             <a:avLst/>
@@ -5262,59 +6274,108 @@
           <a:p>
             <a:pPr algn="l">
               <a:lnSpc>
+                <a:spcPct val="135000"/>
+              </a:lnSpc>
+              <a:spcAft>
+                <a:spcPts val="800"/>
+              </a:spcAft>
+            </a:pPr>
+            <a:r>
+              <a:rPr sz="1700" b="0">
+                <a:solidFill>
+                  <a:srgbClr val="64748B"/>
+                </a:solidFill>
+              </a:rPr>
+              <a:t>Les gardes se choisissent </a:t>
+            </a:r>
+            <a:r>
+              <a:rPr sz="1700" b="1">
+                <a:solidFill>
+                  <a:srgbClr val="64748B"/>
+                </a:solidFill>
+              </a:rPr>
+              <a:t>à tour de rôle</a:t>
+            </a:r>
+            <a:r>
+              <a:rPr sz="1700" b="0">
+                <a:solidFill>
+                  <a:srgbClr val="64748B"/>
+                </a:solidFill>
+              </a:rPr>
+              <a:t>. À votre tour, l'application </a:t>
+            </a:r>
+            <a:r>
+              <a:rPr sz="1700" b="1">
+                <a:solidFill>
+                  <a:srgbClr val="64748B"/>
+                </a:solidFill>
+              </a:rPr>
+              <a:t>croise trois informations</a:t>
+            </a:r>
+            <a:r>
+              <a:rPr sz="1700" b="0">
+                <a:solidFill>
+                  <a:srgbClr val="64748B"/>
+                </a:solidFill>
+              </a:rPr>
+              <a:t> pour ne mettre en avant que les dates qui conviennent — un gain de temps et moins d'erreurs.</a:t>
+            </a:r>
+          </a:p>
+        </p:txBody>
+      </p:sp>
+      <p:sp>
+        <p:nvSpPr>
+          <p:cNvPr id="5" name="TextBox 4"/>
+          <p:cNvSpPr txBox="1"/>
+          <p:nvPr/>
+        </p:nvSpPr>
+        <p:spPr>
+          <a:xfrm>
+            <a:off x="640080" y="3063240"/>
+            <a:ext cx="6400800" cy="4572000"/>
+          </a:xfrm>
+          <a:prstGeom prst="rect">
+            <a:avLst/>
+          </a:prstGeom>
+          <a:noFill/>
+        </p:spPr>
+        <p:txBody>
+          <a:bodyPr wrap="square" anchor="t">
+            <a:spAutoFit/>
+          </a:bodyPr>
+          <a:lstStyle/>
+          <a:p>
+            <a:pPr algn="l">
+              <a:lnSpc>
                 <a:spcPct val="125000"/>
               </a:lnSpc>
               <a:spcAft>
-                <a:spcPts val="1400"/>
-              </a:spcAft>
-            </a:pPr>
-            <a:r>
-              <a:rPr sz="1800">
-                <a:solidFill>
-                  <a:srgbClr val="0F172A"/>
-                </a:solidFill>
-              </a:rPr>
-              <a:t>1.  </a:t>
-            </a:r>
-            <a:r>
-              <a:rPr sz="1800" b="0">
-                <a:solidFill>
-                  <a:srgbClr val="0F172A"/>
-                </a:solidFill>
-              </a:rPr>
-              <a:t>Saisir un </a:t>
-            </a:r>
-            <a:r>
-              <a:rPr sz="1800" b="1">
-                <a:solidFill>
-                  <a:srgbClr val="0F172A"/>
-                </a:solidFill>
-              </a:rPr>
-              <a:t>email</a:t>
-            </a:r>
-            <a:r>
-              <a:rPr sz="1800" b="0">
-                <a:solidFill>
-                  <a:srgbClr val="0F172A"/>
-                </a:solidFill>
-              </a:rPr>
-              <a:t> et un </a:t>
-            </a:r>
-            <a:r>
-              <a:rPr sz="1800" b="1">
-                <a:solidFill>
-                  <a:srgbClr val="0F172A"/>
-                </a:solidFill>
-              </a:rPr>
-              <a:t>mot de passe</a:t>
-            </a:r>
-            <a:r>
-              <a:rPr sz="1800" b="0">
-                <a:solidFill>
-                  <a:srgbClr val="0F172A"/>
-                </a:solidFill>
-              </a:rPr>
-              <a:t>.</a:t>
+                <a:spcPts val="800"/>
+              </a:spcAft>
+            </a:pPr>
+            <a:r>
+              <a:rPr sz="1500">
+                <a:solidFill>
+                  <a:srgbClr val="0F172A"/>
+                </a:solidFill>
+              </a:rPr>
+              <a:t>🚫  </a:t>
+            </a:r>
+            <a:r>
+              <a:rPr sz="1500" b="1">
+                <a:solidFill>
+                  <a:srgbClr val="0F172A"/>
+                </a:solidFill>
+              </a:rPr>
+              <a:t>Vos indispos</a:t>
+            </a:r>
+            <a:r>
+              <a:rPr sz="1500" b="0">
+                <a:solidFill>
+                  <a:srgbClr val="0F172A"/>
+                </a:solidFill>
+              </a:rPr>
+              <a:t> — les jours impossibles sont écartés.</a:t>
             </a:r>
           </a:p>
           <a:p>
@@ -5323,40 +6384,32 @@
                 <a:spcPct val="125000"/>
               </a:lnSpc>
               <a:spcAft>
-                <a:spcPts val="1400"/>
-              </a:spcAft>
-            </a:pPr>
-            <a:r>
-              <a:rPr sz="1800">
-                <a:solidFill>
-                  <a:srgbClr val="0F172A"/>
-                </a:solidFill>
-              </a:rPr>
-              <a:t>2.  </a:t>
-            </a:r>
-            <a:r>
-              <a:rPr sz="1800" b="0">
-                <a:solidFill>
-                  <a:srgbClr val="0F172A"/>
-                </a:solidFill>
-              </a:rPr>
-              <a:t>Cliquer sur </a:t>
-            </a:r>
-            <a:r>
-              <a:rPr sz="1800" b="1">
-                <a:solidFill>
-                  <a:srgbClr val="0F172A"/>
-                </a:solidFill>
-              </a:rPr>
-              <a:t>« Créer un compte »</a:t>
-            </a:r>
-            <a:r>
-              <a:rPr sz="1800" b="0">
-                <a:solidFill>
-                  <a:srgbClr val="0F172A"/>
-                </a:solidFill>
-              </a:rPr>
-              <a:t> (la première fois seulement).</a:t>
+                <a:spcPts val="800"/>
+              </a:spcAft>
+            </a:pPr>
+            <a:r>
+              <a:rPr sz="1500">
+                <a:solidFill>
+                  <a:srgbClr val="0F172A"/>
+                </a:solidFill>
+              </a:rPr>
+              <a:t>🎯  </a:t>
+            </a:r>
+            <a:r>
+              <a:rPr sz="1500" b="1">
+                <a:solidFill>
+                  <a:srgbClr val="0F172A"/>
+                </a:solidFill>
+              </a:rPr>
+              <a:t>Vos objectifs</a:t>
+            </a:r>
+            <a:r>
+              <a:rPr sz="1500" b="0">
+                <a:solidFill>
+                  <a:srgbClr val="0F172A"/>
+                </a:solidFill>
+              </a:rPr>
+              <a:t> — combien de gardes, et sur quels sites.</a:t>
             </a:r>
           </a:p>
           <a:p>
@@ -5365,101 +6418,66 @@
                 <a:spcPct val="125000"/>
               </a:lnSpc>
               <a:spcAft>
-                <a:spcPts val="1400"/>
-              </a:spcAft>
-            </a:pPr>
-            <a:r>
-              <a:rPr sz="1800">
-                <a:solidFill>
-                  <a:srgbClr val="0F172A"/>
-                </a:solidFill>
-              </a:rPr>
-              <a:t>3.  </a:t>
-            </a:r>
-            <a:r>
-              <a:rPr sz="1800" b="0">
-                <a:solidFill>
-                  <a:srgbClr val="0F172A"/>
-                </a:solidFill>
-              </a:rPr>
-              <a:t>Les fois suivantes : </a:t>
-            </a:r>
-            <a:r>
-              <a:rPr sz="1800" b="1">
-                <a:solidFill>
-                  <a:srgbClr val="0F172A"/>
-                </a:solidFill>
-              </a:rPr>
-              <a:t>« Se connecter »</a:t>
-            </a:r>
-            <a:r>
-              <a:rPr sz="1800" b="0">
-                <a:solidFill>
-                  <a:srgbClr val="0F172A"/>
-                </a:solidFill>
-              </a:rPr>
-              <a:t> avec les mêmes identifiants.</a:t>
-            </a:r>
-          </a:p>
-        </p:txBody>
-      </p:sp>
-      <p:sp>
-        <p:nvSpPr>
-          <p:cNvPr id="5" name="Rounded Rectangle 4"/>
-          <p:cNvSpPr/>
-          <p:nvPr/>
-        </p:nvSpPr>
-        <p:spPr>
-          <a:xfrm>
-            <a:off x="640080" y="4572000"/>
-            <a:ext cx="6035040" cy="914400"/>
-          </a:xfrm>
-          <a:prstGeom prst="roundRect">
-            <a:avLst/>
-          </a:prstGeom>
-          <a:solidFill>
-            <a:srgbClr val="EFF6FF"/>
-          </a:solidFill>
-          <a:ln w="12700">
-            <a:solidFill>
-              <a:srgbClr val="BFDBFE"/>
-            </a:solidFill>
-          </a:ln>
-          <a:effectLst/>
-        </p:spPr>
-        <p:style>
-          <a:lnRef idx="1">
-            <a:schemeClr val="accent1"/>
-          </a:lnRef>
-          <a:fillRef idx="3">
-            <a:schemeClr val="accent1"/>
-          </a:fillRef>
-          <a:effectRef idx="2">
-            <a:schemeClr val="accent1"/>
-          </a:effectRef>
-          <a:fontRef idx="minor">
-            <a:schemeClr val="lt1"/>
-          </a:fontRef>
-        </p:style>
-        <p:txBody>
-          <a:bodyPr rtlCol="0" anchor="ctr" wrap="square" lIns="182880" rIns="182880"/>
-          <a:lstStyle/>
+                <a:spcPts val="800"/>
+              </a:spcAft>
+            </a:pPr>
+            <a:r>
+              <a:rPr sz="1500">
+                <a:solidFill>
+                  <a:srgbClr val="0F172A"/>
+                </a:solidFill>
+              </a:rPr>
+              <a:t>📋  </a:t>
+            </a:r>
+            <a:r>
+              <a:rPr sz="1500" b="1">
+                <a:solidFill>
+                  <a:srgbClr val="0F172A"/>
+                </a:solidFill>
+              </a:rPr>
+              <a:t>Les règles du tour</a:t>
+            </a:r>
+            <a:r>
+              <a:rPr sz="1500" b="0">
+                <a:solidFill>
+                  <a:srgbClr val="0F172A"/>
+                </a:solidFill>
+              </a:rPr>
+              <a:t> — ce qui peut être pris à ce tour (semaine, WE/férié…).</a:t>
+            </a:r>
+          </a:p>
           <a:p>
             <a:pPr algn="l">
               <a:lnSpc>
                 <a:spcPct val="125000"/>
               </a:lnSpc>
               <a:spcAft>
-                <a:spcPts val="0"/>
-              </a:spcAft>
-            </a:pPr>
+                <a:spcPts val="800"/>
+              </a:spcAft>
+            </a:pPr>
+            <a:r>
+              <a:rPr sz="1500">
+                <a:solidFill>
+                  <a:srgbClr val="0F172A"/>
+                </a:solidFill>
+              </a:rPr>
+              <a:t>🛏️  </a:t>
+            </a:r>
+            <a:r>
+              <a:rPr sz="1500" b="1">
+                <a:solidFill>
+                  <a:srgbClr val="0F172A"/>
+                </a:solidFill>
+              </a:rPr>
+              <a:t>Veille et lendemain d'une garde déjà prise</a:t>
+            </a:r>
             <a:r>
               <a:rPr sz="1500" b="0">
                 <a:solidFill>
-                  <a:srgbClr val="1E3A8A"/>
-                </a:solidFill>
-              </a:rPr>
-              <a:t>Un seul compte par personne — le mot de passe est à conserver précieusement.</a:t>
+                  <a:srgbClr val="0F172A"/>
+                </a:solidFill>
+              </a:rPr>
+              <a:t> — écartés aussi (jamais deux gardes collées).</a:t>
             </a:r>
           </a:p>
         </p:txBody>
@@ -5472,14 +6490,14 @@
         </p:nvSpPr>
         <p:spPr>
           <a:xfrm>
-            <a:off x="7498079" y="2011680"/>
-            <a:ext cx="3749039" cy="3291840"/>
+            <a:off x="7955279" y="1783080"/>
+            <a:ext cx="3200400" cy="457200"/>
           </a:xfrm>
           <a:prstGeom prst="roundRect">
             <a:avLst/>
           </a:prstGeom>
           <a:solidFill>
-            <a:srgbClr val="FFFFFF"/>
+            <a:srgbClr val="F1F5F9"/>
           </a:solidFill>
           <a:ln w="12700">
             <a:solidFill>
@@ -5503,33 +6521,7 @@
           </a:fontRef>
         </p:style>
         <p:txBody>
-          <a:bodyPr rtlCol="0" anchor="ctr"/>
-          <a:lstStyle/>
-          <a:p>
-            <a:pPr algn="ctr"/>
-          </a:p>
-        </p:txBody>
-      </p:sp>
-      <p:sp>
-        <p:nvSpPr>
-          <p:cNvPr id="7" name="TextBox 6"/>
-          <p:cNvSpPr txBox="1"/>
-          <p:nvPr/>
-        </p:nvSpPr>
-        <p:spPr>
-          <a:xfrm>
-            <a:off x="7772400" y="2240280"/>
-            <a:ext cx="3291840" cy="640080"/>
-          </a:xfrm>
-          <a:prstGeom prst="rect">
-            <a:avLst/>
-          </a:prstGeom>
-          <a:noFill/>
-        </p:spPr>
-        <p:txBody>
-          <a:bodyPr wrap="square" anchor="t">
-            <a:spAutoFit/>
-          </a:bodyPr>
+          <a:bodyPr rtlCol="0" anchor="ctr" lIns="137160"/>
           <a:lstStyle/>
           <a:p>
             <a:pPr algn="l">
@@ -5541,95 +6533,36 @@
               </a:spcAft>
             </a:pPr>
             <a:r>
-              <a:rPr sz="2000" b="1">
-                <a:solidFill>
-                  <a:srgbClr val="0F172A"/>
-                </a:solidFill>
-              </a:rPr>
-              <a:t>Choix Garde</a:t>
-            </a:r>
-          </a:p>
-          <a:p>
-            <a:pPr algn="l">
-              <a:lnSpc>
-                <a:spcPct val="120000"/>
-              </a:lnSpc>
-              <a:spcAft>
-                <a:spcPts val="0"/>
-              </a:spcAft>
-            </a:pPr>
-            <a:r>
-              <a:rPr sz="1200" b="0">
-                <a:solidFill>
-                  <a:srgbClr val="64748B"/>
-                </a:solidFill>
-              </a:rPr>
-              <a:t>juin – sept 2026</a:t>
-            </a:r>
-          </a:p>
-        </p:txBody>
-      </p:sp>
-      <p:sp>
-        <p:nvSpPr>
-          <p:cNvPr id="8" name="TextBox 7"/>
-          <p:cNvSpPr txBox="1"/>
-          <p:nvPr/>
-        </p:nvSpPr>
-        <p:spPr>
-          <a:xfrm>
-            <a:off x="7772400" y="2971800"/>
-            <a:ext cx="3291840" cy="1463040"/>
-          </a:xfrm>
-          <a:prstGeom prst="rect">
-            <a:avLst/>
-          </a:prstGeom>
-          <a:noFill/>
-        </p:spPr>
-        <p:txBody>
-          <a:bodyPr wrap="square" anchor="t">
-            <a:spAutoFit/>
-          </a:bodyPr>
-          <a:lstStyle/>
-          <a:p>
-            <a:pPr algn="l">
-              <a:lnSpc>
-                <a:spcPct val="120000"/>
-              </a:lnSpc>
-              <a:spcAft>
-                <a:spcPts val="200"/>
-              </a:spcAft>
-            </a:pPr>
-            <a:r>
-              <a:rPr sz="1200" b="0">
-                <a:solidFill>
-                  <a:srgbClr val="475569"/>
-                </a:solidFill>
-              </a:rPr>
-              <a:t>Email</a:t>
-            </a:r>
-          </a:p>
-        </p:txBody>
-      </p:sp>
-      <p:sp>
-        <p:nvSpPr>
-          <p:cNvPr id="9" name="Rounded Rectangle 8"/>
+              <a:rPr sz="1400" b="1">
+                <a:solidFill>
+                  <a:srgbClr val="0F172A"/>
+                </a:solidFill>
+              </a:rPr>
+              <a:t>🚫  Vos indispos</a:t>
+            </a:r>
+          </a:p>
+        </p:txBody>
+      </p:sp>
+      <p:sp>
+        <p:nvSpPr>
+          <p:cNvPr id="7" name="Rounded Rectangle 6"/>
           <p:cNvSpPr/>
           <p:nvPr/>
         </p:nvSpPr>
         <p:spPr>
           <a:xfrm>
-            <a:off x="7772400" y="3291840"/>
-            <a:ext cx="3200400" cy="320040"/>
+            <a:off x="7955279" y="2331720"/>
+            <a:ext cx="3200400" cy="457200"/>
           </a:xfrm>
           <a:prstGeom prst="roundRect">
             <a:avLst/>
           </a:prstGeom>
           <a:solidFill>
-            <a:srgbClr val="FFFFFF"/>
+            <a:srgbClr val="F1F5F9"/>
           </a:solidFill>
           <a:ln w="12700">
             <a:solidFill>
-              <a:srgbClr val="CBD5E1"/>
+              <a:srgbClr val="E2E8F0"/>
             </a:solidFill>
           </a:ln>
           <a:effectLst/>
@@ -5649,33 +6582,7 @@
           </a:fontRef>
         </p:style>
         <p:txBody>
-          <a:bodyPr rtlCol="0" anchor="ctr"/>
-          <a:lstStyle/>
-          <a:p>
-            <a:pPr algn="ctr"/>
-          </a:p>
-        </p:txBody>
-      </p:sp>
-      <p:sp>
-        <p:nvSpPr>
-          <p:cNvPr id="10" name="TextBox 9"/>
-          <p:cNvSpPr txBox="1"/>
-          <p:nvPr/>
-        </p:nvSpPr>
-        <p:spPr>
-          <a:xfrm>
-            <a:off x="7772400" y="3749039"/>
-            <a:ext cx="3291840" cy="548640"/>
-          </a:xfrm>
-          <a:prstGeom prst="rect">
-            <a:avLst/>
-          </a:prstGeom>
-          <a:noFill/>
-        </p:spPr>
-        <p:txBody>
-          <a:bodyPr wrap="square" anchor="t">
-            <a:spAutoFit/>
-          </a:bodyPr>
+          <a:bodyPr rtlCol="0" anchor="ctr" lIns="137160"/>
           <a:lstStyle/>
           <a:p>
             <a:pPr algn="l">
@@ -5683,40 +6590,40 @@
                 <a:spcPct val="120000"/>
               </a:lnSpc>
               <a:spcAft>
-                <a:spcPts val="200"/>
-              </a:spcAft>
-            </a:pPr>
-            <a:r>
-              <a:rPr sz="1200" b="0">
-                <a:solidFill>
-                  <a:srgbClr val="475569"/>
-                </a:solidFill>
-              </a:rPr>
-              <a:t>Mot de passe</a:t>
-            </a:r>
-          </a:p>
-        </p:txBody>
-      </p:sp>
-      <p:sp>
-        <p:nvSpPr>
-          <p:cNvPr id="11" name="Rounded Rectangle 10"/>
+                <a:spcPts val="0"/>
+              </a:spcAft>
+            </a:pPr>
+            <a:r>
+              <a:rPr sz="1400" b="1">
+                <a:solidFill>
+                  <a:srgbClr val="0F172A"/>
+                </a:solidFill>
+              </a:rPr>
+              <a:t>🎯  Vos objectifs</a:t>
+            </a:r>
+          </a:p>
+        </p:txBody>
+      </p:sp>
+      <p:sp>
+        <p:nvSpPr>
+          <p:cNvPr id="8" name="Rounded Rectangle 7"/>
           <p:cNvSpPr/>
           <p:nvPr/>
         </p:nvSpPr>
         <p:spPr>
           <a:xfrm>
-            <a:off x="7772400" y="4069080"/>
-            <a:ext cx="3200400" cy="320040"/>
+            <a:off x="7955279" y="2880360"/>
+            <a:ext cx="3200400" cy="457200"/>
           </a:xfrm>
           <a:prstGeom prst="roundRect">
             <a:avLst/>
           </a:prstGeom>
           <a:solidFill>
-            <a:srgbClr val="FFFFFF"/>
+            <a:srgbClr val="F1F5F9"/>
           </a:solidFill>
           <a:ln w="12700">
             <a:solidFill>
-              <a:srgbClr val="CBD5E1"/>
+              <a:srgbClr val="E2E8F0"/>
             </a:solidFill>
           </a:ln>
           <a:effectLst/>
@@ -5736,32 +6643,49 @@
           </a:fontRef>
         </p:style>
         <p:txBody>
-          <a:bodyPr rtlCol="0" anchor="ctr"/>
-          <a:lstStyle/>
-          <a:p>
-            <a:pPr algn="ctr"/>
-          </a:p>
-        </p:txBody>
-      </p:sp>
-      <p:sp>
-        <p:nvSpPr>
-          <p:cNvPr id="12" name="Rounded Rectangle 11"/>
+          <a:bodyPr rtlCol="0" anchor="ctr" lIns="137160"/>
+          <a:lstStyle/>
+          <a:p>
+            <a:pPr algn="l">
+              <a:lnSpc>
+                <a:spcPct val="120000"/>
+              </a:lnSpc>
+              <a:spcAft>
+                <a:spcPts val="0"/>
+              </a:spcAft>
+            </a:pPr>
+            <a:r>
+              <a:rPr sz="1400" b="1">
+                <a:solidFill>
+                  <a:srgbClr val="0F172A"/>
+                </a:solidFill>
+              </a:rPr>
+              <a:t>📋  Règles du tour</a:t>
+            </a:r>
+          </a:p>
+        </p:txBody>
+      </p:sp>
+      <p:sp>
+        <p:nvSpPr>
+          <p:cNvPr id="9" name="Rounded Rectangle 8"/>
           <p:cNvSpPr/>
           <p:nvPr/>
         </p:nvSpPr>
         <p:spPr>
           <a:xfrm>
-            <a:off x="7772400" y="4572000"/>
-            <a:ext cx="1554480" cy="457200"/>
+            <a:off x="7955279" y="3429000"/>
+            <a:ext cx="3200400" cy="457200"/>
           </a:xfrm>
           <a:prstGeom prst="roundRect">
             <a:avLst/>
           </a:prstGeom>
           <a:solidFill>
-            <a:srgbClr val="2563EB"/>
+            <a:srgbClr val="F1F5F9"/>
           </a:solidFill>
-          <a:ln>
-            <a:noFill/>
+          <a:ln w="12700">
+            <a:solidFill>
+              <a:srgbClr val="E2E8F0"/>
+            </a:solidFill>
           </a:ln>
           <a:effectLst/>
         </p:spPr>
@@ -5780,7 +6704,48 @@
           </a:fontRef>
         </p:style>
         <p:txBody>
-          <a:bodyPr rtlCol="0" anchor="ctr"/>
+          <a:bodyPr rtlCol="0" anchor="ctr" lIns="137160"/>
+          <a:lstStyle/>
+          <a:p>
+            <a:pPr algn="l">
+              <a:lnSpc>
+                <a:spcPct val="120000"/>
+              </a:lnSpc>
+              <a:spcAft>
+                <a:spcPts val="0"/>
+              </a:spcAft>
+            </a:pPr>
+            <a:r>
+              <a:rPr sz="1400" b="1">
+                <a:solidFill>
+                  <a:srgbClr val="0F172A"/>
+                </a:solidFill>
+              </a:rPr>
+              <a:t>🛏️  Veille &amp; lendemain de garde</a:t>
+            </a:r>
+          </a:p>
+        </p:txBody>
+      </p:sp>
+      <p:sp>
+        <p:nvSpPr>
+          <p:cNvPr id="10" name="TextBox 9"/>
+          <p:cNvSpPr txBox="1"/>
+          <p:nvPr/>
+        </p:nvSpPr>
+        <p:spPr>
+          <a:xfrm>
+            <a:off x="7955279" y="3931920"/>
+            <a:ext cx="3200400" cy="411480"/>
+          </a:xfrm>
+          <a:prstGeom prst="rect">
+            <a:avLst/>
+          </a:prstGeom>
+          <a:noFill/>
+        </p:spPr>
+        <p:txBody>
+          <a:bodyPr wrap="square" anchor="t">
+            <a:spAutoFit/>
+          </a:bodyPr>
           <a:lstStyle/>
           <a:p>
             <a:pPr algn="ctr">
@@ -5792,36 +6757,36 @@
               </a:spcAft>
             </a:pPr>
             <a:r>
-              <a:rPr sz="1200" b="1">
-                <a:solidFill>
-                  <a:srgbClr val="FFFFFF"/>
-                </a:solidFill>
-              </a:rPr>
-              <a:t>Se connecter</a:t>
-            </a:r>
-          </a:p>
-        </p:txBody>
-      </p:sp>
-      <p:sp>
-        <p:nvSpPr>
-          <p:cNvPr id="13" name="Rounded Rectangle 12"/>
+              <a:rPr sz="2400" b="0">
+                <a:solidFill>
+                  <a:srgbClr val="94A3B8"/>
+                </a:solidFill>
+              </a:rPr>
+              <a:t>↓</a:t>
+            </a:r>
+          </a:p>
+        </p:txBody>
+      </p:sp>
+      <p:sp>
+        <p:nvSpPr>
+          <p:cNvPr id="11" name="Rounded Rectangle 10"/>
           <p:cNvSpPr/>
           <p:nvPr/>
         </p:nvSpPr>
         <p:spPr>
           <a:xfrm>
-            <a:off x="9418320" y="4572000"/>
-            <a:ext cx="1554480" cy="457200"/>
+            <a:off x="7955279" y="4480559"/>
+            <a:ext cx="3200400" cy="594360"/>
           </a:xfrm>
           <a:prstGeom prst="roundRect">
             <a:avLst/>
           </a:prstGeom>
           <a:solidFill>
-            <a:srgbClr val="FFFFFF"/>
+            <a:srgbClr val="EFF6FF"/>
           </a:solidFill>
-          <a:ln w="12700">
+          <a:ln w="25400">
             <a:solidFill>
-              <a:srgbClr val="CBD5E1"/>
+              <a:srgbClr val="2563EB"/>
             </a:solidFill>
           </a:ln>
           <a:effectLst/>
@@ -5853,12 +6818,69 @@
               </a:spcAft>
             </a:pPr>
             <a:r>
-              <a:rPr sz="1200" b="1">
-                <a:solidFill>
-                  <a:srgbClr val="0F172A"/>
-                </a:solidFill>
-              </a:rPr>
-              <a:t>Créer un compte</a:t>
+              <a:rPr sz="1700" b="1">
+                <a:solidFill>
+                  <a:srgbClr val="1D4ED8"/>
+                </a:solidFill>
+              </a:rPr>
+              <a:t>🔵  Dates choisissables</a:t>
+            </a:r>
+          </a:p>
+        </p:txBody>
+      </p:sp>
+      <p:sp>
+        <p:nvSpPr>
+          <p:cNvPr id="12" name="TextBox 11"/>
+          <p:cNvSpPr txBox="1"/>
+          <p:nvPr/>
+        </p:nvSpPr>
+        <p:spPr>
+          <a:xfrm>
+            <a:off x="7955279" y="5212079"/>
+            <a:ext cx="3200400" cy="365760"/>
+          </a:xfrm>
+          <a:prstGeom prst="rect">
+            <a:avLst/>
+          </a:prstGeom>
+          <a:noFill/>
+        </p:spPr>
+        <p:txBody>
+          <a:bodyPr wrap="square" anchor="t">
+            <a:spAutoFit/>
+          </a:bodyPr>
+          <a:lstStyle/>
+          <a:p>
+            <a:pPr algn="ctr">
+              <a:lnSpc>
+                <a:spcPct val="120000"/>
+              </a:lnSpc>
+              <a:spcAft>
+                <a:spcPts val="0"/>
+              </a:spcAft>
+            </a:pPr>
+            <a:r>
+              <a:rPr sz="1300" b="0">
+                <a:solidFill>
+                  <a:srgbClr val="64748B"/>
+                </a:solidFill>
+              </a:rPr>
+              <a:t>Le choix est </a:t>
+            </a:r>
+            <a:r>
+              <a:rPr sz="1300" b="1">
+                <a:solidFill>
+                  <a:srgbClr val="64748B"/>
+                </a:solidFill>
+              </a:rPr>
+              <a:t>guidé</a:t>
+            </a:r>
+            <a:r>
+              <a:rPr sz="1300" b="0">
+                <a:solidFill>
+                  <a:srgbClr val="64748B"/>
+                </a:solidFill>
+              </a:rPr>
+              <a:t> et plus rapide.</a:t>
             </a:r>
           </a:p>
         </p:txBody>
@@ -5917,7 +6939,7 @@
                   <a:srgbClr val="2563EB"/>
                 </a:solidFill>
               </a:rPr>
-              <a:t>ÉTAPE 1 · IDENTITÉ</a:t>
+              <a:t>ÉTAPE 1 · COMPTE</a:t>
             </a:r>
           </a:p>
         </p:txBody>
@@ -5958,7 +6980,7 @@
                   <a:srgbClr val="0F172A"/>
                 </a:solidFill>
               </a:rPr>
-              <a:t>Première connexion : choisir son nom</a:t>
+              <a:t>Créer son compte</a:t>
             </a:r>
           </a:p>
         </p:txBody>
@@ -5971,8 +6993,8 @@
         </p:nvSpPr>
         <p:spPr>
           <a:xfrm>
-            <a:off x="640080" y="1965960"/>
-            <a:ext cx="6035040" cy="1005840"/>
+            <a:off x="640080" y="2011680"/>
+            <a:ext cx="6035040" cy="4572000"/>
           </a:xfrm>
           <a:prstGeom prst="rect">
             <a:avLst/>
@@ -5987,67 +7009,68 @@
           <a:p>
             <a:pPr algn="l">
               <a:lnSpc>
-                <a:spcPct val="140000"/>
-              </a:lnSpc>
-              <a:spcAft>
-                <a:spcPts val="800"/>
-              </a:spcAft>
-            </a:pPr>
+                <a:spcPct val="125000"/>
+              </a:lnSpc>
+              <a:spcAft>
+                <a:spcPts val="1400"/>
+              </a:spcAft>
+            </a:pPr>
+            <a:r>
+              <a:rPr sz="1800">
+                <a:solidFill>
+                  <a:srgbClr val="0F172A"/>
+                </a:solidFill>
+              </a:rPr>
+              <a:t>1.  </a:t>
+            </a:r>
             <a:r>
               <a:rPr sz="1800" b="0">
                 <a:solidFill>
-                  <a:srgbClr val="64748B"/>
-                </a:solidFill>
-              </a:rPr>
-              <a:t>À la toute première connexion, l'application demande de </a:t>
+                  <a:srgbClr val="0F172A"/>
+                </a:solidFill>
+              </a:rPr>
+              <a:t>Saisir un </a:t>
             </a:r>
             <a:r>
               <a:rPr sz="1800" b="1">
                 <a:solidFill>
-                  <a:srgbClr val="64748B"/>
-                </a:solidFill>
-              </a:rPr>
-              <a:t>s'associer à son nom</a:t>
+                  <a:srgbClr val="0F172A"/>
+                </a:solidFill>
+              </a:rPr>
+              <a:t>email</a:t>
             </a:r>
             <a:r>
               <a:rPr sz="1800" b="0">
                 <a:solidFill>
-                  <a:srgbClr val="64748B"/>
-                </a:solidFill>
-              </a:rPr>
-              <a:t> dans la liste des médecins.</a:t>
-            </a:r>
-          </a:p>
-        </p:txBody>
-      </p:sp>
-      <p:sp>
-        <p:nvSpPr>
-          <p:cNvPr id="5" name="TextBox 4"/>
-          <p:cNvSpPr txBox="1"/>
-          <p:nvPr/>
-        </p:nvSpPr>
-        <p:spPr>
-          <a:xfrm>
-            <a:off x="640080" y="3063240"/>
-            <a:ext cx="6035040" cy="4572000"/>
-          </a:xfrm>
-          <a:prstGeom prst="rect">
-            <a:avLst/>
-          </a:prstGeom>
-          <a:noFill/>
-        </p:spPr>
-        <p:txBody>
-          <a:bodyPr wrap="square" anchor="t">
-            <a:spAutoFit/>
-          </a:bodyPr>
-          <a:lstStyle/>
+                  <a:srgbClr val="0F172A"/>
+                </a:solidFill>
+              </a:rPr>
+              <a:t> et un </a:t>
+            </a:r>
+            <a:r>
+              <a:rPr sz="1800" b="1">
+                <a:solidFill>
+                  <a:srgbClr val="0F172A"/>
+                </a:solidFill>
+              </a:rPr>
+              <a:t>mot de passe</a:t>
+            </a:r>
+            <a:r>
+              <a:rPr sz="1800" b="0">
+                <a:solidFill>
+                  <a:srgbClr val="0F172A"/>
+                </a:solidFill>
+              </a:rPr>
+              <a:t>.</a:t>
+            </a:r>
+          </a:p>
           <a:p>
             <a:pPr algn="l">
               <a:lnSpc>
                 <a:spcPct val="125000"/>
               </a:lnSpc>
               <a:spcAft>
-                <a:spcPts val="1200"/>
+                <a:spcPts val="1400"/>
               </a:spcAft>
             </a:pPr>
             <a:r>
@@ -6056,7 +7079,7 @@
                   <a:srgbClr val="0F172A"/>
                 </a:solidFill>
               </a:rPr>
-              <a:t>1.  </a:t>
+              <a:t>2.  </a:t>
             </a:r>
             <a:r>
               <a:rPr sz="1800" b="0">
@@ -6064,7 +7087,7 @@
                   <a:srgbClr val="0F172A"/>
                 </a:solidFill>
               </a:rPr>
-              <a:t>Sélectionner </a:t>
+              <a:t>Cliquer sur </a:t>
             </a:r>
             <a:r>
               <a:rPr sz="1800" b="1">
@@ -6072,7 +7095,7 @@
                   <a:srgbClr val="0F172A"/>
                 </a:solidFill>
               </a:rPr>
-              <a:t>son nom</a:t>
+              <a:t>« Créer un compte »</a:t>
             </a:r>
             <a:r>
               <a:rPr sz="1800" b="0">
@@ -6080,7 +7103,7 @@
                   <a:srgbClr val="0F172A"/>
                 </a:solidFill>
               </a:rPr>
-              <a:t> dans le menu déroulant.</a:t>
+              <a:t> (la première fois seulement).</a:t>
             </a:r>
           </a:p>
           <a:p>
@@ -6089,7 +7112,7 @@
                 <a:spcPct val="125000"/>
               </a:lnSpc>
               <a:spcAft>
-                <a:spcPts val="1200"/>
+                <a:spcPts val="1400"/>
               </a:spcAft>
             </a:pPr>
             <a:r>
@@ -6098,7 +7121,7 @@
                   <a:srgbClr val="0F172A"/>
                 </a:solidFill>
               </a:rPr>
-              <a:t>2.  </a:t>
+              <a:t>3.  </a:t>
             </a:r>
             <a:r>
               <a:rPr sz="1800" b="0">
@@ -6106,7 +7129,7 @@
                   <a:srgbClr val="0F172A"/>
                 </a:solidFill>
               </a:rPr>
-              <a:t>Cliquer sur </a:t>
+              <a:t>Les fois suivantes : </a:t>
             </a:r>
             <a:r>
               <a:rPr sz="1800" b="1">
@@ -6114,7 +7137,7 @@
                   <a:srgbClr val="0F172A"/>
                 </a:solidFill>
               </a:rPr>
-              <a:t>« Valider »</a:t>
+              <a:t>« Se connecter »</a:t>
             </a:r>
             <a:r>
               <a:rPr sz="1800" b="0">
@@ -6122,31 +7145,31 @@
                   <a:srgbClr val="0F172A"/>
                 </a:solidFill>
               </a:rPr>
-              <a:t>.</a:t>
-            </a:r>
-          </a:p>
-        </p:txBody>
-      </p:sp>
-      <p:sp>
-        <p:nvSpPr>
-          <p:cNvPr id="6" name="Rounded Rectangle 5"/>
+              <a:t> avec les mêmes identifiants.</a:t>
+            </a:r>
+          </a:p>
+        </p:txBody>
+      </p:sp>
+      <p:sp>
+        <p:nvSpPr>
+          <p:cNvPr id="5" name="Rounded Rectangle 4"/>
           <p:cNvSpPr/>
           <p:nvPr/>
         </p:nvSpPr>
         <p:spPr>
           <a:xfrm>
             <a:off x="640080" y="4572000"/>
-            <a:ext cx="6035040" cy="1005840"/>
+            <a:ext cx="6035040" cy="914400"/>
           </a:xfrm>
           <a:prstGeom prst="roundRect">
             <a:avLst/>
           </a:prstGeom>
           <a:solidFill>
-            <a:srgbClr val="FFFBEB"/>
+            <a:srgbClr val="EFF6FF"/>
           </a:solidFill>
           <a:ln w="12700">
             <a:solidFill>
-              <a:srgbClr val="FDE68A"/>
+              <a:srgbClr val="BFDBFE"/>
             </a:solidFill>
           </a:ln>
           <a:effectLst/>
@@ -6180,40 +7203,24 @@
             <a:r>
               <a:rPr sz="1500" b="0">
                 <a:solidFill>
-                  <a:srgbClr val="92400E"/>
-                </a:solidFill>
-              </a:rPr>
-              <a:t>⚠️ Bien sélectionner </a:t>
-            </a:r>
-            <a:r>
-              <a:rPr sz="1500" b="1">
-                <a:solidFill>
-                  <a:srgbClr val="92400E"/>
-                </a:solidFill>
-              </a:rPr>
-              <a:t>son propre</a:t>
-            </a:r>
-            <a:r>
-              <a:rPr sz="1500" b="0">
-                <a:solidFill>
-                  <a:srgbClr val="92400E"/>
-                </a:solidFill>
-              </a:rPr>
-              <a:t> nom : c'est lui qui porte les objectifs, les vœux et les gardes.</a:t>
-            </a:r>
-          </a:p>
-        </p:txBody>
-      </p:sp>
-      <p:sp>
-        <p:nvSpPr>
-          <p:cNvPr id="7" name="Rounded Rectangle 6"/>
+                  <a:srgbClr val="1E3A8A"/>
+                </a:solidFill>
+              </a:rPr>
+              <a:t>Un seul compte par personne — le mot de passe est à conserver précieusement.</a:t>
+            </a:r>
+          </a:p>
+        </p:txBody>
+      </p:sp>
+      <p:sp>
+        <p:nvSpPr>
+          <p:cNvPr id="6" name="Rounded Rectangle 5"/>
           <p:cNvSpPr/>
           <p:nvPr/>
         </p:nvSpPr>
         <p:spPr>
           <a:xfrm>
-            <a:off x="7680960" y="2103120"/>
-            <a:ext cx="3566160" cy="2194560"/>
+            <a:off x="7498079" y="2011680"/>
+            <a:ext cx="3749039" cy="3291840"/>
           </a:xfrm>
           <a:prstGeom prst="roundRect">
             <a:avLst/>
@@ -6252,14 +7259,14 @@
       </p:sp>
       <p:sp>
         <p:nvSpPr>
-          <p:cNvPr id="8" name="TextBox 7"/>
+          <p:cNvPr id="7" name="TextBox 6"/>
           <p:cNvSpPr txBox="1"/>
           <p:nvPr/>
         </p:nvSpPr>
         <p:spPr>
           <a:xfrm>
-            <a:off x="7909560" y="2286000"/>
-            <a:ext cx="3108960" cy="731520"/>
+            <a:off x="7772400" y="2240280"/>
+            <a:ext cx="3291840" cy="640080"/>
           </a:xfrm>
           <a:prstGeom prst="rect">
             <a:avLst/>
@@ -6274,19 +7281,78 @@
           <a:p>
             <a:pPr algn="l">
               <a:lnSpc>
-                <a:spcPct val="130000"/>
+                <a:spcPct val="120000"/>
               </a:lnSpc>
               <a:spcAft>
                 <a:spcPts val="0"/>
               </a:spcAft>
             </a:pPr>
             <a:r>
-              <a:rPr sz="1300" b="0">
+              <a:rPr sz="2000" b="1">
+                <a:solidFill>
+                  <a:srgbClr val="0F172A"/>
+                </a:solidFill>
+              </a:rPr>
+              <a:t>Choix Garde</a:t>
+            </a:r>
+          </a:p>
+          <a:p>
+            <a:pPr algn="l">
+              <a:lnSpc>
+                <a:spcPct val="120000"/>
+              </a:lnSpc>
+              <a:spcAft>
+                <a:spcPts val="0"/>
+              </a:spcAft>
+            </a:pPr>
+            <a:r>
+              <a:rPr sz="1200" b="0">
+                <a:solidFill>
+                  <a:srgbClr val="64748B"/>
+                </a:solidFill>
+              </a:rPr>
+              <a:t>juin – sept 2026</a:t>
+            </a:r>
+          </a:p>
+        </p:txBody>
+      </p:sp>
+      <p:sp>
+        <p:nvSpPr>
+          <p:cNvPr id="8" name="TextBox 7"/>
+          <p:cNvSpPr txBox="1"/>
+          <p:nvPr/>
+        </p:nvSpPr>
+        <p:spPr>
+          <a:xfrm>
+            <a:off x="7772400" y="2971800"/>
+            <a:ext cx="3291840" cy="1463040"/>
+          </a:xfrm>
+          <a:prstGeom prst="rect">
+            <a:avLst/>
+          </a:prstGeom>
+          <a:noFill/>
+        </p:spPr>
+        <p:txBody>
+          <a:bodyPr wrap="square" anchor="t">
+            <a:spAutoFit/>
+          </a:bodyPr>
+          <a:lstStyle/>
+          <a:p>
+            <a:pPr algn="l">
+              <a:lnSpc>
+                <a:spcPct val="120000"/>
+              </a:lnSpc>
+              <a:spcAft>
+                <a:spcPts val="200"/>
+              </a:spcAft>
+            </a:pPr>
+            <a:r>
+              <a:rPr sz="1200" b="0">
                 <a:solidFill>
                   <a:srgbClr val="475569"/>
                 </a:solidFill>
               </a:rPr>
-              <a:t>Première connexion — choisis ton nom dans la liste :</a:t>
+              <a:t>Email</a:t>
             </a:r>
           </a:p>
         </p:txBody>
@@ -6299,8 +7365,8 @@
         </p:nvSpPr>
         <p:spPr>
           <a:xfrm>
-            <a:off x="7909560" y="3063240"/>
-            <a:ext cx="3108960" cy="457200"/>
+            <a:off x="7772400" y="3291840"/>
+            <a:ext cx="3200400" cy="320040"/>
           </a:xfrm>
           <a:prstGeom prst="roundRect">
             <a:avLst/>
@@ -6345,8 +7411,8 @@
         </p:nvSpPr>
         <p:spPr>
           <a:xfrm>
-            <a:off x="8046720" y="3145536"/>
-            <a:ext cx="2834640" cy="365760"/>
+            <a:off x="7772400" y="3749039"/>
+            <a:ext cx="3291840" cy="548640"/>
           </a:xfrm>
           <a:prstGeom prst="rect">
             <a:avLst/>
@@ -6354,7 +7420,7 @@
           <a:noFill/>
         </p:spPr>
         <p:txBody>
-          <a:bodyPr wrap="square" anchor="ctr">
+          <a:bodyPr wrap="square" anchor="t">
             <a:spAutoFit/>
           </a:bodyPr>
           <a:lstStyle/>
@@ -6364,16 +7430,16 @@
                 <a:spcPct val="120000"/>
               </a:lnSpc>
               <a:spcAft>
-                <a:spcPts val="0"/>
-              </a:spcAft>
-            </a:pPr>
-            <a:r>
-              <a:rPr sz="1300" b="0">
-                <a:solidFill>
-                  <a:srgbClr val="0F172A"/>
-                </a:solidFill>
-              </a:rPr>
-              <a:t>Dr Martin  ▾</a:t>
+                <a:spcPts val="200"/>
+              </a:spcAft>
+            </a:pPr>
+            <a:r>
+              <a:rPr sz="1200" b="0">
+                <a:solidFill>
+                  <a:srgbClr val="475569"/>
+                </a:solidFill>
+              </a:rPr>
+              <a:t>Mot de passe</a:t>
             </a:r>
           </a:p>
         </p:txBody>
@@ -6386,8 +7452,54 @@
         </p:nvSpPr>
         <p:spPr>
           <a:xfrm>
-            <a:off x="7909560" y="3703320"/>
-            <a:ext cx="3108960" cy="457200"/>
+            <a:off x="7772400" y="4069080"/>
+            <a:ext cx="3200400" cy="320040"/>
+          </a:xfrm>
+          <a:prstGeom prst="roundRect">
+            <a:avLst/>
+          </a:prstGeom>
+          <a:solidFill>
+            <a:srgbClr val="FFFFFF"/>
+          </a:solidFill>
+          <a:ln w="12700">
+            <a:solidFill>
+              <a:srgbClr val="CBD5E1"/>
+            </a:solidFill>
+          </a:ln>
+          <a:effectLst/>
+        </p:spPr>
+        <p:style>
+          <a:lnRef idx="1">
+            <a:schemeClr val="accent1"/>
+          </a:lnRef>
+          <a:fillRef idx="3">
+            <a:schemeClr val="accent1"/>
+          </a:fillRef>
+          <a:effectRef idx="2">
+            <a:schemeClr val="accent1"/>
+          </a:effectRef>
+          <a:fontRef idx="minor">
+            <a:schemeClr val="lt1"/>
+          </a:fontRef>
+        </p:style>
+        <p:txBody>
+          <a:bodyPr rtlCol="0" anchor="ctr"/>
+          <a:lstStyle/>
+          <a:p>
+            <a:pPr algn="ctr"/>
+          </a:p>
+        </p:txBody>
+      </p:sp>
+      <p:sp>
+        <p:nvSpPr>
+          <p:cNvPr id="12" name="Rounded Rectangle 11"/>
+          <p:cNvSpPr/>
+          <p:nvPr/>
+        </p:nvSpPr>
+        <p:spPr>
+          <a:xfrm>
+            <a:off x="7772400" y="4572000"/>
+            <a:ext cx="1554480" cy="457200"/>
           </a:xfrm>
           <a:prstGeom prst="roundRect">
             <a:avLst/>
@@ -6427,12 +7539,73 @@
               </a:spcAft>
             </a:pPr>
             <a:r>
-              <a:rPr sz="1300" b="1">
+              <a:rPr sz="1200" b="1">
                 <a:solidFill>
                   <a:srgbClr val="FFFFFF"/>
                 </a:solidFill>
               </a:rPr>
-              <a:t>Valider</a:t>
+              <a:t>Se connecter</a:t>
+            </a:r>
+          </a:p>
+        </p:txBody>
+      </p:sp>
+      <p:sp>
+        <p:nvSpPr>
+          <p:cNvPr id="13" name="Rounded Rectangle 12"/>
+          <p:cNvSpPr/>
+          <p:nvPr/>
+        </p:nvSpPr>
+        <p:spPr>
+          <a:xfrm>
+            <a:off x="9418320" y="4572000"/>
+            <a:ext cx="1554480" cy="457200"/>
+          </a:xfrm>
+          <a:prstGeom prst="roundRect">
+            <a:avLst/>
+          </a:prstGeom>
+          <a:solidFill>
+            <a:srgbClr val="FFFFFF"/>
+          </a:solidFill>
+          <a:ln w="12700">
+            <a:solidFill>
+              <a:srgbClr val="CBD5E1"/>
+            </a:solidFill>
+          </a:ln>
+          <a:effectLst/>
+        </p:spPr>
+        <p:style>
+          <a:lnRef idx="1">
+            <a:schemeClr val="accent1"/>
+          </a:lnRef>
+          <a:fillRef idx="3">
+            <a:schemeClr val="accent1"/>
+          </a:fillRef>
+          <a:effectRef idx="2">
+            <a:schemeClr val="accent1"/>
+          </a:effectRef>
+          <a:fontRef idx="minor">
+            <a:schemeClr val="lt1"/>
+          </a:fontRef>
+        </p:style>
+        <p:txBody>
+          <a:bodyPr rtlCol="0" anchor="ctr"/>
+          <a:lstStyle/>
+          <a:p>
+            <a:pPr algn="ctr">
+              <a:lnSpc>
+                <a:spcPct val="120000"/>
+              </a:lnSpc>
+              <a:spcAft>
+                <a:spcPts val="0"/>
+              </a:spcAft>
+            </a:pPr>
+            <a:r>
+              <a:rPr sz="1200" b="1">
+                <a:solidFill>
+                  <a:srgbClr val="0F172A"/>
+                </a:solidFill>
+              </a:rPr>
+              <a:t>Créer un compte</a:t>
             </a:r>
           </a:p>
         </p:txBody>
@@ -6491,7 +7664,7 @@
                   <a:srgbClr val="2563EB"/>
                 </a:solidFill>
               </a:rPr>
-              <a:t>REPÈRES</a:t>
+              <a:t>ÉTAPE 1 · IDENTITÉ</a:t>
             </a:r>
           </a:p>
         </p:txBody>
@@ -6532,27 +7705,442 @@
                   <a:srgbClr val="0F172A"/>
                 </a:solidFill>
               </a:rPr>
-              <a:t>Deux onglets à disposition</a:t>
-            </a:r>
-          </a:p>
-        </p:txBody>
-      </p:sp>
-      <p:sp>
-        <p:nvSpPr>
-          <p:cNvPr id="4" name="Rounded Rectangle 3"/>
+              <a:t>Première connexion : choisir son nom</a:t>
+            </a:r>
+          </a:p>
+        </p:txBody>
+      </p:sp>
+      <p:sp>
+        <p:nvSpPr>
+          <p:cNvPr id="4" name="TextBox 3"/>
+          <p:cNvSpPr txBox="1"/>
+          <p:nvPr/>
+        </p:nvSpPr>
+        <p:spPr>
+          <a:xfrm>
+            <a:off x="640080" y="1965960"/>
+            <a:ext cx="6035040" cy="1005840"/>
+          </a:xfrm>
+          <a:prstGeom prst="rect">
+            <a:avLst/>
+          </a:prstGeom>
+          <a:noFill/>
+        </p:spPr>
+        <p:txBody>
+          <a:bodyPr wrap="square" anchor="t">
+            <a:spAutoFit/>
+          </a:bodyPr>
+          <a:lstStyle/>
+          <a:p>
+            <a:pPr algn="l">
+              <a:lnSpc>
+                <a:spcPct val="140000"/>
+              </a:lnSpc>
+              <a:spcAft>
+                <a:spcPts val="800"/>
+              </a:spcAft>
+            </a:pPr>
+            <a:r>
+              <a:rPr sz="1800" b="0">
+                <a:solidFill>
+                  <a:srgbClr val="64748B"/>
+                </a:solidFill>
+              </a:rPr>
+              <a:t>À la toute première connexion, l'application demande de </a:t>
+            </a:r>
+            <a:r>
+              <a:rPr sz="1800" b="1">
+                <a:solidFill>
+                  <a:srgbClr val="64748B"/>
+                </a:solidFill>
+              </a:rPr>
+              <a:t>s'associer à son nom</a:t>
+            </a:r>
+            <a:r>
+              <a:rPr sz="1800" b="0">
+                <a:solidFill>
+                  <a:srgbClr val="64748B"/>
+                </a:solidFill>
+              </a:rPr>
+              <a:t> dans la liste des médecins.</a:t>
+            </a:r>
+          </a:p>
+        </p:txBody>
+      </p:sp>
+      <p:sp>
+        <p:nvSpPr>
+          <p:cNvPr id="5" name="TextBox 4"/>
+          <p:cNvSpPr txBox="1"/>
+          <p:nvPr/>
+        </p:nvSpPr>
+        <p:spPr>
+          <a:xfrm>
+            <a:off x="640080" y="3063240"/>
+            <a:ext cx="6035040" cy="4572000"/>
+          </a:xfrm>
+          <a:prstGeom prst="rect">
+            <a:avLst/>
+          </a:prstGeom>
+          <a:noFill/>
+        </p:spPr>
+        <p:txBody>
+          <a:bodyPr wrap="square" anchor="t">
+            <a:spAutoFit/>
+          </a:bodyPr>
+          <a:lstStyle/>
+          <a:p>
+            <a:pPr algn="l">
+              <a:lnSpc>
+                <a:spcPct val="125000"/>
+              </a:lnSpc>
+              <a:spcAft>
+                <a:spcPts val="1200"/>
+              </a:spcAft>
+            </a:pPr>
+            <a:r>
+              <a:rPr sz="1800">
+                <a:solidFill>
+                  <a:srgbClr val="0F172A"/>
+                </a:solidFill>
+              </a:rPr>
+              <a:t>1.  </a:t>
+            </a:r>
+            <a:r>
+              <a:rPr sz="1800" b="0">
+                <a:solidFill>
+                  <a:srgbClr val="0F172A"/>
+                </a:solidFill>
+              </a:rPr>
+              <a:t>Sélectionner </a:t>
+            </a:r>
+            <a:r>
+              <a:rPr sz="1800" b="1">
+                <a:solidFill>
+                  <a:srgbClr val="0F172A"/>
+                </a:solidFill>
+              </a:rPr>
+              <a:t>son nom</a:t>
+            </a:r>
+            <a:r>
+              <a:rPr sz="1800" b="0">
+                <a:solidFill>
+                  <a:srgbClr val="0F172A"/>
+                </a:solidFill>
+              </a:rPr>
+              <a:t> dans le menu déroulant.</a:t>
+            </a:r>
+          </a:p>
+          <a:p>
+            <a:pPr algn="l">
+              <a:lnSpc>
+                <a:spcPct val="125000"/>
+              </a:lnSpc>
+              <a:spcAft>
+                <a:spcPts val="1200"/>
+              </a:spcAft>
+            </a:pPr>
+            <a:r>
+              <a:rPr sz="1800">
+                <a:solidFill>
+                  <a:srgbClr val="0F172A"/>
+                </a:solidFill>
+              </a:rPr>
+              <a:t>2.  </a:t>
+            </a:r>
+            <a:r>
+              <a:rPr sz="1800" b="0">
+                <a:solidFill>
+                  <a:srgbClr val="0F172A"/>
+                </a:solidFill>
+              </a:rPr>
+              <a:t>Cliquer sur </a:t>
+            </a:r>
+            <a:r>
+              <a:rPr sz="1800" b="1">
+                <a:solidFill>
+                  <a:srgbClr val="0F172A"/>
+                </a:solidFill>
+              </a:rPr>
+              <a:t>« Valider »</a:t>
+            </a:r>
+            <a:r>
+              <a:rPr sz="1800" b="0">
+                <a:solidFill>
+                  <a:srgbClr val="0F172A"/>
+                </a:solidFill>
+              </a:rPr>
+              <a:t>.</a:t>
+            </a:r>
+          </a:p>
+        </p:txBody>
+      </p:sp>
+      <p:sp>
+        <p:nvSpPr>
+          <p:cNvPr id="6" name="Rounded Rectangle 5"/>
           <p:cNvSpPr/>
           <p:nvPr/>
         </p:nvSpPr>
         <p:spPr>
           <a:xfrm>
-            <a:off x="548640" y="1965960"/>
-            <a:ext cx="6309360" cy="548640"/>
+            <a:off x="640080" y="4572000"/>
+            <a:ext cx="6035040" cy="1005840"/>
           </a:xfrm>
           <a:prstGeom prst="roundRect">
             <a:avLst/>
           </a:prstGeom>
           <a:solidFill>
-            <a:srgbClr val="F1F5F9"/>
+            <a:srgbClr val="FFFBEB"/>
+          </a:solidFill>
+          <a:ln w="12700">
+            <a:solidFill>
+              <a:srgbClr val="FDE68A"/>
+            </a:solidFill>
+          </a:ln>
+          <a:effectLst/>
+        </p:spPr>
+        <p:style>
+          <a:lnRef idx="1">
+            <a:schemeClr val="accent1"/>
+          </a:lnRef>
+          <a:fillRef idx="3">
+            <a:schemeClr val="accent1"/>
+          </a:fillRef>
+          <a:effectRef idx="2">
+            <a:schemeClr val="accent1"/>
+          </a:effectRef>
+          <a:fontRef idx="minor">
+            <a:schemeClr val="lt1"/>
+          </a:fontRef>
+        </p:style>
+        <p:txBody>
+          <a:bodyPr rtlCol="0" anchor="ctr" wrap="square" lIns="182880" rIns="182880"/>
+          <a:lstStyle/>
+          <a:p>
+            <a:pPr algn="l">
+              <a:lnSpc>
+                <a:spcPct val="125000"/>
+              </a:lnSpc>
+              <a:spcAft>
+                <a:spcPts val="0"/>
+              </a:spcAft>
+            </a:pPr>
+            <a:r>
+              <a:rPr sz="1500" b="0">
+                <a:solidFill>
+                  <a:srgbClr val="92400E"/>
+                </a:solidFill>
+              </a:rPr>
+              <a:t>⚠️ Bien sélectionner </a:t>
+            </a:r>
+            <a:r>
+              <a:rPr sz="1500" b="1">
+                <a:solidFill>
+                  <a:srgbClr val="92400E"/>
+                </a:solidFill>
+              </a:rPr>
+              <a:t>son propre</a:t>
+            </a:r>
+            <a:r>
+              <a:rPr sz="1500" b="0">
+                <a:solidFill>
+                  <a:srgbClr val="92400E"/>
+                </a:solidFill>
+              </a:rPr>
+              <a:t> nom : c'est lui qui porte les objectifs, les vœux et les gardes.</a:t>
+            </a:r>
+          </a:p>
+        </p:txBody>
+      </p:sp>
+      <p:sp>
+        <p:nvSpPr>
+          <p:cNvPr id="7" name="Rounded Rectangle 6"/>
+          <p:cNvSpPr/>
+          <p:nvPr/>
+        </p:nvSpPr>
+        <p:spPr>
+          <a:xfrm>
+            <a:off x="7680960" y="2103120"/>
+            <a:ext cx="3566160" cy="2194560"/>
+          </a:xfrm>
+          <a:prstGeom prst="roundRect">
+            <a:avLst/>
+          </a:prstGeom>
+          <a:solidFill>
+            <a:srgbClr val="FFFFFF"/>
+          </a:solidFill>
+          <a:ln w="12700">
+            <a:solidFill>
+              <a:srgbClr val="E2E8F0"/>
+            </a:solidFill>
+          </a:ln>
+          <a:effectLst/>
+        </p:spPr>
+        <p:style>
+          <a:lnRef idx="1">
+            <a:schemeClr val="accent1"/>
+          </a:lnRef>
+          <a:fillRef idx="3">
+            <a:schemeClr val="accent1"/>
+          </a:fillRef>
+          <a:effectRef idx="2">
+            <a:schemeClr val="accent1"/>
+          </a:effectRef>
+          <a:fontRef idx="minor">
+            <a:schemeClr val="lt1"/>
+          </a:fontRef>
+        </p:style>
+        <p:txBody>
+          <a:bodyPr rtlCol="0" anchor="ctr"/>
+          <a:lstStyle/>
+          <a:p>
+            <a:pPr algn="ctr"/>
+          </a:p>
+        </p:txBody>
+      </p:sp>
+      <p:sp>
+        <p:nvSpPr>
+          <p:cNvPr id="8" name="TextBox 7"/>
+          <p:cNvSpPr txBox="1"/>
+          <p:nvPr/>
+        </p:nvSpPr>
+        <p:spPr>
+          <a:xfrm>
+            <a:off x="7909560" y="2286000"/>
+            <a:ext cx="3108960" cy="731520"/>
+          </a:xfrm>
+          <a:prstGeom prst="rect">
+            <a:avLst/>
+          </a:prstGeom>
+          <a:noFill/>
+        </p:spPr>
+        <p:txBody>
+          <a:bodyPr wrap="square" anchor="t">
+            <a:spAutoFit/>
+          </a:bodyPr>
+          <a:lstStyle/>
+          <a:p>
+            <a:pPr algn="l">
+              <a:lnSpc>
+                <a:spcPct val="130000"/>
+              </a:lnSpc>
+              <a:spcAft>
+                <a:spcPts val="0"/>
+              </a:spcAft>
+            </a:pPr>
+            <a:r>
+              <a:rPr sz="1300" b="0">
+                <a:solidFill>
+                  <a:srgbClr val="475569"/>
+                </a:solidFill>
+              </a:rPr>
+              <a:t>Première connexion — choisis ton nom dans la liste :</a:t>
+            </a:r>
+          </a:p>
+        </p:txBody>
+      </p:sp>
+      <p:sp>
+        <p:nvSpPr>
+          <p:cNvPr id="9" name="Rounded Rectangle 8"/>
+          <p:cNvSpPr/>
+          <p:nvPr/>
+        </p:nvSpPr>
+        <p:spPr>
+          <a:xfrm>
+            <a:off x="7909560" y="3063240"/>
+            <a:ext cx="3108960" cy="457200"/>
+          </a:xfrm>
+          <a:prstGeom prst="roundRect">
+            <a:avLst/>
+          </a:prstGeom>
+          <a:solidFill>
+            <a:srgbClr val="FFFFFF"/>
+          </a:solidFill>
+          <a:ln w="12700">
+            <a:solidFill>
+              <a:srgbClr val="CBD5E1"/>
+            </a:solidFill>
+          </a:ln>
+          <a:effectLst/>
+        </p:spPr>
+        <p:style>
+          <a:lnRef idx="1">
+            <a:schemeClr val="accent1"/>
+          </a:lnRef>
+          <a:fillRef idx="3">
+            <a:schemeClr val="accent1"/>
+          </a:fillRef>
+          <a:effectRef idx="2">
+            <a:schemeClr val="accent1"/>
+          </a:effectRef>
+          <a:fontRef idx="minor">
+            <a:schemeClr val="lt1"/>
+          </a:fontRef>
+        </p:style>
+        <p:txBody>
+          <a:bodyPr rtlCol="0" anchor="ctr"/>
+          <a:lstStyle/>
+          <a:p>
+            <a:pPr algn="ctr"/>
+          </a:p>
+        </p:txBody>
+      </p:sp>
+      <p:sp>
+        <p:nvSpPr>
+          <p:cNvPr id="10" name="TextBox 9"/>
+          <p:cNvSpPr txBox="1"/>
+          <p:nvPr/>
+        </p:nvSpPr>
+        <p:spPr>
+          <a:xfrm>
+            <a:off x="8046720" y="3145536"/>
+            <a:ext cx="2834640" cy="365760"/>
+          </a:xfrm>
+          <a:prstGeom prst="rect">
+            <a:avLst/>
+          </a:prstGeom>
+          <a:noFill/>
+        </p:spPr>
+        <p:txBody>
+          <a:bodyPr wrap="square" anchor="ctr">
+            <a:spAutoFit/>
+          </a:bodyPr>
+          <a:lstStyle/>
+          <a:p>
+            <a:pPr algn="l">
+              <a:lnSpc>
+                <a:spcPct val="120000"/>
+              </a:lnSpc>
+              <a:spcAft>
+                <a:spcPts val="0"/>
+              </a:spcAft>
+            </a:pPr>
+            <a:r>
+              <a:rPr sz="1300" b="0">
+                <a:solidFill>
+                  <a:srgbClr val="0F172A"/>
+                </a:solidFill>
+              </a:rPr>
+              <a:t>Dr Martin  ▾</a:t>
+            </a:r>
+          </a:p>
+        </p:txBody>
+      </p:sp>
+      <p:sp>
+        <p:nvSpPr>
+          <p:cNvPr id="11" name="Rounded Rectangle 10"/>
+          <p:cNvSpPr/>
+          <p:nvPr/>
+        </p:nvSpPr>
+        <p:spPr>
+          <a:xfrm>
+            <a:off x="7909560" y="3703320"/>
+            <a:ext cx="3108960" cy="457200"/>
+          </a:xfrm>
+          <a:prstGeom prst="roundRect">
+            <a:avLst/>
+          </a:prstGeom>
+          <a:solidFill>
+            <a:srgbClr val="2563EB"/>
           </a:solidFill>
           <a:ln>
             <a:noFill/>
@@ -6577,50 +8165,6 @@
           <a:bodyPr rtlCol="0" anchor="ctr"/>
           <a:lstStyle/>
           <a:p>
-            <a:pPr algn="ctr"/>
-          </a:p>
-        </p:txBody>
-      </p:sp>
-      <p:sp>
-        <p:nvSpPr>
-          <p:cNvPr id="5" name="Rounded Rectangle 4"/>
-          <p:cNvSpPr/>
-          <p:nvPr/>
-        </p:nvSpPr>
-        <p:spPr>
-          <a:xfrm>
-            <a:off x="640080" y="2029968"/>
-            <a:ext cx="1481328" cy="420624"/>
-          </a:xfrm>
-          <a:prstGeom prst="roundRect">
-            <a:avLst/>
-          </a:prstGeom>
-          <a:solidFill>
-            <a:srgbClr val="FFFFFF"/>
-          </a:solidFill>
-          <a:ln>
-            <a:noFill/>
-          </a:ln>
-          <a:effectLst/>
-        </p:spPr>
-        <p:style>
-          <a:lnRef idx="1">
-            <a:schemeClr val="accent1"/>
-          </a:lnRef>
-          <a:fillRef idx="3">
-            <a:schemeClr val="accent1"/>
-          </a:fillRef>
-          <a:effectRef idx="2">
-            <a:schemeClr val="accent1"/>
-          </a:effectRef>
-          <a:fontRef idx="minor">
-            <a:schemeClr val="lt1"/>
-          </a:fontRef>
-        </p:style>
-        <p:txBody>
-          <a:bodyPr rtlCol="0" anchor="ctr"/>
-          <a:lstStyle/>
-          <a:p>
             <a:pPr algn="ctr">
               <a:lnSpc>
                 <a:spcPct val="120000"/>
@@ -6632,453 +8176,10 @@
             <a:r>
               <a:rPr sz="1300" b="1">
                 <a:solidFill>
-                  <a:srgbClr val="2563EB"/>
-                </a:solidFill>
-              </a:rPr>
-              <a:t>Planning</a:t>
-            </a:r>
-          </a:p>
-        </p:txBody>
-      </p:sp>
-      <p:sp>
-        <p:nvSpPr>
-          <p:cNvPr id="6" name="Rounded Rectangle 5"/>
-          <p:cNvSpPr/>
-          <p:nvPr/>
-        </p:nvSpPr>
-        <p:spPr>
-          <a:xfrm>
-            <a:off x="2212848" y="2029968"/>
-            <a:ext cx="1097280" cy="420624"/>
-          </a:xfrm>
-          <a:prstGeom prst="roundRect">
-            <a:avLst/>
-          </a:prstGeom>
-          <a:solidFill>
-            <a:srgbClr val="F1F5F9"/>
-          </a:solidFill>
-          <a:ln>
-            <a:noFill/>
-          </a:ln>
-          <a:effectLst/>
-        </p:spPr>
-        <p:style>
-          <a:lnRef idx="1">
-            <a:schemeClr val="accent1"/>
-          </a:lnRef>
-          <a:fillRef idx="3">
-            <a:schemeClr val="accent1"/>
-          </a:fillRef>
-          <a:effectRef idx="2">
-            <a:schemeClr val="accent1"/>
-          </a:effectRef>
-          <a:fontRef idx="minor">
-            <a:schemeClr val="lt1"/>
-          </a:fontRef>
-        </p:style>
-        <p:txBody>
-          <a:bodyPr rtlCol="0" anchor="ctr"/>
-          <a:lstStyle/>
-          <a:p>
-            <a:pPr algn="ctr">
-              <a:lnSpc>
-                <a:spcPct val="120000"/>
-              </a:lnSpc>
-              <a:spcAft>
-                <a:spcPts val="0"/>
-              </a:spcAft>
-            </a:pPr>
-            <a:r>
-              <a:rPr sz="1300" b="1">
-                <a:solidFill>
-                  <a:srgbClr val="64748B"/>
-                </a:solidFill>
-              </a:rPr>
-              <a:t>Perso</a:t>
-            </a:r>
-          </a:p>
-        </p:txBody>
-      </p:sp>
-      <p:sp>
-        <p:nvSpPr>
-          <p:cNvPr id="7" name="Rounded Rectangle 6"/>
-          <p:cNvSpPr/>
-          <p:nvPr/>
-        </p:nvSpPr>
-        <p:spPr>
-          <a:xfrm>
-            <a:off x="3401568" y="2029968"/>
-            <a:ext cx="2505456" cy="420624"/>
-          </a:xfrm>
-          <a:prstGeom prst="roundRect">
-            <a:avLst/>
-          </a:prstGeom>
-          <a:solidFill>
-            <a:srgbClr val="F1F5F9"/>
-          </a:solidFill>
-          <a:ln>
-            <a:noFill/>
-          </a:ln>
-          <a:effectLst/>
-        </p:spPr>
-        <p:style>
-          <a:lnRef idx="1">
-            <a:schemeClr val="accent1"/>
-          </a:lnRef>
-          <a:fillRef idx="3">
-            <a:schemeClr val="accent1"/>
-          </a:fillRef>
-          <a:effectRef idx="2">
-            <a:schemeClr val="accent1"/>
-          </a:effectRef>
-          <a:fontRef idx="minor">
-            <a:schemeClr val="lt1"/>
-          </a:fontRef>
-        </p:style>
-        <p:txBody>
-          <a:bodyPr rtlCol="0" anchor="ctr"/>
-          <a:lstStyle/>
-          <a:p>
-            <a:pPr algn="ctr">
-              <a:lnSpc>
-                <a:spcPct val="120000"/>
-              </a:lnSpc>
-              <a:spcAft>
-                <a:spcPts val="0"/>
-              </a:spcAft>
-            </a:pPr>
-            <a:r>
-              <a:rPr sz="1300" b="1">
-                <a:solidFill>
-                  <a:srgbClr val="B0B8C4"/>
-                </a:solidFill>
-              </a:rPr>
-              <a:t>Réglages · admin</a:t>
-            </a:r>
-          </a:p>
-        </p:txBody>
-      </p:sp>
-      <p:sp>
-        <p:nvSpPr>
-          <p:cNvPr id="8" name="Rounded Rectangle 7"/>
-          <p:cNvSpPr/>
-          <p:nvPr/>
-        </p:nvSpPr>
-        <p:spPr>
-          <a:xfrm>
-            <a:off x="5998464" y="2029968"/>
-            <a:ext cx="1865376" cy="420624"/>
-          </a:xfrm>
-          <a:prstGeom prst="roundRect">
-            <a:avLst/>
-          </a:prstGeom>
-          <a:solidFill>
-            <a:srgbClr val="F1F5F9"/>
-          </a:solidFill>
-          <a:ln>
-            <a:noFill/>
-          </a:ln>
-          <a:effectLst/>
-        </p:spPr>
-        <p:style>
-          <a:lnRef idx="1">
-            <a:schemeClr val="accent1"/>
-          </a:lnRef>
-          <a:fillRef idx="3">
-            <a:schemeClr val="accent1"/>
-          </a:fillRef>
-          <a:effectRef idx="2">
-            <a:schemeClr val="accent1"/>
-          </a:effectRef>
-          <a:fontRef idx="minor">
-            <a:schemeClr val="lt1"/>
-          </a:fontRef>
-        </p:style>
-        <p:txBody>
-          <a:bodyPr rtlCol="0" anchor="ctr"/>
-          <a:lstStyle/>
-          <a:p>
-            <a:pPr algn="ctr">
-              <a:lnSpc>
-                <a:spcPct val="120000"/>
-              </a:lnSpc>
-              <a:spcAft>
-                <a:spcPts val="0"/>
-              </a:spcAft>
-            </a:pPr>
-            <a:r>
-              <a:rPr sz="1300" b="1">
-                <a:solidFill>
-                  <a:srgbClr val="64748B"/>
-                </a:solidFill>
-              </a:rPr>
-              <a:t>Déconnexion</a:t>
-            </a:r>
-          </a:p>
-        </p:txBody>
-      </p:sp>
-      <p:sp>
-        <p:nvSpPr>
-          <p:cNvPr id="9" name="TextBox 8"/>
-          <p:cNvSpPr txBox="1"/>
-          <p:nvPr/>
-        </p:nvSpPr>
-        <p:spPr>
-          <a:xfrm>
-            <a:off x="640080" y="2880360"/>
-            <a:ext cx="10789920" cy="4572000"/>
-          </a:xfrm>
-          <a:prstGeom prst="rect">
-            <a:avLst/>
-          </a:prstGeom>
-          <a:noFill/>
-        </p:spPr>
-        <p:txBody>
-          <a:bodyPr wrap="square" anchor="t">
-            <a:spAutoFit/>
-          </a:bodyPr>
-          <a:lstStyle/>
-          <a:p>
-            <a:pPr algn="l">
-              <a:lnSpc>
-                <a:spcPct val="125000"/>
-              </a:lnSpc>
-              <a:spcAft>
-                <a:spcPts val="1400"/>
-              </a:spcAft>
-            </a:pPr>
-            <a:r>
-              <a:rPr sz="1800">
-                <a:solidFill>
-                  <a:srgbClr val="0F172A"/>
-                </a:solidFill>
-              </a:rPr>
-              <a:t>🗓️  </a:t>
-            </a:r>
-            <a:r>
-              <a:rPr sz="1800" b="1">
-                <a:solidFill>
-                  <a:srgbClr val="0F172A"/>
-                </a:solidFill>
-              </a:rPr>
-              <a:t>Planning</a:t>
-            </a:r>
-            <a:r>
-              <a:rPr sz="1800" b="0">
-                <a:solidFill>
-                  <a:srgbClr val="0F172A"/>
-                </a:solidFill>
-              </a:rPr>
-              <a:t> — le calendrier des gardes, en </a:t>
-            </a:r>
-            <a:r>
-              <a:rPr sz="1800" b="1">
-                <a:solidFill>
-                  <a:srgbClr val="0F172A"/>
-                </a:solidFill>
-              </a:rPr>
-              <a:t>lecture seule</a:t>
-            </a:r>
-            <a:r>
-              <a:rPr sz="1800" b="0">
-                <a:solidFill>
-                  <a:srgbClr val="0F172A"/>
-                </a:solidFill>
-              </a:rPr>
-              <a:t>. Il permet de suivre qui prend quoi, en temps réel.</a:t>
-            </a:r>
-          </a:p>
-          <a:p>
-            <a:pPr algn="l">
-              <a:lnSpc>
-                <a:spcPct val="125000"/>
-              </a:lnSpc>
-              <a:spcAft>
-                <a:spcPts val="1400"/>
-              </a:spcAft>
-            </a:pPr>
-            <a:r>
-              <a:rPr sz="1800">
-                <a:solidFill>
-                  <a:srgbClr val="0F172A"/>
-                </a:solidFill>
-              </a:rPr>
-              <a:t>👤  </a:t>
-            </a:r>
-            <a:r>
-              <a:rPr sz="1800" b="1">
-                <a:solidFill>
-                  <a:srgbClr val="0F172A"/>
-                </a:solidFill>
-              </a:rPr>
-              <a:t>Perso</a:t>
-            </a:r>
-            <a:r>
-              <a:rPr sz="1800" b="0">
-                <a:solidFill>
-                  <a:srgbClr val="0F172A"/>
-                </a:solidFill>
-              </a:rPr>
-              <a:t> — l'espace personnel : les objectifs, et l'endroit où déclarer ses </a:t>
-            </a:r>
-            <a:r>
-              <a:rPr sz="1800" b="1">
-                <a:solidFill>
-                  <a:srgbClr val="0F172A"/>
-                </a:solidFill>
-              </a:rPr>
-              <a:t>indispos 🚫</a:t>
-            </a:r>
-            <a:r>
-              <a:rPr sz="1800" b="0">
-                <a:solidFill>
-                  <a:srgbClr val="0F172A"/>
-                </a:solidFill>
-              </a:rPr>
-              <a:t> et ses </a:t>
-            </a:r>
-            <a:r>
-              <a:rPr sz="1800" b="1">
-                <a:solidFill>
-                  <a:srgbClr val="0F172A"/>
-                </a:solidFill>
-              </a:rPr>
-              <a:t>vœux 💙</a:t>
-            </a:r>
-            <a:r>
-              <a:rPr sz="1800" b="0">
-                <a:solidFill>
-                  <a:srgbClr val="0F172A"/>
-                </a:solidFill>
-              </a:rPr>
-              <a:t>.</a:t>
-            </a:r>
-          </a:p>
-          <a:p>
-            <a:pPr algn="l">
-              <a:lnSpc>
-                <a:spcPct val="125000"/>
-              </a:lnSpc>
-              <a:spcAft>
-                <a:spcPts val="1400"/>
-              </a:spcAft>
-            </a:pPr>
-            <a:r>
-              <a:rPr sz="1800">
-                <a:solidFill>
-                  <a:srgbClr val="0F172A"/>
-                </a:solidFill>
-              </a:rPr>
-              <a:t>🔒  </a:t>
-            </a:r>
-            <a:r>
-              <a:rPr sz="1800" b="1">
-                <a:solidFill>
-                  <a:srgbClr val="0F172A"/>
-                </a:solidFill>
-              </a:rPr>
-              <a:t>Réglages</a:t>
-            </a:r>
-            <a:r>
-              <a:rPr sz="1800" b="0">
-                <a:solidFill>
-                  <a:srgbClr val="0F172A"/>
-                </a:solidFill>
-              </a:rPr>
-              <a:t> — réservé à l'admin, il n'apparaît pas côté médecin.</a:t>
-            </a:r>
-          </a:p>
-        </p:txBody>
-      </p:sp>
-      <p:sp>
-        <p:nvSpPr>
-          <p:cNvPr id="10" name="Rounded Rectangle 9"/>
-          <p:cNvSpPr/>
-          <p:nvPr/>
-        </p:nvSpPr>
-        <p:spPr>
-          <a:xfrm>
-            <a:off x="640080" y="5120640"/>
-            <a:ext cx="10789920" cy="822960"/>
-          </a:xfrm>
-          <a:prstGeom prst="roundRect">
-            <a:avLst/>
-          </a:prstGeom>
-          <a:solidFill>
-            <a:srgbClr val="EFF6FF"/>
-          </a:solidFill>
-          <a:ln w="12700">
-            <a:solidFill>
-              <a:srgbClr val="BFDBFE"/>
-            </a:solidFill>
-          </a:ln>
-          <a:effectLst/>
-        </p:spPr>
-        <p:style>
-          <a:lnRef idx="1">
-            <a:schemeClr val="accent1"/>
-          </a:lnRef>
-          <a:fillRef idx="3">
-            <a:schemeClr val="accent1"/>
-          </a:fillRef>
-          <a:effectRef idx="2">
-            <a:schemeClr val="accent1"/>
-          </a:effectRef>
-          <a:fontRef idx="minor">
-            <a:schemeClr val="lt1"/>
-          </a:fontRef>
-        </p:style>
-        <p:txBody>
-          <a:bodyPr rtlCol="0" anchor="ctr" wrap="square" lIns="182880" rIns="182880"/>
-          <a:lstStyle/>
-          <a:p>
-            <a:pPr algn="l">
-              <a:lnSpc>
-                <a:spcPct val="125000"/>
-              </a:lnSpc>
-              <a:spcAft>
-                <a:spcPts val="0"/>
-              </a:spcAft>
-            </a:pPr>
-            <a:r>
-              <a:rPr sz="1500" b="0">
-                <a:solidFill>
-                  <a:srgbClr val="1E3A8A"/>
-                </a:solidFill>
-              </a:rPr>
-              <a:t>Le passage de </a:t>
-            </a:r>
-            <a:r>
-              <a:rPr sz="1500" b="1">
-                <a:solidFill>
-                  <a:srgbClr val="1E3A8A"/>
-                </a:solidFill>
-              </a:rPr>
-              <a:t>Perso</a:t>
-            </a:r>
-            <a:r>
-              <a:rPr sz="1500" b="0">
-                <a:solidFill>
-                  <a:srgbClr val="1E3A8A"/>
-                </a:solidFill>
-              </a:rPr>
-              <a:t> à </a:t>
-            </a:r>
-            <a:r>
-              <a:rPr sz="1500" b="1">
-                <a:solidFill>
-                  <a:srgbClr val="1E3A8A"/>
-                </a:solidFill>
-              </a:rPr>
-              <a:t>Planning</a:t>
-            </a:r>
-            <a:r>
-              <a:rPr sz="1500" b="0">
-                <a:solidFill>
-                  <a:srgbClr val="1E3A8A"/>
-                </a:solidFill>
-              </a:rPr>
-              <a:t> est possible à tout moment : les déclarations sont enregistrées automatiquement.</a:t>
+                  <a:srgbClr val="FFFFFF"/>
+                </a:solidFill>
+              </a:rPr>
+              <a:t>Valider</a:t>
             </a:r>
           </a:p>
         </p:txBody>
@@ -7137,7 +8238,7 @@
                   <a:srgbClr val="2563EB"/>
                 </a:solidFill>
               </a:rPr>
-              <a:t>ÉTAPE 2 · PERSO</a:t>
+              <a:t>REPÈRES</a:t>
             </a:r>
           </a:p>
         </p:txBody>
@@ -7178,191 +8279,30 @@
                   <a:srgbClr val="0F172A"/>
                 </a:solidFill>
               </a:rPr>
-              <a:t>L'onglet Perso en un coup d'œil</a:t>
-            </a:r>
-          </a:p>
-        </p:txBody>
-      </p:sp>
-      <p:sp>
-        <p:nvSpPr>
-          <p:cNvPr id="4" name="TextBox 3"/>
-          <p:cNvSpPr txBox="1"/>
-          <p:nvPr/>
-        </p:nvSpPr>
-        <p:spPr>
-          <a:xfrm>
-            <a:off x="640080" y="2011680"/>
-            <a:ext cx="6126480" cy="4572000"/>
-          </a:xfrm>
-          <a:prstGeom prst="rect">
-            <a:avLst/>
-          </a:prstGeom>
-          <a:noFill/>
-        </p:spPr>
-        <p:txBody>
-          <a:bodyPr wrap="square" anchor="t">
-            <a:spAutoFit/>
-          </a:bodyPr>
-          <a:lstStyle/>
-          <a:p>
-            <a:pPr algn="l">
-              <a:lnSpc>
-                <a:spcPct val="125000"/>
-              </a:lnSpc>
-              <a:spcAft>
-                <a:spcPts val="1200"/>
-              </a:spcAft>
-            </a:pPr>
-            <a:r>
-              <a:rPr sz="1800">
-                <a:solidFill>
-                  <a:srgbClr val="0F172A"/>
-                </a:solidFill>
-              </a:rPr>
-              <a:t>🎯  </a:t>
-            </a:r>
-            <a:r>
-              <a:rPr sz="1800" b="1">
-                <a:solidFill>
-                  <a:srgbClr val="0F172A"/>
-                </a:solidFill>
-              </a:rPr>
-              <a:t>Mes objectifs restants</a:t>
-            </a:r>
-            <a:r>
-              <a:rPr sz="1800" b="0">
-                <a:solidFill>
-                  <a:srgbClr val="0F172A"/>
-                </a:solidFill>
-              </a:rPr>
-              <a:t> — le nombre de gardes restant à obtenir (par site, semaine / WE-férié).</a:t>
-            </a:r>
-          </a:p>
-          <a:p>
-            <a:pPr algn="l">
-              <a:lnSpc>
-                <a:spcPct val="125000"/>
-              </a:lnSpc>
-              <a:spcAft>
-                <a:spcPts val="1200"/>
-              </a:spcAft>
-            </a:pPr>
-            <a:r>
-              <a:rPr sz="1800">
-                <a:solidFill>
-                  <a:srgbClr val="0F172A"/>
-                </a:solidFill>
-              </a:rPr>
-              <a:t>⏭️  </a:t>
-            </a:r>
-            <a:r>
-              <a:rPr sz="1800" b="1">
-                <a:solidFill>
-                  <a:srgbClr val="0F172A"/>
-                </a:solidFill>
-              </a:rPr>
-              <a:t>À mon prochain tour</a:t>
-            </a:r>
-            <a:r>
-              <a:rPr sz="1800" b="0">
-                <a:solidFill>
-                  <a:srgbClr val="0F172A"/>
-                </a:solidFill>
-              </a:rPr>
-              <a:t> — un rappel de ce qui pourra être choisi.</a:t>
-            </a:r>
-          </a:p>
-          <a:p>
-            <a:pPr algn="l">
-              <a:lnSpc>
-                <a:spcPct val="125000"/>
-              </a:lnSpc>
-              <a:spcAft>
-                <a:spcPts val="1200"/>
-              </a:spcAft>
-            </a:pPr>
-            <a:r>
-              <a:rPr sz="1800">
-                <a:solidFill>
-                  <a:srgbClr val="0F172A"/>
-                </a:solidFill>
-              </a:rPr>
-              <a:t>🚫  </a:t>
-            </a:r>
-            <a:r>
-              <a:rPr sz="1800" b="1">
-                <a:solidFill>
-                  <a:srgbClr val="0F172A"/>
-                </a:solidFill>
-              </a:rPr>
-              <a:t>Indispos</a:t>
-            </a:r>
-            <a:r>
-              <a:rPr sz="1800" b="0">
-                <a:solidFill>
-                  <a:srgbClr val="0F172A"/>
-                </a:solidFill>
-              </a:rPr>
-              <a:t> — les jours d'indisponibilité.</a:t>
-            </a:r>
-          </a:p>
-          <a:p>
-            <a:pPr algn="l">
-              <a:lnSpc>
-                <a:spcPct val="125000"/>
-              </a:lnSpc>
-              <a:spcAft>
-                <a:spcPts val="1200"/>
-              </a:spcAft>
-            </a:pPr>
-            <a:r>
-              <a:rPr sz="1800">
-                <a:solidFill>
-                  <a:srgbClr val="0F172A"/>
-                </a:solidFill>
-              </a:rPr>
-              <a:t>💙  </a:t>
-            </a:r>
-            <a:r>
-              <a:rPr sz="1800" b="1">
-                <a:solidFill>
-                  <a:srgbClr val="0F172A"/>
-                </a:solidFill>
-              </a:rPr>
-              <a:t>Vœux</a:t>
-            </a:r>
-            <a:r>
-              <a:rPr sz="1800" b="0">
-                <a:solidFill>
-                  <a:srgbClr val="0F172A"/>
-                </a:solidFill>
-              </a:rPr>
-              <a:t> — les jours / sites souhaités.</a:t>
-            </a:r>
-          </a:p>
-        </p:txBody>
-      </p:sp>
-      <p:sp>
-        <p:nvSpPr>
-          <p:cNvPr id="5" name="Rounded Rectangle 4"/>
+              <a:t>Deux onglets à disposition</a:t>
+            </a:r>
+          </a:p>
+        </p:txBody>
+      </p:sp>
+      <p:sp>
+        <p:nvSpPr>
+          <p:cNvPr id="4" name="Rounded Rectangle 3"/>
           <p:cNvSpPr/>
           <p:nvPr/>
         </p:nvSpPr>
         <p:spPr>
           <a:xfrm>
-            <a:off x="640080" y="4937760"/>
-            <a:ext cx="6126480" cy="914400"/>
+            <a:off x="548640" y="1965960"/>
+            <a:ext cx="6309360" cy="548640"/>
           </a:xfrm>
           <a:prstGeom prst="roundRect">
             <a:avLst/>
           </a:prstGeom>
           <a:solidFill>
-            <a:srgbClr val="F0FDF4"/>
+            <a:srgbClr val="F1F5F9"/>
           </a:solidFill>
-          <a:ln w="12700">
-            <a:solidFill>
-              <a:srgbClr val="BBF7D0"/>
-            </a:solidFill>
+          <a:ln>
+            <a:noFill/>
           </a:ln>
           <a:effectLst/>
         </p:spPr>
@@ -7381,44 +8321,29 @@
           </a:fontRef>
         </p:style>
         <p:txBody>
-          <a:bodyPr rtlCol="0" anchor="ctr" wrap="square" lIns="182880" rIns="182880"/>
-          <a:lstStyle/>
-          <a:p>
-            <a:pPr algn="l">
-              <a:lnSpc>
-                <a:spcPct val="125000"/>
-              </a:lnSpc>
-              <a:spcAft>
-                <a:spcPts val="0"/>
-              </a:spcAft>
-            </a:pPr>
-            <a:r>
-              <a:rPr sz="1500" b="0">
-                <a:solidFill>
-                  <a:srgbClr val="166534"/>
-                </a:solidFill>
-              </a:rPr>
-              <a:t>Plus les indispos et vœux sont à jour, mieux l'attribution correspondra aux préférences de chacun.</a:t>
-            </a:r>
-          </a:p>
-        </p:txBody>
-      </p:sp>
-      <p:sp>
-        <p:nvSpPr>
-          <p:cNvPr id="6" name="Rounded Rectangle 5"/>
+          <a:bodyPr rtlCol="0" anchor="ctr"/>
+          <a:lstStyle/>
+          <a:p>
+            <a:pPr algn="ctr"/>
+          </a:p>
+        </p:txBody>
+      </p:sp>
+      <p:sp>
+        <p:nvSpPr>
+          <p:cNvPr id="5" name="Rounded Rectangle 4"/>
           <p:cNvSpPr/>
           <p:nvPr/>
         </p:nvSpPr>
         <p:spPr>
           <a:xfrm>
-            <a:off x="7315200" y="2194560"/>
-            <a:ext cx="4023360" cy="502920"/>
+            <a:off x="640080" y="2029968"/>
+            <a:ext cx="1481328" cy="420624"/>
           </a:xfrm>
           <a:prstGeom prst="roundRect">
             <a:avLst/>
           </a:prstGeom>
           <a:solidFill>
-            <a:srgbClr val="166534"/>
+            <a:srgbClr val="FFFFFF"/>
           </a:solidFill>
           <a:ln>
             <a:noFill/>
@@ -7443,26 +8368,41 @@
           <a:bodyPr rtlCol="0" anchor="ctr"/>
           <a:lstStyle/>
           <a:p>
-            <a:pPr algn="ctr"/>
-          </a:p>
-        </p:txBody>
-      </p:sp>
-      <p:sp>
-        <p:nvSpPr>
-          <p:cNvPr id="7" name="Rounded Rectangle 6"/>
+            <a:pPr algn="ctr">
+              <a:lnSpc>
+                <a:spcPct val="120000"/>
+              </a:lnSpc>
+              <a:spcAft>
+                <a:spcPts val="0"/>
+              </a:spcAft>
+            </a:pPr>
+            <a:r>
+              <a:rPr sz="1300" b="1">
+                <a:solidFill>
+                  <a:srgbClr val="2563EB"/>
+                </a:solidFill>
+              </a:rPr>
+              <a:t>Planning</a:t>
+            </a:r>
+          </a:p>
+        </p:txBody>
+      </p:sp>
+      <p:sp>
+        <p:nvSpPr>
+          <p:cNvPr id="6" name="Rounded Rectangle 5"/>
           <p:cNvSpPr/>
           <p:nvPr/>
         </p:nvSpPr>
         <p:spPr>
           <a:xfrm>
-            <a:off x="7315200" y="2194560"/>
-            <a:ext cx="4023360" cy="502920"/>
+            <a:off x="2212848" y="2029968"/>
+            <a:ext cx="1097280" cy="420624"/>
           </a:xfrm>
           <a:prstGeom prst="roundRect">
             <a:avLst/>
           </a:prstGeom>
           <a:solidFill>
-            <a:srgbClr val="166534"/>
+            <a:srgbClr val="F1F5F9"/>
           </a:solidFill>
           <a:ln>
             <a:noFill/>
@@ -7484,10 +8424,10 @@
           </a:fontRef>
         </p:style>
         <p:txBody>
-          <a:bodyPr rtlCol="0" anchor="ctr" lIns="137160"/>
-          <a:lstStyle/>
-          <a:p>
-            <a:pPr algn="l">
+          <a:bodyPr rtlCol="0" anchor="ctr"/>
+          <a:lstStyle/>
+          <a:p>
+            <a:pPr algn="ctr">
               <a:lnSpc>
                 <a:spcPct val="120000"/>
               </a:lnSpc>
@@ -7496,37 +8436,35 @@
               </a:spcAft>
             </a:pPr>
             <a:r>
-              <a:rPr sz="1500" b="1">
-                <a:solidFill>
-                  <a:srgbClr val="FFFFFF"/>
-                </a:solidFill>
-              </a:rPr>
-              <a:t>Dr Martin</a:t>
-            </a:r>
-          </a:p>
-        </p:txBody>
-      </p:sp>
-      <p:sp>
-        <p:nvSpPr>
-          <p:cNvPr id="8" name="Rounded Rectangle 7"/>
+              <a:rPr sz="1300" b="1">
+                <a:solidFill>
+                  <a:srgbClr val="64748B"/>
+                </a:solidFill>
+              </a:rPr>
+              <a:t>Perso</a:t>
+            </a:r>
+          </a:p>
+        </p:txBody>
+      </p:sp>
+      <p:sp>
+        <p:nvSpPr>
+          <p:cNvPr id="7" name="Rounded Rectangle 6"/>
           <p:cNvSpPr/>
           <p:nvPr/>
         </p:nvSpPr>
         <p:spPr>
           <a:xfrm>
-            <a:off x="7315200" y="2697480"/>
-            <a:ext cx="4023360" cy="1371600"/>
+            <a:off x="3401568" y="2029968"/>
+            <a:ext cx="2505456" cy="420624"/>
           </a:xfrm>
           <a:prstGeom prst="roundRect">
             <a:avLst/>
           </a:prstGeom>
           <a:solidFill>
-            <a:srgbClr val="FFFFFF"/>
+            <a:srgbClr val="F1F5F9"/>
           </a:solidFill>
-          <a:ln w="12700">
-            <a:solidFill>
-              <a:srgbClr val="E2E8F0"/>
-            </a:solidFill>
+          <a:ln>
+            <a:noFill/>
           </a:ln>
           <a:effectLst/>
         </p:spPr>
@@ -7548,108 +8486,44 @@
           <a:bodyPr rtlCol="0" anchor="ctr"/>
           <a:lstStyle/>
           <a:p>
-            <a:pPr algn="ctr"/>
-          </a:p>
-        </p:txBody>
-      </p:sp>
-      <p:sp>
-        <p:nvSpPr>
-          <p:cNvPr id="9" name="TextBox 8"/>
-          <p:cNvSpPr txBox="1"/>
-          <p:nvPr/>
-        </p:nvSpPr>
-        <p:spPr>
-          <a:xfrm>
-            <a:off x="7498079" y="2834640"/>
-            <a:ext cx="1920240" cy="1097280"/>
-          </a:xfrm>
-          <a:prstGeom prst="rect">
-            <a:avLst/>
-          </a:prstGeom>
-          <a:noFill/>
-        </p:spPr>
-        <p:txBody>
-          <a:bodyPr wrap="square" anchor="t">
-            <a:spAutoFit/>
-          </a:bodyPr>
-          <a:lstStyle/>
-          <a:p>
-            <a:pPr algn="l">
+            <a:pPr algn="ctr">
               <a:lnSpc>
                 <a:spcPct val="120000"/>
               </a:lnSpc>
               <a:spcAft>
-                <a:spcPts val="300"/>
-              </a:spcAft>
-            </a:pPr>
-            <a:r>
-              <a:rPr sz="1100" b="1">
-                <a:solidFill>
-                  <a:srgbClr val="64748B"/>
-                </a:solidFill>
-              </a:rPr>
-              <a:t>OBJECTIFS</a:t>
-            </a:r>
-          </a:p>
-          <a:p>
-            <a:pPr algn="l">
-              <a:lnSpc>
-                <a:spcPct val="120000"/>
-              </a:lnSpc>
-              <a:spcAft>
-                <a:spcPts val="100"/>
-              </a:spcAft>
-            </a:pPr>
-            <a:r>
-              <a:rPr sz="1200" b="0">
-                <a:solidFill>
-                  <a:srgbClr val="0F172A"/>
-                </a:solidFill>
-              </a:rPr>
-              <a:t>HMN · Sem 7 · WE 4</a:t>
-            </a:r>
-          </a:p>
-          <a:p>
-            <a:pPr algn="l">
-              <a:lnSpc>
-                <a:spcPct val="120000"/>
-              </a:lnSpc>
-              <a:spcAft>
                 <a:spcPts val="0"/>
               </a:spcAft>
             </a:pPr>
             <a:r>
-              <a:rPr sz="1200" b="0">
-                <a:solidFill>
-                  <a:srgbClr val="0F172A"/>
-                </a:solidFill>
-              </a:rPr>
-              <a:t>ACH · Sem 5 · WE 3</a:t>
-            </a:r>
-          </a:p>
-        </p:txBody>
-      </p:sp>
-      <p:sp>
-        <p:nvSpPr>
-          <p:cNvPr id="10" name="Rounded Rectangle 9"/>
+              <a:rPr sz="1300" b="1">
+                <a:solidFill>
+                  <a:srgbClr val="B0B8C4"/>
+                </a:solidFill>
+              </a:rPr>
+              <a:t>Réglages · admin</a:t>
+            </a:r>
+          </a:p>
+        </p:txBody>
+      </p:sp>
+      <p:sp>
+        <p:nvSpPr>
+          <p:cNvPr id="8" name="Rounded Rectangle 7"/>
           <p:cNvSpPr/>
           <p:nvPr/>
         </p:nvSpPr>
         <p:spPr>
           <a:xfrm>
-            <a:off x="9509760" y="2880360"/>
-            <a:ext cx="1737360" cy="1005840"/>
+            <a:off x="5998464" y="2029968"/>
+            <a:ext cx="1865376" cy="420624"/>
           </a:xfrm>
           <a:prstGeom prst="roundRect">
             <a:avLst/>
           </a:prstGeom>
           <a:solidFill>
-            <a:srgbClr val="F0FDF4"/>
+            <a:srgbClr val="F1F5F9"/>
           </a:solidFill>
-          <a:ln w="12700">
-            <a:solidFill>
-              <a:srgbClr val="166534"/>
-            </a:solidFill>
+          <a:ln>
+            <a:noFill/>
           </a:ln>
           <a:effectLst/>
         </p:spPr>
@@ -7671,20 +8545,35 @@
           <a:bodyPr rtlCol="0" anchor="ctr"/>
           <a:lstStyle/>
           <a:p>
-            <a:pPr algn="ctr"/>
-          </a:p>
-        </p:txBody>
-      </p:sp>
-      <p:sp>
-        <p:nvSpPr>
-          <p:cNvPr id="11" name="TextBox 10"/>
+            <a:pPr algn="ctr">
+              <a:lnSpc>
+                <a:spcPct val="120000"/>
+              </a:lnSpc>
+              <a:spcAft>
+                <a:spcPts val="0"/>
+              </a:spcAft>
+            </a:pPr>
+            <a:r>
+              <a:rPr sz="1300" b="1">
+                <a:solidFill>
+                  <a:srgbClr val="64748B"/>
+                </a:solidFill>
+              </a:rPr>
+              <a:t>Déconnexion</a:t>
+            </a:r>
+          </a:p>
+        </p:txBody>
+      </p:sp>
+      <p:sp>
+        <p:nvSpPr>
+          <p:cNvPr id="9" name="TextBox 8"/>
           <p:cNvSpPr txBox="1"/>
           <p:nvPr/>
         </p:nvSpPr>
         <p:spPr>
           <a:xfrm>
-            <a:off x="9601200" y="2971800"/>
-            <a:ext cx="1554480" cy="822960"/>
+            <a:off x="640080" y="2880360"/>
+            <a:ext cx="10789920" cy="4572000"/>
           </a:xfrm>
           <a:prstGeom prst="rect">
             <a:avLst/>
@@ -7699,37 +8588,244 @@
           <a:p>
             <a:pPr algn="l">
               <a:lnSpc>
-                <a:spcPct val="110000"/>
-              </a:lnSpc>
-              <a:spcAft>
-                <a:spcPts val="300"/>
-              </a:spcAft>
-            </a:pPr>
-            <a:r>
-              <a:rPr sz="1100" b="1">
-                <a:solidFill>
-                  <a:srgbClr val="166534"/>
-                </a:solidFill>
-              </a:rPr>
-              <a:t>Gardes restantes</a:t>
-            </a:r>
-          </a:p>
-          <a:p>
-            <a:pPr algn="l">
-              <a:lnSpc>
-                <a:spcPct val="120000"/>
+                <a:spcPct val="125000"/>
+              </a:lnSpc>
+              <a:spcAft>
+                <a:spcPts val="1400"/>
+              </a:spcAft>
+            </a:pPr>
+            <a:r>
+              <a:rPr sz="1800">
+                <a:solidFill>
+                  <a:srgbClr val="0F172A"/>
+                </a:solidFill>
+              </a:rPr>
+              <a:t>🗓️  </a:t>
+            </a:r>
+            <a:r>
+              <a:rPr sz="1800" b="1">
+                <a:solidFill>
+                  <a:srgbClr val="0F172A"/>
+                </a:solidFill>
+              </a:rPr>
+              <a:t>Planning</a:t>
+            </a:r>
+            <a:r>
+              <a:rPr sz="1800" b="0">
+                <a:solidFill>
+                  <a:srgbClr val="0F172A"/>
+                </a:solidFill>
+              </a:rPr>
+              <a:t> — le calendrier des gardes, en </a:t>
+            </a:r>
+            <a:r>
+              <a:rPr sz="1800" b="1">
+                <a:solidFill>
+                  <a:srgbClr val="0F172A"/>
+                </a:solidFill>
+              </a:rPr>
+              <a:t>lecture seule</a:t>
+            </a:r>
+            <a:r>
+              <a:rPr sz="1800" b="0">
+                <a:solidFill>
+                  <a:srgbClr val="0F172A"/>
+                </a:solidFill>
+              </a:rPr>
+              <a:t>. Il permet de suivre qui prend quoi, en temps réel.</a:t>
+            </a:r>
+          </a:p>
+          <a:p>
+            <a:pPr algn="l">
+              <a:lnSpc>
+                <a:spcPct val="125000"/>
+              </a:lnSpc>
+              <a:spcAft>
+                <a:spcPts val="1400"/>
+              </a:spcAft>
+            </a:pPr>
+            <a:r>
+              <a:rPr sz="1800">
+                <a:solidFill>
+                  <a:srgbClr val="0F172A"/>
+                </a:solidFill>
+              </a:rPr>
+              <a:t>👤  </a:t>
+            </a:r>
+            <a:r>
+              <a:rPr sz="1800" b="1">
+                <a:solidFill>
+                  <a:srgbClr val="0F172A"/>
+                </a:solidFill>
+              </a:rPr>
+              <a:t>Perso</a:t>
+            </a:r>
+            <a:r>
+              <a:rPr sz="1800" b="0">
+                <a:solidFill>
+                  <a:srgbClr val="0F172A"/>
+                </a:solidFill>
+              </a:rPr>
+              <a:t> — l'espace personnel : les objectifs, et l'endroit où déclarer ses </a:t>
+            </a:r>
+            <a:r>
+              <a:rPr sz="1800" b="1">
+                <a:solidFill>
+                  <a:srgbClr val="0F172A"/>
+                </a:solidFill>
+              </a:rPr>
+              <a:t>indispos 🚫</a:t>
+            </a:r>
+            <a:r>
+              <a:rPr sz="1800" b="0">
+                <a:solidFill>
+                  <a:srgbClr val="0F172A"/>
+                </a:solidFill>
+              </a:rPr>
+              <a:t> et ses </a:t>
+            </a:r>
+            <a:r>
+              <a:rPr sz="1800" b="1">
+                <a:solidFill>
+                  <a:srgbClr val="0F172A"/>
+                </a:solidFill>
+              </a:rPr>
+              <a:t>vœux 💙</a:t>
+            </a:r>
+            <a:r>
+              <a:rPr sz="1800" b="0">
+                <a:solidFill>
+                  <a:srgbClr val="0F172A"/>
+                </a:solidFill>
+              </a:rPr>
+              <a:t>.</a:t>
+            </a:r>
+          </a:p>
+          <a:p>
+            <a:pPr algn="l">
+              <a:lnSpc>
+                <a:spcPct val="125000"/>
+              </a:lnSpc>
+              <a:spcAft>
+                <a:spcPts val="1400"/>
+              </a:spcAft>
+            </a:pPr>
+            <a:r>
+              <a:rPr sz="1800">
+                <a:solidFill>
+                  <a:srgbClr val="0F172A"/>
+                </a:solidFill>
+              </a:rPr>
+              <a:t>🔒  </a:t>
+            </a:r>
+            <a:r>
+              <a:rPr sz="1800" b="1">
+                <a:solidFill>
+                  <a:srgbClr val="0F172A"/>
+                </a:solidFill>
+              </a:rPr>
+              <a:t>Réglages</a:t>
+            </a:r>
+            <a:r>
+              <a:rPr sz="1800" b="0">
+                <a:solidFill>
+                  <a:srgbClr val="0F172A"/>
+                </a:solidFill>
+              </a:rPr>
+              <a:t> — réservé à l'admin, il n'apparaît pas côté médecin.</a:t>
+            </a:r>
+          </a:p>
+        </p:txBody>
+      </p:sp>
+      <p:sp>
+        <p:nvSpPr>
+          <p:cNvPr id="10" name="Rounded Rectangle 9"/>
+          <p:cNvSpPr/>
+          <p:nvPr/>
+        </p:nvSpPr>
+        <p:spPr>
+          <a:xfrm>
+            <a:off x="640080" y="5120640"/>
+            <a:ext cx="10789920" cy="822960"/>
+          </a:xfrm>
+          <a:prstGeom prst="roundRect">
+            <a:avLst/>
+          </a:prstGeom>
+          <a:solidFill>
+            <a:srgbClr val="EFF6FF"/>
+          </a:solidFill>
+          <a:ln w="12700">
+            <a:solidFill>
+              <a:srgbClr val="BFDBFE"/>
+            </a:solidFill>
+          </a:ln>
+          <a:effectLst/>
+        </p:spPr>
+        <p:style>
+          <a:lnRef idx="1">
+            <a:schemeClr val="accent1"/>
+          </a:lnRef>
+          <a:fillRef idx="3">
+            <a:schemeClr val="accent1"/>
+          </a:fillRef>
+          <a:effectRef idx="2">
+            <a:schemeClr val="accent1"/>
+          </a:effectRef>
+          <a:fontRef idx="minor">
+            <a:schemeClr val="lt1"/>
+          </a:fontRef>
+        </p:style>
+        <p:txBody>
+          <a:bodyPr rtlCol="0" anchor="ctr" wrap="square" lIns="182880" rIns="182880"/>
+          <a:lstStyle/>
+          <a:p>
+            <a:pPr algn="l">
+              <a:lnSpc>
+                <a:spcPct val="125000"/>
               </a:lnSpc>
               <a:spcAft>
                 <a:spcPts val="0"/>
               </a:spcAft>
             </a:pPr>
             <a:r>
-              <a:rPr sz="1200" b="0">
-                <a:solidFill>
-                  <a:srgbClr val="0F172A"/>
-                </a:solidFill>
-              </a:rPr>
-              <a:t>HMN 3 · ACH 2</a:t>
+              <a:rPr sz="1500" b="0">
+                <a:solidFill>
+                  <a:srgbClr val="1E3A8A"/>
+                </a:solidFill>
+              </a:rPr>
+              <a:t>Le passage de </a:t>
+            </a:r>
+            <a:r>
+              <a:rPr sz="1500" b="1">
+                <a:solidFill>
+                  <a:srgbClr val="1E3A8A"/>
+                </a:solidFill>
+              </a:rPr>
+              <a:t>Perso</a:t>
+            </a:r>
+            <a:r>
+              <a:rPr sz="1500" b="0">
+                <a:solidFill>
+                  <a:srgbClr val="1E3A8A"/>
+                </a:solidFill>
+              </a:rPr>
+              <a:t> à </a:t>
+            </a:r>
+            <a:r>
+              <a:rPr sz="1500" b="1">
+                <a:solidFill>
+                  <a:srgbClr val="1E3A8A"/>
+                </a:solidFill>
+              </a:rPr>
+              <a:t>Planning</a:t>
+            </a:r>
+            <a:r>
+              <a:rPr sz="1500" b="0">
+                <a:solidFill>
+                  <a:srgbClr val="1E3A8A"/>
+                </a:solidFill>
+              </a:rPr>
+              <a:t> est possible à tout moment : les déclarations sont enregistrées automatiquement.</a:t>
             </a:r>
           </a:p>
         </p:txBody>
@@ -7788,7 +8884,7 @@
                   <a:srgbClr val="2563EB"/>
                 </a:solidFill>
               </a:rPr>
-              <a:t>ÉTAPE 2 · DÉCLARER</a:t>
+              <a:t>ÉTAPE 2 · PERSO</a:t>
             </a:r>
           </a:p>
         </p:txBody>
@@ -7829,27 +8925,350 @@
                   <a:srgbClr val="0F172A"/>
                 </a:solidFill>
               </a:rPr>
-              <a:t>Poser une indispo 🚫 ou un vœu 💙</a:t>
-            </a:r>
-          </a:p>
-        </p:txBody>
-      </p:sp>
-      <p:sp>
-        <p:nvSpPr>
-          <p:cNvPr id="4" name="Rounded Rectangle 3"/>
+              <a:t>L'onglet Perso en un coup d'œil</a:t>
+            </a:r>
+          </a:p>
+        </p:txBody>
+      </p:sp>
+      <p:sp>
+        <p:nvSpPr>
+          <p:cNvPr id="4" name="TextBox 3"/>
+          <p:cNvSpPr txBox="1"/>
+          <p:nvPr/>
+        </p:nvSpPr>
+        <p:spPr>
+          <a:xfrm>
+            <a:off x="640080" y="2011680"/>
+            <a:ext cx="6126480" cy="4572000"/>
+          </a:xfrm>
+          <a:prstGeom prst="rect">
+            <a:avLst/>
+          </a:prstGeom>
+          <a:noFill/>
+        </p:spPr>
+        <p:txBody>
+          <a:bodyPr wrap="square" anchor="t">
+            <a:spAutoFit/>
+          </a:bodyPr>
+          <a:lstStyle/>
+          <a:p>
+            <a:pPr algn="l">
+              <a:lnSpc>
+                <a:spcPct val="125000"/>
+              </a:lnSpc>
+              <a:spcAft>
+                <a:spcPts val="1200"/>
+              </a:spcAft>
+            </a:pPr>
+            <a:r>
+              <a:rPr sz="1800">
+                <a:solidFill>
+                  <a:srgbClr val="0F172A"/>
+                </a:solidFill>
+              </a:rPr>
+              <a:t>🎯  </a:t>
+            </a:r>
+            <a:r>
+              <a:rPr sz="1800" b="1">
+                <a:solidFill>
+                  <a:srgbClr val="0F172A"/>
+                </a:solidFill>
+              </a:rPr>
+              <a:t>Mes objectifs restants</a:t>
+            </a:r>
+            <a:r>
+              <a:rPr sz="1800" b="0">
+                <a:solidFill>
+                  <a:srgbClr val="0F172A"/>
+                </a:solidFill>
+              </a:rPr>
+              <a:t> — le nombre de gardes restant à obtenir (par site, semaine / WE-férié).</a:t>
+            </a:r>
+          </a:p>
+          <a:p>
+            <a:pPr algn="l">
+              <a:lnSpc>
+                <a:spcPct val="125000"/>
+              </a:lnSpc>
+              <a:spcAft>
+                <a:spcPts val="1200"/>
+              </a:spcAft>
+            </a:pPr>
+            <a:r>
+              <a:rPr sz="1800">
+                <a:solidFill>
+                  <a:srgbClr val="0F172A"/>
+                </a:solidFill>
+              </a:rPr>
+              <a:t>⏭️  </a:t>
+            </a:r>
+            <a:r>
+              <a:rPr sz="1800" b="1">
+                <a:solidFill>
+                  <a:srgbClr val="0F172A"/>
+                </a:solidFill>
+              </a:rPr>
+              <a:t>À mon prochain tour</a:t>
+            </a:r>
+            <a:r>
+              <a:rPr sz="1800" b="0">
+                <a:solidFill>
+                  <a:srgbClr val="0F172A"/>
+                </a:solidFill>
+              </a:rPr>
+              <a:t> — un rappel de ce qui pourra être choisi.</a:t>
+            </a:r>
+          </a:p>
+          <a:p>
+            <a:pPr algn="l">
+              <a:lnSpc>
+                <a:spcPct val="125000"/>
+              </a:lnSpc>
+              <a:spcAft>
+                <a:spcPts val="1200"/>
+              </a:spcAft>
+            </a:pPr>
+            <a:r>
+              <a:rPr sz="1800">
+                <a:solidFill>
+                  <a:srgbClr val="0F172A"/>
+                </a:solidFill>
+              </a:rPr>
+              <a:t>🚫  </a:t>
+            </a:r>
+            <a:r>
+              <a:rPr sz="1800" b="1">
+                <a:solidFill>
+                  <a:srgbClr val="0F172A"/>
+                </a:solidFill>
+              </a:rPr>
+              <a:t>Indispos</a:t>
+            </a:r>
+            <a:r>
+              <a:rPr sz="1800" b="0">
+                <a:solidFill>
+                  <a:srgbClr val="0F172A"/>
+                </a:solidFill>
+              </a:rPr>
+              <a:t> — les jours d'indisponibilité.</a:t>
+            </a:r>
+          </a:p>
+          <a:p>
+            <a:pPr algn="l">
+              <a:lnSpc>
+                <a:spcPct val="125000"/>
+              </a:lnSpc>
+              <a:spcAft>
+                <a:spcPts val="1200"/>
+              </a:spcAft>
+            </a:pPr>
+            <a:r>
+              <a:rPr sz="1800">
+                <a:solidFill>
+                  <a:srgbClr val="0F172A"/>
+                </a:solidFill>
+              </a:rPr>
+              <a:t>💙  </a:t>
+            </a:r>
+            <a:r>
+              <a:rPr sz="1800" b="1">
+                <a:solidFill>
+                  <a:srgbClr val="0F172A"/>
+                </a:solidFill>
+              </a:rPr>
+              <a:t>Vœux</a:t>
+            </a:r>
+            <a:r>
+              <a:rPr sz="1800" b="0">
+                <a:solidFill>
+                  <a:srgbClr val="0F172A"/>
+                </a:solidFill>
+              </a:rPr>
+              <a:t> — les jours / sites souhaités.</a:t>
+            </a:r>
+          </a:p>
+        </p:txBody>
+      </p:sp>
+      <p:sp>
+        <p:nvSpPr>
+          <p:cNvPr id="5" name="Rounded Rectangle 4"/>
           <p:cNvSpPr/>
           <p:nvPr/>
         </p:nvSpPr>
         <p:spPr>
           <a:xfrm>
-            <a:off x="640080" y="2011680"/>
+            <a:off x="640080" y="4937760"/>
             <a:ext cx="6126480" cy="914400"/>
           </a:xfrm>
           <a:prstGeom prst="roundRect">
             <a:avLst/>
           </a:prstGeom>
           <a:solidFill>
-            <a:srgbClr val="F8FAFC"/>
+            <a:srgbClr val="F0FDF4"/>
+          </a:solidFill>
+          <a:ln w="12700">
+            <a:solidFill>
+              <a:srgbClr val="BBF7D0"/>
+            </a:solidFill>
+          </a:ln>
+          <a:effectLst/>
+        </p:spPr>
+        <p:style>
+          <a:lnRef idx="1">
+            <a:schemeClr val="accent1"/>
+          </a:lnRef>
+          <a:fillRef idx="3">
+            <a:schemeClr val="accent1"/>
+          </a:fillRef>
+          <a:effectRef idx="2">
+            <a:schemeClr val="accent1"/>
+          </a:effectRef>
+          <a:fontRef idx="minor">
+            <a:schemeClr val="lt1"/>
+          </a:fontRef>
+        </p:style>
+        <p:txBody>
+          <a:bodyPr rtlCol="0" anchor="ctr" wrap="square" lIns="182880" rIns="182880"/>
+          <a:lstStyle/>
+          <a:p>
+            <a:pPr algn="l">
+              <a:lnSpc>
+                <a:spcPct val="125000"/>
+              </a:lnSpc>
+              <a:spcAft>
+                <a:spcPts val="0"/>
+              </a:spcAft>
+            </a:pPr>
+            <a:r>
+              <a:rPr sz="1500" b="0">
+                <a:solidFill>
+                  <a:srgbClr val="166534"/>
+                </a:solidFill>
+              </a:rPr>
+              <a:t>Plus les indispos et vœux sont à jour, mieux l'attribution correspondra aux préférences de chacun.</a:t>
+            </a:r>
+          </a:p>
+        </p:txBody>
+      </p:sp>
+      <p:sp>
+        <p:nvSpPr>
+          <p:cNvPr id="6" name="Rounded Rectangle 5"/>
+          <p:cNvSpPr/>
+          <p:nvPr/>
+        </p:nvSpPr>
+        <p:spPr>
+          <a:xfrm>
+            <a:off x="7315200" y="2194560"/>
+            <a:ext cx="4023360" cy="502920"/>
+          </a:xfrm>
+          <a:prstGeom prst="roundRect">
+            <a:avLst/>
+          </a:prstGeom>
+          <a:solidFill>
+            <a:srgbClr val="166534"/>
+          </a:solidFill>
+          <a:ln>
+            <a:noFill/>
+          </a:ln>
+          <a:effectLst/>
+        </p:spPr>
+        <p:style>
+          <a:lnRef idx="1">
+            <a:schemeClr val="accent1"/>
+          </a:lnRef>
+          <a:fillRef idx="3">
+            <a:schemeClr val="accent1"/>
+          </a:fillRef>
+          <a:effectRef idx="2">
+            <a:schemeClr val="accent1"/>
+          </a:effectRef>
+          <a:fontRef idx="minor">
+            <a:schemeClr val="lt1"/>
+          </a:fontRef>
+        </p:style>
+        <p:txBody>
+          <a:bodyPr rtlCol="0" anchor="ctr"/>
+          <a:lstStyle/>
+          <a:p>
+            <a:pPr algn="ctr"/>
+          </a:p>
+        </p:txBody>
+      </p:sp>
+      <p:sp>
+        <p:nvSpPr>
+          <p:cNvPr id="7" name="Rounded Rectangle 6"/>
+          <p:cNvSpPr/>
+          <p:nvPr/>
+        </p:nvSpPr>
+        <p:spPr>
+          <a:xfrm>
+            <a:off x="7315200" y="2194560"/>
+            <a:ext cx="4023360" cy="502920"/>
+          </a:xfrm>
+          <a:prstGeom prst="roundRect">
+            <a:avLst/>
+          </a:prstGeom>
+          <a:solidFill>
+            <a:srgbClr val="166534"/>
+          </a:solidFill>
+          <a:ln>
+            <a:noFill/>
+          </a:ln>
+          <a:effectLst/>
+        </p:spPr>
+        <p:style>
+          <a:lnRef idx="1">
+            <a:schemeClr val="accent1"/>
+          </a:lnRef>
+          <a:fillRef idx="3">
+            <a:schemeClr val="accent1"/>
+          </a:fillRef>
+          <a:effectRef idx="2">
+            <a:schemeClr val="accent1"/>
+          </a:effectRef>
+          <a:fontRef idx="minor">
+            <a:schemeClr val="lt1"/>
+          </a:fontRef>
+        </p:style>
+        <p:txBody>
+          <a:bodyPr rtlCol="0" anchor="ctr" lIns="137160"/>
+          <a:lstStyle/>
+          <a:p>
+            <a:pPr algn="l">
+              <a:lnSpc>
+                <a:spcPct val="120000"/>
+              </a:lnSpc>
+              <a:spcAft>
+                <a:spcPts val="0"/>
+              </a:spcAft>
+            </a:pPr>
+            <a:r>
+              <a:rPr sz="1500" b="1">
+                <a:solidFill>
+                  <a:srgbClr val="FFFFFF"/>
+                </a:solidFill>
+              </a:rPr>
+              <a:t>Dr Martin</a:t>
+            </a:r>
+          </a:p>
+        </p:txBody>
+      </p:sp>
+      <p:sp>
+        <p:nvSpPr>
+          <p:cNvPr id="8" name="Rounded Rectangle 7"/>
+          <p:cNvSpPr/>
+          <p:nvPr/>
+        </p:nvSpPr>
+        <p:spPr>
+          <a:xfrm>
+            <a:off x="7315200" y="2697480"/>
+            <a:ext cx="4023360" cy="1371600"/>
+          </a:xfrm>
+          <a:prstGeom prst="roundRect">
+            <a:avLst/>
+          </a:prstGeom>
+          <a:solidFill>
+            <a:srgbClr val="FFFFFF"/>
           </a:solidFill>
           <a:ln w="12700">
             <a:solidFill>
@@ -7873,94 +9292,23 @@
           </a:fontRef>
         </p:style>
         <p:txBody>
-          <a:bodyPr rtlCol="0" anchor="ctr" wrap="square" lIns="182880" rIns="182880"/>
-          <a:lstStyle/>
-          <a:p>
-            <a:pPr algn="l">
-              <a:lnSpc>
-                <a:spcPct val="125000"/>
-              </a:lnSpc>
-              <a:spcAft>
-                <a:spcPts val="0"/>
-              </a:spcAft>
-            </a:pPr>
-            <a:r>
-              <a:rPr sz="1400" b="0">
-                <a:solidFill>
-                  <a:srgbClr val="475569"/>
-                </a:solidFill>
-              </a:rPr>
-              <a:t>Clic sur la </a:t>
-            </a:r>
-            <a:r>
-              <a:rPr sz="1400" b="1">
-                <a:solidFill>
-                  <a:srgbClr val="475569"/>
-                </a:solidFill>
-              </a:rPr>
-              <a:t>date</a:t>
-            </a:r>
-            <a:r>
-              <a:rPr sz="1400" b="0">
-                <a:solidFill>
-                  <a:srgbClr val="475569"/>
-                </a:solidFill>
-              </a:rPr>
-              <a:t> = 🚫 indispo (re-clic = annuler).  </a:t>
-            </a:r>
-            <a:r>
-              <a:rPr sz="1400" b="0">
-                <a:solidFill>
-                  <a:srgbClr val="475569"/>
-                </a:solidFill>
-              </a:rPr>
-              <a:t>Clic sur </a:t>
-            </a:r>
-            <a:r>
-              <a:rPr sz="1400" b="1">
-                <a:solidFill>
-                  <a:srgbClr val="475569"/>
-                </a:solidFill>
-              </a:rPr>
-              <a:t>HMN</a:t>
-            </a:r>
-            <a:r>
-              <a:rPr sz="1400" b="0">
-                <a:solidFill>
-                  <a:srgbClr val="475569"/>
-                </a:solidFill>
-              </a:rPr>
-              <a:t> ou </a:t>
-            </a:r>
-            <a:r>
-              <a:rPr sz="1400" b="1">
-                <a:solidFill>
-                  <a:srgbClr val="475569"/>
-                </a:solidFill>
-              </a:rPr>
-              <a:t>ACH</a:t>
-            </a:r>
-            <a:r>
-              <a:rPr sz="1400" b="0">
-                <a:solidFill>
-                  <a:srgbClr val="475569"/>
-                </a:solidFill>
-              </a:rPr>
-              <a:t> = 💙 vœu sur ce site (re-clic = annuler).</a:t>
-            </a:r>
-          </a:p>
-        </p:txBody>
-      </p:sp>
-      <p:sp>
-        <p:nvSpPr>
-          <p:cNvPr id="5" name="TextBox 4"/>
+          <a:bodyPr rtlCol="0" anchor="ctr"/>
+          <a:lstStyle/>
+          <a:p>
+            <a:pPr algn="ctr"/>
+          </a:p>
+        </p:txBody>
+      </p:sp>
+      <p:sp>
+        <p:nvSpPr>
+          <p:cNvPr id="9" name="TextBox 8"/>
           <p:cNvSpPr txBox="1"/>
           <p:nvPr/>
         </p:nvSpPr>
         <p:spPr>
           <a:xfrm>
-            <a:off x="640080" y="3108960"/>
-            <a:ext cx="6309360" cy="4572000"/>
+            <a:off x="7498079" y="2834640"/>
+            <a:ext cx="1920240" cy="1097280"/>
           </a:xfrm>
           <a:prstGeom prst="rect">
             <a:avLst/>
@@ -7975,209 +9323,79 @@
           <a:p>
             <a:pPr algn="l">
               <a:lnSpc>
-                <a:spcPct val="125000"/>
-              </a:lnSpc>
-              <a:spcAft>
-                <a:spcPts val="1100"/>
-              </a:spcAft>
-            </a:pPr>
-            <a:r>
-              <a:rPr sz="1700">
-                <a:solidFill>
-                  <a:srgbClr val="0F172A"/>
-                </a:solidFill>
-              </a:rPr>
-              <a:t>🚫  </a:t>
-            </a:r>
-            <a:r>
-              <a:rPr sz="1700" b="1">
-                <a:solidFill>
-                  <a:srgbClr val="0F172A"/>
-                </a:solidFill>
-              </a:rPr>
-              <a:t>Indispo</a:t>
-            </a:r>
-            <a:r>
-              <a:rPr sz="1700" b="0">
-                <a:solidFill>
-                  <a:srgbClr val="0F172A"/>
-                </a:solidFill>
-              </a:rPr>
-              <a:t> : cliquer sur le </a:t>
-            </a:r>
-            <a:r>
-              <a:rPr sz="1700" b="1">
-                <a:solidFill>
-                  <a:srgbClr val="0F172A"/>
-                </a:solidFill>
-              </a:rPr>
-              <a:t>numéro du jour</a:t>
-            </a:r>
-            <a:r>
-              <a:rPr sz="1700" b="0">
-                <a:solidFill>
-                  <a:srgbClr val="0F172A"/>
-                </a:solidFill>
-              </a:rPr>
-              <a:t> → la case devient rouge.</a:t>
-            </a:r>
-          </a:p>
-          <a:p>
-            <a:pPr algn="l">
-              <a:lnSpc>
-                <a:spcPct val="125000"/>
-              </a:lnSpc>
-              <a:spcAft>
-                <a:spcPts val="1100"/>
-              </a:spcAft>
-            </a:pPr>
-            <a:r>
-              <a:rPr sz="1700">
-                <a:solidFill>
-                  <a:srgbClr val="0F172A"/>
-                </a:solidFill>
-              </a:rPr>
-              <a:t>💙  </a:t>
-            </a:r>
-            <a:r>
-              <a:rPr sz="1700" b="1">
-                <a:solidFill>
-                  <a:srgbClr val="0F172A"/>
-                </a:solidFill>
-              </a:rPr>
-              <a:t>Vœu</a:t>
-            </a:r>
-            <a:r>
-              <a:rPr sz="1700" b="0">
-                <a:solidFill>
-                  <a:srgbClr val="0F172A"/>
-                </a:solidFill>
-              </a:rPr>
-              <a:t> : cliquer sur </a:t>
-            </a:r>
-            <a:r>
-              <a:rPr sz="1700" b="1">
-                <a:solidFill>
-                  <a:srgbClr val="0F172A"/>
-                </a:solidFill>
-              </a:rPr>
-              <a:t>HMN</a:t>
-            </a:r>
-            <a:r>
-              <a:rPr sz="1700" b="0">
-                <a:solidFill>
-                  <a:srgbClr val="0F172A"/>
-                </a:solidFill>
-              </a:rPr>
-              <a:t> ou </a:t>
-            </a:r>
-            <a:r>
-              <a:rPr sz="1700" b="1">
-                <a:solidFill>
-                  <a:srgbClr val="0F172A"/>
-                </a:solidFill>
-              </a:rPr>
-              <a:t>ACH</a:t>
-            </a:r>
-            <a:r>
-              <a:rPr sz="1700" b="0">
-                <a:solidFill>
-                  <a:srgbClr val="0F172A"/>
-                </a:solidFill>
-              </a:rPr>
-              <a:t> → fond bleu + cœur.</a:t>
-            </a:r>
-          </a:p>
-          <a:p>
-            <a:pPr algn="l">
-              <a:lnSpc>
-                <a:spcPct val="125000"/>
-              </a:lnSpc>
-              <a:spcAft>
-                <a:spcPts val="1100"/>
-              </a:spcAft>
-            </a:pPr>
-            <a:r>
-              <a:rPr sz="1700">
-                <a:solidFill>
-                  <a:srgbClr val="0F172A"/>
-                </a:solidFill>
-              </a:rPr>
-              <a:t>🔁  </a:t>
-            </a:r>
-            <a:r>
-              <a:rPr sz="1700" b="1">
-                <a:solidFill>
-                  <a:srgbClr val="0F172A"/>
-                </a:solidFill>
-              </a:rPr>
-              <a:t>Annuler</a:t>
-            </a:r>
-            <a:r>
-              <a:rPr sz="1700" b="0">
-                <a:solidFill>
-                  <a:srgbClr val="0F172A"/>
-                </a:solidFill>
-              </a:rPr>
-              <a:t> : re-cliquer au même endroit.</a:t>
-            </a:r>
-          </a:p>
-          <a:p>
-            <a:pPr algn="l">
-              <a:lnSpc>
-                <a:spcPct val="125000"/>
-              </a:lnSpc>
-              <a:spcAft>
-                <a:spcPts val="1100"/>
-              </a:spcAft>
-            </a:pPr>
-            <a:r>
-              <a:rPr sz="1700">
-                <a:solidFill>
-                  <a:srgbClr val="0F172A"/>
-                </a:solidFill>
-              </a:rPr>
-              <a:t>⛔  </a:t>
-            </a:r>
-            <a:r>
-              <a:rPr sz="1700" b="1">
-                <a:solidFill>
-                  <a:srgbClr val="0F172A"/>
-                </a:solidFill>
-              </a:rPr>
-              <a:t>Exclusifs</a:t>
-            </a:r>
-            <a:r>
-              <a:rPr sz="1700" b="0">
-                <a:solidFill>
-                  <a:srgbClr val="0F172A"/>
-                </a:solidFill>
-              </a:rPr>
-              <a:t> : un jour est soit indispo, soit vœu — pas les deux.</a:t>
-            </a:r>
-          </a:p>
-        </p:txBody>
-      </p:sp>
-      <p:sp>
-        <p:nvSpPr>
-          <p:cNvPr id="6" name="Rounded Rectangle 5"/>
+                <a:spcPct val="120000"/>
+              </a:lnSpc>
+              <a:spcAft>
+                <a:spcPts val="300"/>
+              </a:spcAft>
+            </a:pPr>
+            <a:r>
+              <a:rPr sz="1100" b="1">
+                <a:solidFill>
+                  <a:srgbClr val="64748B"/>
+                </a:solidFill>
+              </a:rPr>
+              <a:t>OBJECTIFS</a:t>
+            </a:r>
+          </a:p>
+          <a:p>
+            <a:pPr algn="l">
+              <a:lnSpc>
+                <a:spcPct val="120000"/>
+              </a:lnSpc>
+              <a:spcAft>
+                <a:spcPts val="100"/>
+              </a:spcAft>
+            </a:pPr>
+            <a:r>
+              <a:rPr sz="1200" b="0">
+                <a:solidFill>
+                  <a:srgbClr val="0F172A"/>
+                </a:solidFill>
+              </a:rPr>
+              <a:t>HMN · Sem 7 · WE 4</a:t>
+            </a:r>
+          </a:p>
+          <a:p>
+            <a:pPr algn="l">
+              <a:lnSpc>
+                <a:spcPct val="120000"/>
+              </a:lnSpc>
+              <a:spcAft>
+                <a:spcPts val="0"/>
+              </a:spcAft>
+            </a:pPr>
+            <a:r>
+              <a:rPr sz="1200" b="0">
+                <a:solidFill>
+                  <a:srgbClr val="0F172A"/>
+                </a:solidFill>
+              </a:rPr>
+              <a:t>ACH · Sem 5 · WE 3</a:t>
+            </a:r>
+          </a:p>
+        </p:txBody>
+      </p:sp>
+      <p:sp>
+        <p:nvSpPr>
+          <p:cNvPr id="10" name="Rounded Rectangle 9"/>
           <p:cNvSpPr/>
           <p:nvPr/>
         </p:nvSpPr>
         <p:spPr>
           <a:xfrm>
-            <a:off x="7863840" y="2377440"/>
-            <a:ext cx="1554480" cy="1280160"/>
+            <a:off x="9509760" y="2880360"/>
+            <a:ext cx="1737360" cy="1005840"/>
           </a:xfrm>
           <a:prstGeom prst="roundRect">
             <a:avLst/>
           </a:prstGeom>
           <a:solidFill>
-            <a:srgbClr val="FEF2F2"/>
+            <a:srgbClr val="F0FDF4"/>
           </a:solidFill>
-          <a:ln w="19050">
+          <a:ln w="12700">
             <a:solidFill>
-              <a:srgbClr val="FCA5A5"/>
+              <a:srgbClr val="166534"/>
             </a:solidFill>
           </a:ln>
           <a:effectLst/>
@@ -8197,171 +9415,23 @@
           </a:fontRef>
         </p:style>
         <p:txBody>
-          <a:bodyPr rtlCol="0" anchor="ctr" wrap="none" lIns="45720" rIns="45720" tIns="36576" bIns="18288"/>
-          <a:lstStyle/>
-          <a:p>
-            <a:pPr algn="ctr">
-              <a:lnSpc>
-                <a:spcPct val="120000"/>
-              </a:lnSpc>
-              <a:spcAft>
-                <a:spcPts val="200"/>
-              </a:spcAft>
-            </a:pPr>
-            <a:r>
-              <a:rPr sz="1500" b="1">
-                <a:solidFill>
-                  <a:srgbClr val="0F172A"/>
-                </a:solidFill>
-              </a:rPr>
-              <a:t>12 🚫</a:t>
-            </a:r>
-          </a:p>
-          <a:p>
-            <a:pPr algn="l">
-              <a:lnSpc>
-                <a:spcPct val="120000"/>
-              </a:lnSpc>
-              <a:spcAft>
-                <a:spcPts val="100"/>
-              </a:spcAft>
-            </a:pPr>
-            <a:r>
-              <a:rPr sz="1100" b="0">
-                <a:solidFill>
-                  <a:srgbClr val="64748B"/>
-                </a:solidFill>
-              </a:rPr>
-              <a:t>HMN</a:t>
-            </a:r>
-          </a:p>
-          <a:p>
-            <a:pPr algn="l">
-              <a:lnSpc>
-                <a:spcPct val="120000"/>
-              </a:lnSpc>
-              <a:spcAft>
-                <a:spcPts val="0"/>
-              </a:spcAft>
-            </a:pPr>
-            <a:r>
-              <a:rPr sz="1100" b="0">
-                <a:solidFill>
-                  <a:srgbClr val="64748B"/>
-                </a:solidFill>
-              </a:rPr>
-              <a:t>ACH</a:t>
-            </a:r>
-          </a:p>
-        </p:txBody>
-      </p:sp>
-      <p:sp>
-        <p:nvSpPr>
-          <p:cNvPr id="7" name="Rounded Rectangle 6"/>
-          <p:cNvSpPr/>
-          <p:nvPr/>
-        </p:nvSpPr>
-        <p:spPr>
-          <a:xfrm>
-            <a:off x="9601200" y="2377440"/>
-            <a:ext cx="1554480" cy="1280160"/>
-          </a:xfrm>
-          <a:prstGeom prst="roundRect">
-            <a:avLst/>
-          </a:prstGeom>
-          <a:solidFill>
-            <a:srgbClr val="BFDBFE"/>
-          </a:solidFill>
-          <a:ln w="12700">
-            <a:solidFill>
-              <a:srgbClr val="E2E8F0"/>
-            </a:solidFill>
-          </a:ln>
-          <a:effectLst/>
-        </p:spPr>
-        <p:style>
-          <a:lnRef idx="1">
-            <a:schemeClr val="accent1"/>
-          </a:lnRef>
-          <a:fillRef idx="3">
-            <a:schemeClr val="accent1"/>
-          </a:fillRef>
-          <a:effectRef idx="2">
-            <a:schemeClr val="accent1"/>
-          </a:effectRef>
-          <a:fontRef idx="minor">
-            <a:schemeClr val="lt1"/>
-          </a:fontRef>
-        </p:style>
-        <p:txBody>
-          <a:bodyPr rtlCol="0" anchor="ctr" wrap="none" lIns="45720" rIns="45720" tIns="36576" bIns="18288"/>
-          <a:lstStyle/>
-          <a:p>
-            <a:pPr algn="ctr">
-              <a:lnSpc>
-                <a:spcPct val="120000"/>
-              </a:lnSpc>
-              <a:spcAft>
-                <a:spcPts val="200"/>
-              </a:spcAft>
-            </a:pPr>
-            <a:r>
-              <a:rPr sz="1500" b="1">
-                <a:solidFill>
-                  <a:srgbClr val="0F172A"/>
-                </a:solidFill>
-              </a:rPr>
-              <a:t>14</a:t>
-            </a:r>
-          </a:p>
-          <a:p>
-            <a:pPr algn="l">
-              <a:lnSpc>
-                <a:spcPct val="120000"/>
-              </a:lnSpc>
-              <a:spcAft>
-                <a:spcPts val="100"/>
-              </a:spcAft>
-            </a:pPr>
-            <a:r>
-              <a:rPr sz="1100" b="1">
-                <a:solidFill>
-                  <a:srgbClr val="475569"/>
-                </a:solidFill>
-              </a:rPr>
-              <a:t>HMN</a:t>
-            </a:r>
-          </a:p>
-          <a:p>
-            <a:pPr algn="l">
-              <a:lnSpc>
-                <a:spcPct val="120000"/>
-              </a:lnSpc>
-              <a:spcAft>
-                <a:spcPts val="0"/>
-              </a:spcAft>
-            </a:pPr>
-            <a:r>
-              <a:rPr sz="1100" b="0">
-                <a:solidFill>
-                  <a:srgbClr val="64748B"/>
-                </a:solidFill>
-              </a:rPr>
-              <a:t>ACH</a:t>
-            </a:r>
-          </a:p>
-        </p:txBody>
-      </p:sp>
-      <p:sp>
-        <p:nvSpPr>
-          <p:cNvPr id="8" name="TextBox 7"/>
+          <a:bodyPr rtlCol="0" anchor="ctr"/>
+          <a:lstStyle/>
+          <a:p>
+            <a:pPr algn="ctr"/>
+          </a:p>
+        </p:txBody>
+      </p:sp>
+      <p:sp>
+        <p:nvSpPr>
+          <p:cNvPr id="11" name="TextBox 10"/>
           <p:cNvSpPr txBox="1"/>
           <p:nvPr/>
         </p:nvSpPr>
         <p:spPr>
           <a:xfrm>
-            <a:off x="9601200" y="2359152"/>
-            <a:ext cx="1554480" cy="274320"/>
+            <a:off x="9601200" y="2971800"/>
+            <a:ext cx="1554480" cy="822960"/>
           </a:xfrm>
           <a:prstGeom prst="rect">
             <a:avLst/>
@@ -8374,7 +9444,25 @@
           </a:bodyPr>
           <a:lstStyle/>
           <a:p>
-            <a:pPr algn="r">
+            <a:pPr algn="l">
+              <a:lnSpc>
+                <a:spcPct val="110000"/>
+              </a:lnSpc>
+              <a:spcAft>
+                <a:spcPts val="300"/>
+              </a:spcAft>
+            </a:pPr>
+            <a:r>
+              <a:rPr sz="1100" b="1">
+                <a:solidFill>
+                  <a:srgbClr val="166534"/>
+                </a:solidFill>
+              </a:rPr>
+              <a:t>Gardes restantes</a:t>
+            </a:r>
+          </a:p>
+          <a:p>
+            <a:pPr algn="l">
               <a:lnSpc>
                 <a:spcPct val="120000"/>
               </a:lnSpc>
@@ -8383,61 +9471,12 @@
               </a:spcAft>
             </a:pPr>
             <a:r>
-              <a:rPr sz="800" b="1">
-                <a:solidFill>
-                  <a:srgbClr val="0F172A"/>
-                </a:solidFill>
-              </a:rPr>
-              <a:t>💙HMN</a:t>
-            </a:r>
-          </a:p>
-        </p:txBody>
-      </p:sp>
-      <p:sp>
-        <p:nvSpPr>
-          <p:cNvPr id="9" name="TextBox 8"/>
-          <p:cNvSpPr txBox="1"/>
-          <p:nvPr/>
-        </p:nvSpPr>
-        <p:spPr>
-          <a:xfrm>
-            <a:off x="7589520" y="3794760"/>
-            <a:ext cx="3657600" cy="457200"/>
-          </a:xfrm>
-          <a:prstGeom prst="rect">
-            <a:avLst/>
-          </a:prstGeom>
-          <a:noFill/>
-        </p:spPr>
-        <p:txBody>
-          <a:bodyPr wrap="square" anchor="t">
-            <a:spAutoFit/>
-          </a:bodyPr>
-          <a:lstStyle/>
-          <a:p>
-            <a:pPr algn="ctr">
-              <a:lnSpc>
-                <a:spcPct val="120000"/>
-              </a:lnSpc>
-              <a:spcAft>
-                <a:spcPts val="0"/>
-              </a:spcAft>
-            </a:pPr>
-            <a:r>
-              <a:rPr sz="1200" b="1">
-                <a:solidFill>
-                  <a:srgbClr val="0F172A"/>
-                </a:solidFill>
-              </a:rPr>
-              <a:t>indispo 🚫</a:t>
-            </a:r>
-            <a:r>
-              <a:rPr sz="1200" b="1">
-                <a:solidFill>
-                  <a:srgbClr val="0F172A"/>
-                </a:solidFill>
-              </a:rPr>
-              <a:t>      vœu 💙 sur HMN</a:t>
+              <a:rPr sz="1200" b="0">
+                <a:solidFill>
+                  <a:srgbClr val="0F172A"/>
+                </a:solidFill>
+              </a:rPr>
+              <a:t>HMN 3 · ACH 2</a:t>
             </a:r>
           </a:p>
         </p:txBody>
@@ -8496,7 +9535,7 @@
                   <a:srgbClr val="2563EB"/>
                 </a:solidFill>
               </a:rPr>
-              <a:t>SUBTILITÉ IMPORTANTE</a:t>
+              <a:t>ÉTAPE 2 · DÉCLARER</a:t>
             </a:r>
           </a:p>
         </p:txBody>
@@ -8537,7 +9576,7 @@
                   <a:srgbClr val="0F172A"/>
                 </a:solidFill>
               </a:rPr>
-              <a:t>Mono-site vs double-site</a:t>
+              <a:t>Poser une indispo 🚫 ou un vœu 💙</a:t>
             </a:r>
           </a:p>
         </p:txBody>
@@ -8551,17 +9590,17 @@
         <p:spPr>
           <a:xfrm>
             <a:off x="640080" y="2011680"/>
-            <a:ext cx="5212080" cy="3840480"/>
+            <a:ext cx="6126480" cy="914400"/>
           </a:xfrm>
           <a:prstGeom prst="roundRect">
             <a:avLst/>
           </a:prstGeom>
           <a:solidFill>
-            <a:srgbClr val="FAF5FF"/>
+            <a:srgbClr val="F8FAFC"/>
           </a:solidFill>
           <a:ln w="12700">
             <a:solidFill>
-              <a:srgbClr val="E9D5FF"/>
+              <a:srgbClr val="E2E8F0"/>
             </a:solidFill>
           </a:ln>
           <a:effectLst/>
@@ -8581,10 +9620,81 @@
           </a:fontRef>
         </p:style>
         <p:txBody>
-          <a:bodyPr rtlCol="0" anchor="ctr"/>
-          <a:lstStyle/>
-          <a:p>
-            <a:pPr algn="ctr"/>
+          <a:bodyPr rtlCol="0" anchor="ctr" wrap="square" lIns="182880" rIns="182880"/>
+          <a:lstStyle/>
+          <a:p>
+            <a:pPr algn="l">
+              <a:lnSpc>
+                <a:spcPct val="125000"/>
+              </a:lnSpc>
+              <a:spcAft>
+                <a:spcPts val="0"/>
+              </a:spcAft>
+            </a:pPr>
+            <a:r>
+              <a:rPr sz="1400" b="0">
+                <a:solidFill>
+                  <a:srgbClr val="475569"/>
+                </a:solidFill>
+              </a:rPr>
+              <a:t>Clic sur la </a:t>
+            </a:r>
+            <a:r>
+              <a:rPr sz="1400" b="1">
+                <a:solidFill>
+                  <a:srgbClr val="475569"/>
+                </a:solidFill>
+              </a:rPr>
+              <a:t>date</a:t>
+            </a:r>
+            <a:r>
+              <a:rPr sz="1400" b="0">
+                <a:solidFill>
+                  <a:srgbClr val="475569"/>
+                </a:solidFill>
+              </a:rPr>
+              <a:t> = 🚫 indispo (re-clic = annuler).  </a:t>
+            </a:r>
+            <a:r>
+              <a:rPr sz="1400" b="0">
+                <a:solidFill>
+                  <a:srgbClr val="475569"/>
+                </a:solidFill>
+              </a:rPr>
+              <a:t>Clic sur </a:t>
+            </a:r>
+            <a:r>
+              <a:rPr sz="1400" b="1">
+                <a:solidFill>
+                  <a:srgbClr val="475569"/>
+                </a:solidFill>
+              </a:rPr>
+              <a:t>HMN</a:t>
+            </a:r>
+            <a:r>
+              <a:rPr sz="1400" b="0">
+                <a:solidFill>
+                  <a:srgbClr val="475569"/>
+                </a:solidFill>
+              </a:rPr>
+              <a:t> ou </a:t>
+            </a:r>
+            <a:r>
+              <a:rPr sz="1400" b="1">
+                <a:solidFill>
+                  <a:srgbClr val="475569"/>
+                </a:solidFill>
+              </a:rPr>
+              <a:t>ACH</a:t>
+            </a:r>
+            <a:r>
+              <a:rPr sz="1400" b="0">
+                <a:solidFill>
+                  <a:srgbClr val="475569"/>
+                </a:solidFill>
+              </a:rPr>
+              <a:t> = 💙 vœu sur ce site (re-clic = annuler).</a:t>
+            </a:r>
           </a:p>
         </p:txBody>
       </p:sp>
@@ -8596,8 +9706,8 @@
         </p:nvSpPr>
         <p:spPr>
           <a:xfrm>
-            <a:off x="914400" y="2240280"/>
-            <a:ext cx="4663440" cy="548640"/>
+            <a:off x="640080" y="3108960"/>
+            <a:ext cx="6309360" cy="4572000"/>
           </a:xfrm>
           <a:prstGeom prst="rect">
             <a:avLst/>
@@ -8612,84 +9722,51 @@
           <a:p>
             <a:pPr algn="l">
               <a:lnSpc>
-                <a:spcPct val="120000"/>
-              </a:lnSpc>
-              <a:spcAft>
-                <a:spcPts val="0"/>
-              </a:spcAft>
-            </a:pPr>
-            <a:r>
-              <a:rPr sz="1900" b="1">
-                <a:solidFill>
-                  <a:srgbClr val="0F172A"/>
-                </a:solidFill>
-              </a:rPr>
-              <a:t>🅜  Médecin mono-site</a:t>
-            </a:r>
-          </a:p>
-        </p:txBody>
-      </p:sp>
-      <p:sp>
-        <p:nvSpPr>
-          <p:cNvPr id="6" name="TextBox 5"/>
-          <p:cNvSpPr txBox="1"/>
-          <p:nvPr/>
-        </p:nvSpPr>
-        <p:spPr>
-          <a:xfrm>
-            <a:off x="914400" y="2880360"/>
-            <a:ext cx="4754880" cy="4572000"/>
-          </a:xfrm>
-          <a:prstGeom prst="rect">
-            <a:avLst/>
-          </a:prstGeom>
-          <a:noFill/>
-        </p:spPr>
-        <p:txBody>
-          <a:bodyPr wrap="square" anchor="t">
-            <a:spAutoFit/>
-          </a:bodyPr>
-          <a:lstStyle/>
-          <a:p>
-            <a:pPr algn="l">
-              <a:lnSpc>
                 <a:spcPct val="125000"/>
               </a:lnSpc>
               <a:spcAft>
-                <a:spcPts val="1000"/>
-              </a:spcAft>
-            </a:pPr>
-            <a:r>
-              <a:rPr sz="1600">
-                <a:solidFill>
-                  <a:srgbClr val="0F172A"/>
-                </a:solidFill>
-              </a:rPr>
-              <a:t>•  </a:t>
-            </a:r>
-            <a:r>
-              <a:rPr sz="1600" b="0">
-                <a:solidFill>
-                  <a:srgbClr val="0F172A"/>
-                </a:solidFill>
-              </a:rPr>
-              <a:t>Un </a:t>
-            </a:r>
-            <a:r>
-              <a:rPr sz="1600" b="1">
-                <a:solidFill>
-                  <a:srgbClr val="0F172A"/>
-                </a:solidFill>
-              </a:rPr>
-              <a:t>seul site</a:t>
-            </a:r>
-            <a:r>
-              <a:rPr sz="1600" b="0">
-                <a:solidFill>
-                  <a:srgbClr val="0F172A"/>
-                </a:solidFill>
-              </a:rPr>
-              <a:t> pratiqué (HMN ou ACH).</a:t>
+                <a:spcPts val="1100"/>
+              </a:spcAft>
+            </a:pPr>
+            <a:r>
+              <a:rPr sz="1700">
+                <a:solidFill>
+                  <a:srgbClr val="0F172A"/>
+                </a:solidFill>
+              </a:rPr>
+              <a:t>🚫  </a:t>
+            </a:r>
+            <a:r>
+              <a:rPr sz="1700" b="1">
+                <a:solidFill>
+                  <a:srgbClr val="0F172A"/>
+                </a:solidFill>
+              </a:rPr>
+              <a:t>Indispo</a:t>
+            </a:r>
+            <a:r>
+              <a:rPr sz="1700" b="0">
+                <a:solidFill>
+                  <a:srgbClr val="0F172A"/>
+                </a:solidFill>
+              </a:rPr>
+              <a:t> : cliquer sur le </a:t>
+            </a:r>
+            <a:r>
+              <a:rPr sz="1700" b="1">
+                <a:solidFill>
+                  <a:srgbClr val="0F172A"/>
+                </a:solidFill>
+              </a:rPr>
+              <a:t>numéro du jour</a:t>
+            </a:r>
+            <a:r>
+              <a:rPr sz="1700" b="0">
+                <a:solidFill>
+                  <a:srgbClr val="0F172A"/>
+                </a:solidFill>
+              </a:rPr>
+              <a:t> → la case devient rouge.</a:t>
             </a:r>
           </a:p>
           <a:p>
@@ -8698,40 +9775,64 @@
                 <a:spcPct val="125000"/>
               </a:lnSpc>
               <a:spcAft>
-                <a:spcPts val="1000"/>
-              </a:spcAft>
-            </a:pPr>
-            <a:r>
-              <a:rPr sz="1600">
-                <a:solidFill>
-                  <a:srgbClr val="0F172A"/>
-                </a:solidFill>
-              </a:rPr>
-              <a:t>•  </a:t>
-            </a:r>
-            <a:r>
-              <a:rPr sz="1600" b="0">
-                <a:solidFill>
-                  <a:srgbClr val="0F172A"/>
-                </a:solidFill>
-              </a:rPr>
-              <a:t>L'application n'affiche que </a:t>
-            </a:r>
-            <a:r>
-              <a:rPr sz="1600" b="1">
-                <a:solidFill>
-                  <a:srgbClr val="0F172A"/>
-                </a:solidFill>
-              </a:rPr>
-              <a:t>la ligne de garde concernée</a:t>
-            </a:r>
-            <a:r>
-              <a:rPr sz="1600" b="0">
-                <a:solidFill>
-                  <a:srgbClr val="0F172A"/>
-                </a:solidFill>
-              </a:rPr>
-              <a:t> — objectifs, consignes et calendrier adaptés au site.</a:t>
+                <a:spcPts val="1100"/>
+              </a:spcAft>
+            </a:pPr>
+            <a:r>
+              <a:rPr sz="1700">
+                <a:solidFill>
+                  <a:srgbClr val="0F172A"/>
+                </a:solidFill>
+              </a:rPr>
+              <a:t>💙  </a:t>
+            </a:r>
+            <a:r>
+              <a:rPr sz="1700" b="1">
+                <a:solidFill>
+                  <a:srgbClr val="0F172A"/>
+                </a:solidFill>
+              </a:rPr>
+              <a:t>Vœu</a:t>
+            </a:r>
+            <a:r>
+              <a:rPr sz="1700" b="0">
+                <a:solidFill>
+                  <a:srgbClr val="0F172A"/>
+                </a:solidFill>
+              </a:rPr>
+              <a:t> : cliquer sur </a:t>
+            </a:r>
+            <a:r>
+              <a:rPr sz="1700" b="1">
+                <a:solidFill>
+                  <a:srgbClr val="0F172A"/>
+                </a:solidFill>
+              </a:rPr>
+              <a:t>HMN</a:t>
+            </a:r>
+            <a:r>
+              <a:rPr sz="1700" b="0">
+                <a:solidFill>
+                  <a:srgbClr val="0F172A"/>
+                </a:solidFill>
+              </a:rPr>
+              <a:t> ou </a:t>
+            </a:r>
+            <a:r>
+              <a:rPr sz="1700" b="1">
+                <a:solidFill>
+                  <a:srgbClr val="0F172A"/>
+                </a:solidFill>
+              </a:rPr>
+              <a:t>ACH</a:t>
+            </a:r>
+            <a:r>
+              <a:rPr sz="1700" b="0">
+                <a:solidFill>
+                  <a:srgbClr val="0F172A"/>
+                </a:solidFill>
+              </a:rPr>
+              <a:t> → fond bleu + cœur.</a:t>
             </a:r>
           </a:p>
           <a:p>
@@ -8740,48 +9841,90 @@
                 <a:spcPct val="125000"/>
               </a:lnSpc>
               <a:spcAft>
-                <a:spcPts val="1000"/>
-              </a:spcAft>
-            </a:pPr>
-            <a:r>
-              <a:rPr sz="1600">
-                <a:solidFill>
-                  <a:srgbClr val="0F172A"/>
-                </a:solidFill>
-              </a:rPr>
-              <a:t>💙  </a:t>
-            </a:r>
-            <a:r>
-              <a:rPr sz="1600" b="0">
-                <a:solidFill>
-                  <a:srgbClr val="0F172A"/>
-                </a:solidFill>
-              </a:rPr>
-              <a:t>Un vœu = un clic sur son site. Simple.</a:t>
-            </a:r>
-          </a:p>
-        </p:txBody>
-      </p:sp>
-      <p:sp>
-        <p:nvSpPr>
-          <p:cNvPr id="7" name="Rounded Rectangle 6"/>
+                <a:spcPts val="1100"/>
+              </a:spcAft>
+            </a:pPr>
+            <a:r>
+              <a:rPr sz="1700">
+                <a:solidFill>
+                  <a:srgbClr val="0F172A"/>
+                </a:solidFill>
+              </a:rPr>
+              <a:t>🔁  </a:t>
+            </a:r>
+            <a:r>
+              <a:rPr sz="1700" b="1">
+                <a:solidFill>
+                  <a:srgbClr val="0F172A"/>
+                </a:solidFill>
+              </a:rPr>
+              <a:t>Annuler</a:t>
+            </a:r>
+            <a:r>
+              <a:rPr sz="1700" b="0">
+                <a:solidFill>
+                  <a:srgbClr val="0F172A"/>
+                </a:solidFill>
+              </a:rPr>
+              <a:t> : re-cliquer au même endroit.</a:t>
+            </a:r>
+          </a:p>
+          <a:p>
+            <a:pPr algn="l">
+              <a:lnSpc>
+                <a:spcPct val="125000"/>
+              </a:lnSpc>
+              <a:spcAft>
+                <a:spcPts val="1100"/>
+              </a:spcAft>
+            </a:pPr>
+            <a:r>
+              <a:rPr sz="1700">
+                <a:solidFill>
+                  <a:srgbClr val="0F172A"/>
+                </a:solidFill>
+              </a:rPr>
+              <a:t>⛔  </a:t>
+            </a:r>
+            <a:r>
+              <a:rPr sz="1700" b="1">
+                <a:solidFill>
+                  <a:srgbClr val="0F172A"/>
+                </a:solidFill>
+              </a:rPr>
+              <a:t>Exclusifs</a:t>
+            </a:r>
+            <a:r>
+              <a:rPr sz="1700" b="0">
+                <a:solidFill>
+                  <a:srgbClr val="0F172A"/>
+                </a:solidFill>
+              </a:rPr>
+              <a:t> : un jour est soit indispo, soit vœu — pas les deux.</a:t>
+            </a:r>
+          </a:p>
+        </p:txBody>
+      </p:sp>
+      <p:sp>
+        <p:nvSpPr>
+          <p:cNvPr id="6" name="Rounded Rectangle 5"/>
           <p:cNvSpPr/>
           <p:nvPr/>
         </p:nvSpPr>
         <p:spPr>
           <a:xfrm>
-            <a:off x="6309360" y="2011680"/>
-            <a:ext cx="5212080" cy="3840480"/>
+            <a:off x="7863840" y="2377440"/>
+            <a:ext cx="1554480" cy="1280160"/>
           </a:xfrm>
           <a:prstGeom prst="roundRect">
             <a:avLst/>
           </a:prstGeom>
           <a:solidFill>
-            <a:srgbClr val="EFF6FF"/>
+            <a:srgbClr val="FEF2F2"/>
           </a:solidFill>
-          <a:ln w="12700">
+          <a:ln w="19050">
             <a:solidFill>
-              <a:srgbClr val="BFDBFE"/>
+              <a:srgbClr val="FCA5A5"/>
             </a:solidFill>
           </a:ln>
           <a:effectLst/>
@@ -8801,10 +9944,158 @@
           </a:fontRef>
         </p:style>
         <p:txBody>
-          <a:bodyPr rtlCol="0" anchor="ctr"/>
-          <a:lstStyle/>
-          <a:p>
-            <a:pPr algn="ctr"/>
+          <a:bodyPr rtlCol="0" anchor="ctr" wrap="none" lIns="45720" rIns="45720" tIns="36576" bIns="18288"/>
+          <a:lstStyle/>
+          <a:p>
+            <a:pPr algn="ctr">
+              <a:lnSpc>
+                <a:spcPct val="120000"/>
+              </a:lnSpc>
+              <a:spcAft>
+                <a:spcPts val="200"/>
+              </a:spcAft>
+            </a:pPr>
+            <a:r>
+              <a:rPr sz="1500" b="1">
+                <a:solidFill>
+                  <a:srgbClr val="0F172A"/>
+                </a:solidFill>
+              </a:rPr>
+              <a:t>12 🚫</a:t>
+            </a:r>
+          </a:p>
+          <a:p>
+            <a:pPr algn="l">
+              <a:lnSpc>
+                <a:spcPct val="120000"/>
+              </a:lnSpc>
+              <a:spcAft>
+                <a:spcPts val="100"/>
+              </a:spcAft>
+            </a:pPr>
+            <a:r>
+              <a:rPr sz="1100" b="0">
+                <a:solidFill>
+                  <a:srgbClr val="64748B"/>
+                </a:solidFill>
+              </a:rPr>
+              <a:t>HMN</a:t>
+            </a:r>
+          </a:p>
+          <a:p>
+            <a:pPr algn="l">
+              <a:lnSpc>
+                <a:spcPct val="120000"/>
+              </a:lnSpc>
+              <a:spcAft>
+                <a:spcPts val="0"/>
+              </a:spcAft>
+            </a:pPr>
+            <a:r>
+              <a:rPr sz="1100" b="0">
+                <a:solidFill>
+                  <a:srgbClr val="64748B"/>
+                </a:solidFill>
+              </a:rPr>
+              <a:t>ACH</a:t>
+            </a:r>
+          </a:p>
+        </p:txBody>
+      </p:sp>
+      <p:sp>
+        <p:nvSpPr>
+          <p:cNvPr id="7" name="Rounded Rectangle 6"/>
+          <p:cNvSpPr/>
+          <p:nvPr/>
+        </p:nvSpPr>
+        <p:spPr>
+          <a:xfrm>
+            <a:off x="9601200" y="2377440"/>
+            <a:ext cx="1554480" cy="1280160"/>
+          </a:xfrm>
+          <a:prstGeom prst="roundRect">
+            <a:avLst/>
+          </a:prstGeom>
+          <a:solidFill>
+            <a:srgbClr val="BFDBFE"/>
+          </a:solidFill>
+          <a:ln w="12700">
+            <a:solidFill>
+              <a:srgbClr val="E2E8F0"/>
+            </a:solidFill>
+          </a:ln>
+          <a:effectLst/>
+        </p:spPr>
+        <p:style>
+          <a:lnRef idx="1">
+            <a:schemeClr val="accent1"/>
+          </a:lnRef>
+          <a:fillRef idx="3">
+            <a:schemeClr val="accent1"/>
+          </a:fillRef>
+          <a:effectRef idx="2">
+            <a:schemeClr val="accent1"/>
+          </a:effectRef>
+          <a:fontRef idx="minor">
+            <a:schemeClr val="lt1"/>
+          </a:fontRef>
+        </p:style>
+        <p:txBody>
+          <a:bodyPr rtlCol="0" anchor="ctr" wrap="none" lIns="45720" rIns="45720" tIns="36576" bIns="18288"/>
+          <a:lstStyle/>
+          <a:p>
+            <a:pPr algn="ctr">
+              <a:lnSpc>
+                <a:spcPct val="120000"/>
+              </a:lnSpc>
+              <a:spcAft>
+                <a:spcPts val="200"/>
+              </a:spcAft>
+            </a:pPr>
+            <a:r>
+              <a:rPr sz="1500" b="1">
+                <a:solidFill>
+                  <a:srgbClr val="0F172A"/>
+                </a:solidFill>
+              </a:rPr>
+              <a:t>14</a:t>
+            </a:r>
+          </a:p>
+          <a:p>
+            <a:pPr algn="l">
+              <a:lnSpc>
+                <a:spcPct val="120000"/>
+              </a:lnSpc>
+              <a:spcAft>
+                <a:spcPts val="100"/>
+              </a:spcAft>
+            </a:pPr>
+            <a:r>
+              <a:rPr sz="1100" b="1">
+                <a:solidFill>
+                  <a:srgbClr val="475569"/>
+                </a:solidFill>
+              </a:rPr>
+              <a:t>HMN</a:t>
+            </a:r>
+          </a:p>
+          <a:p>
+            <a:pPr algn="l">
+              <a:lnSpc>
+                <a:spcPct val="120000"/>
+              </a:lnSpc>
+              <a:spcAft>
+                <a:spcPts val="0"/>
+              </a:spcAft>
+            </a:pPr>
+            <a:r>
+              <a:rPr sz="1100" b="0">
+                <a:solidFill>
+                  <a:srgbClr val="64748B"/>
+                </a:solidFill>
+              </a:rPr>
+              <a:t>ACH</a:t>
+            </a:r>
           </a:p>
         </p:txBody>
       </p:sp>
@@ -8816,8 +10107,8 @@
         </p:nvSpPr>
         <p:spPr>
           <a:xfrm>
-            <a:off x="6583680" y="2240280"/>
-            <a:ext cx="4663440" cy="548640"/>
+            <a:off x="9601200" y="2359152"/>
+            <a:ext cx="1554480" cy="274320"/>
           </a:xfrm>
           <a:prstGeom prst="rect">
             <a:avLst/>
@@ -8830,7 +10121,7 @@
           </a:bodyPr>
           <a:lstStyle/>
           <a:p>
-            <a:pPr algn="l">
+            <a:pPr algn="r">
               <a:lnSpc>
                 <a:spcPct val="120000"/>
               </a:lnSpc>
@@ -8839,12 +10130,12 @@
               </a:spcAft>
             </a:pPr>
             <a:r>
-              <a:rPr sz="1900" b="1">
-                <a:solidFill>
-                  <a:srgbClr val="0F172A"/>
-                </a:solidFill>
-              </a:rPr>
-              <a:t>🅓  Médecin double-site</a:t>
+              <a:rPr sz="800" b="1">
+                <a:solidFill>
+                  <a:srgbClr val="0F172A"/>
+                </a:solidFill>
+              </a:rPr>
+              <a:t>💙HMN</a:t>
             </a:r>
           </a:p>
         </p:txBody>
@@ -8857,8 +10148,8 @@
         </p:nvSpPr>
         <p:spPr>
           <a:xfrm>
-            <a:off x="6583680" y="2880360"/>
-            <a:ext cx="4754880" cy="4572000"/>
+            <a:off x="7589520" y="3794760"/>
+            <a:ext cx="3657600" cy="457200"/>
           </a:xfrm>
           <a:prstGeom prst="rect">
             <a:avLst/>
@@ -8871,153 +10162,29 @@
           </a:bodyPr>
           <a:lstStyle/>
           <a:p>
-            <a:pPr algn="l">
-              <a:lnSpc>
-                <a:spcPct val="125000"/>
-              </a:lnSpc>
-              <a:spcAft>
-                <a:spcPts val="1000"/>
-              </a:spcAft>
-            </a:pPr>
-            <a:r>
-              <a:rPr sz="1600">
-                <a:solidFill>
-                  <a:srgbClr val="0F172A"/>
-                </a:solidFill>
-              </a:rPr>
-              <a:t>•  </a:t>
-            </a:r>
-            <a:r>
-              <a:rPr sz="1600" b="1">
-                <a:solidFill>
-                  <a:srgbClr val="0F172A"/>
-                </a:solidFill>
-              </a:rPr>
-              <a:t>HMN et ACH</a:t>
-            </a:r>
-            <a:r>
-              <a:rPr sz="1600" b="0">
-                <a:solidFill>
-                  <a:srgbClr val="0F172A"/>
-                </a:solidFill>
-              </a:rPr>
-              <a:t> pratiqués : les deux lignes s'affichent.</a:t>
-            </a:r>
-          </a:p>
-          <a:p>
-            <a:pPr algn="l">
-              <a:lnSpc>
-                <a:spcPct val="125000"/>
-              </a:lnSpc>
-              <a:spcAft>
-                <a:spcPts val="1000"/>
-              </a:spcAft>
-            </a:pPr>
-            <a:r>
-              <a:rPr sz="1600">
-                <a:solidFill>
-                  <a:srgbClr val="0F172A"/>
-                </a:solidFill>
-              </a:rPr>
-              <a:t>💙  </a:t>
-            </a:r>
-            <a:r>
-              <a:rPr sz="1600" b="0">
-                <a:solidFill>
-                  <a:srgbClr val="0F172A"/>
-                </a:solidFill>
-              </a:rPr>
-              <a:t>Un vœu peut porter sur </a:t>
-            </a:r>
-            <a:r>
-              <a:rPr sz="1600" b="1">
-                <a:solidFill>
-                  <a:srgbClr val="0F172A"/>
-                </a:solidFill>
-              </a:rPr>
-              <a:t>HMN</a:t>
-            </a:r>
-            <a:r>
-              <a:rPr sz="1600" b="0">
-                <a:solidFill>
-                  <a:srgbClr val="0F172A"/>
-                </a:solidFill>
-              </a:rPr>
-              <a:t>, sur </a:t>
-            </a:r>
-            <a:r>
-              <a:rPr sz="1600" b="1">
-                <a:solidFill>
-                  <a:srgbClr val="0F172A"/>
-                </a:solidFill>
-              </a:rPr>
-              <a:t>ACH</a:t>
-            </a:r>
-            <a:r>
-              <a:rPr sz="1600" b="0">
-                <a:solidFill>
-                  <a:srgbClr val="0F172A"/>
-                </a:solidFill>
-              </a:rPr>
-              <a:t>, ou sur </a:t>
-            </a:r>
-            <a:r>
-              <a:rPr sz="1600" b="1">
-                <a:solidFill>
-                  <a:srgbClr val="0F172A"/>
-                </a:solidFill>
-              </a:rPr>
-              <a:t>les deux</a:t>
-            </a:r>
-            <a:r>
-              <a:rPr sz="1600" b="0">
-                <a:solidFill>
-                  <a:srgbClr val="0F172A"/>
-                </a:solidFill>
-              </a:rPr>
-              <a:t> le même jour.</a:t>
-            </a:r>
-          </a:p>
-          <a:p>
-            <a:pPr algn="l">
-              <a:lnSpc>
-                <a:spcPct val="125000"/>
-              </a:lnSpc>
-              <a:spcAft>
-                <a:spcPts val="1000"/>
-              </a:spcAft>
-            </a:pPr>
-            <a:r>
-              <a:rPr sz="1600">
-                <a:solidFill>
-                  <a:srgbClr val="0F172A"/>
-                </a:solidFill>
-              </a:rPr>
-              <a:t>①  </a:t>
-            </a:r>
-            <a:r>
-              <a:rPr sz="1600" b="0">
-                <a:solidFill>
-                  <a:srgbClr val="0F172A"/>
-                </a:solidFill>
-              </a:rPr>
-              <a:t>Un vœu </a:t>
-            </a:r>
-            <a:r>
-              <a:rPr sz="1600" b="1">
-                <a:solidFill>
-                  <a:srgbClr val="0F172A"/>
-                </a:solidFill>
-              </a:rPr>
-              <a:t>HMN + ACH le même jour = 1 seul vœu</a:t>
-            </a:r>
-            <a:r>
-              <a:rPr sz="1600" b="0">
-                <a:solidFill>
-                  <a:srgbClr val="0F172A"/>
-                </a:solidFill>
-              </a:rPr>
-              <a:t> (« les deux »), pas deux.</a:t>
+            <a:pPr algn="ctr">
+              <a:lnSpc>
+                <a:spcPct val="120000"/>
+              </a:lnSpc>
+              <a:spcAft>
+                <a:spcPts val="0"/>
+              </a:spcAft>
+            </a:pPr>
+            <a:r>
+              <a:rPr sz="1200" b="1">
+                <a:solidFill>
+                  <a:srgbClr val="0F172A"/>
+                </a:solidFill>
+              </a:rPr>
+              <a:t>indispo 🚫</a:t>
+            </a:r>
+            <a:r>
+              <a:rPr sz="1200" b="1">
+                <a:solidFill>
+                  <a:srgbClr val="0F172A"/>
+                </a:solidFill>
+              </a:rPr>
+              <a:t>      vœu 💙 sur HMN</a:t>
             </a:r>
           </a:p>
         </p:txBody>
@@ -9076,7 +10243,7 @@
                   <a:srgbClr val="2563EB"/>
                 </a:solidFill>
               </a:rPr>
-              <a:t>ÉTAPE 3 · SUIVRE</a:t>
+              <a:t>SUBTILITÉ IMPORTANTE</a:t>
             </a:r>
           </a:p>
         </p:txBody>
@@ -9117,7 +10284,7 @@
                   <a:srgbClr val="0F172A"/>
                 </a:solidFill>
               </a:rPr>
-              <a:t>Le Planning est en lecture seule</a:t>
+              <a:t>Mono-site vs double-site</a:t>
             </a:r>
           </a:p>
         </p:txBody>
@@ -9131,7 +10298,227 @@
         <p:spPr>
           <a:xfrm>
             <a:off x="640080" y="2011680"/>
-            <a:ext cx="10789920" cy="914400"/>
+            <a:ext cx="5212080" cy="3840480"/>
+          </a:xfrm>
+          <a:prstGeom prst="roundRect">
+            <a:avLst/>
+          </a:prstGeom>
+          <a:solidFill>
+            <a:srgbClr val="FAF5FF"/>
+          </a:solidFill>
+          <a:ln w="12700">
+            <a:solidFill>
+              <a:srgbClr val="E9D5FF"/>
+            </a:solidFill>
+          </a:ln>
+          <a:effectLst/>
+        </p:spPr>
+        <p:style>
+          <a:lnRef idx="1">
+            <a:schemeClr val="accent1"/>
+          </a:lnRef>
+          <a:fillRef idx="3">
+            <a:schemeClr val="accent1"/>
+          </a:fillRef>
+          <a:effectRef idx="2">
+            <a:schemeClr val="accent1"/>
+          </a:effectRef>
+          <a:fontRef idx="minor">
+            <a:schemeClr val="lt1"/>
+          </a:fontRef>
+        </p:style>
+        <p:txBody>
+          <a:bodyPr rtlCol="0" anchor="ctr"/>
+          <a:lstStyle/>
+          <a:p>
+            <a:pPr algn="ctr"/>
+          </a:p>
+        </p:txBody>
+      </p:sp>
+      <p:sp>
+        <p:nvSpPr>
+          <p:cNvPr id="5" name="TextBox 4"/>
+          <p:cNvSpPr txBox="1"/>
+          <p:nvPr/>
+        </p:nvSpPr>
+        <p:spPr>
+          <a:xfrm>
+            <a:off x="914400" y="2240280"/>
+            <a:ext cx="4663440" cy="548640"/>
+          </a:xfrm>
+          <a:prstGeom prst="rect">
+            <a:avLst/>
+          </a:prstGeom>
+          <a:noFill/>
+        </p:spPr>
+        <p:txBody>
+          <a:bodyPr wrap="square" anchor="t">
+            <a:spAutoFit/>
+          </a:bodyPr>
+          <a:lstStyle/>
+          <a:p>
+            <a:pPr algn="l">
+              <a:lnSpc>
+                <a:spcPct val="120000"/>
+              </a:lnSpc>
+              <a:spcAft>
+                <a:spcPts val="0"/>
+              </a:spcAft>
+            </a:pPr>
+            <a:r>
+              <a:rPr sz="1900" b="1">
+                <a:solidFill>
+                  <a:srgbClr val="0F172A"/>
+                </a:solidFill>
+              </a:rPr>
+              <a:t>🅜  Médecin mono-site</a:t>
+            </a:r>
+          </a:p>
+        </p:txBody>
+      </p:sp>
+      <p:sp>
+        <p:nvSpPr>
+          <p:cNvPr id="6" name="TextBox 5"/>
+          <p:cNvSpPr txBox="1"/>
+          <p:nvPr/>
+        </p:nvSpPr>
+        <p:spPr>
+          <a:xfrm>
+            <a:off x="914400" y="2880360"/>
+            <a:ext cx="4754880" cy="4572000"/>
+          </a:xfrm>
+          <a:prstGeom prst="rect">
+            <a:avLst/>
+          </a:prstGeom>
+          <a:noFill/>
+        </p:spPr>
+        <p:txBody>
+          <a:bodyPr wrap="square" anchor="t">
+            <a:spAutoFit/>
+          </a:bodyPr>
+          <a:lstStyle/>
+          <a:p>
+            <a:pPr algn="l">
+              <a:lnSpc>
+                <a:spcPct val="125000"/>
+              </a:lnSpc>
+              <a:spcAft>
+                <a:spcPts val="1000"/>
+              </a:spcAft>
+            </a:pPr>
+            <a:r>
+              <a:rPr sz="1600">
+                <a:solidFill>
+                  <a:srgbClr val="0F172A"/>
+                </a:solidFill>
+              </a:rPr>
+              <a:t>•  </a:t>
+            </a:r>
+            <a:r>
+              <a:rPr sz="1600" b="0">
+                <a:solidFill>
+                  <a:srgbClr val="0F172A"/>
+                </a:solidFill>
+              </a:rPr>
+              <a:t>Un </a:t>
+            </a:r>
+            <a:r>
+              <a:rPr sz="1600" b="1">
+                <a:solidFill>
+                  <a:srgbClr val="0F172A"/>
+                </a:solidFill>
+              </a:rPr>
+              <a:t>seul site</a:t>
+            </a:r>
+            <a:r>
+              <a:rPr sz="1600" b="0">
+                <a:solidFill>
+                  <a:srgbClr val="0F172A"/>
+                </a:solidFill>
+              </a:rPr>
+              <a:t> pratiqué (HMN ou ACH).</a:t>
+            </a:r>
+          </a:p>
+          <a:p>
+            <a:pPr algn="l">
+              <a:lnSpc>
+                <a:spcPct val="125000"/>
+              </a:lnSpc>
+              <a:spcAft>
+                <a:spcPts val="1000"/>
+              </a:spcAft>
+            </a:pPr>
+            <a:r>
+              <a:rPr sz="1600">
+                <a:solidFill>
+                  <a:srgbClr val="0F172A"/>
+                </a:solidFill>
+              </a:rPr>
+              <a:t>•  </a:t>
+            </a:r>
+            <a:r>
+              <a:rPr sz="1600" b="0">
+                <a:solidFill>
+                  <a:srgbClr val="0F172A"/>
+                </a:solidFill>
+              </a:rPr>
+              <a:t>L'application n'affiche que </a:t>
+            </a:r>
+            <a:r>
+              <a:rPr sz="1600" b="1">
+                <a:solidFill>
+                  <a:srgbClr val="0F172A"/>
+                </a:solidFill>
+              </a:rPr>
+              <a:t>la ligne de garde concernée</a:t>
+            </a:r>
+            <a:r>
+              <a:rPr sz="1600" b="0">
+                <a:solidFill>
+                  <a:srgbClr val="0F172A"/>
+                </a:solidFill>
+              </a:rPr>
+              <a:t> — objectifs, consignes et calendrier adaptés au site.</a:t>
+            </a:r>
+          </a:p>
+          <a:p>
+            <a:pPr algn="l">
+              <a:lnSpc>
+                <a:spcPct val="125000"/>
+              </a:lnSpc>
+              <a:spcAft>
+                <a:spcPts val="1000"/>
+              </a:spcAft>
+            </a:pPr>
+            <a:r>
+              <a:rPr sz="1600">
+                <a:solidFill>
+                  <a:srgbClr val="0F172A"/>
+                </a:solidFill>
+              </a:rPr>
+              <a:t>💙  </a:t>
+            </a:r>
+            <a:r>
+              <a:rPr sz="1600" b="0">
+                <a:solidFill>
+                  <a:srgbClr val="0F172A"/>
+                </a:solidFill>
+              </a:rPr>
+              <a:t>Un vœu = un clic sur son site. Simple.</a:t>
+            </a:r>
+          </a:p>
+        </p:txBody>
+      </p:sp>
+      <p:sp>
+        <p:nvSpPr>
+          <p:cNvPr id="7" name="Rounded Rectangle 6"/>
+          <p:cNvSpPr/>
+          <p:nvPr/>
+        </p:nvSpPr>
+        <p:spPr>
+          <a:xfrm>
+            <a:off x="6309360" y="2011680"/>
+            <a:ext cx="5212080" cy="3840480"/>
           </a:xfrm>
           <a:prstGeom prst="roundRect">
             <a:avLst/>
@@ -9161,54 +10548,23 @@
           </a:fontRef>
         </p:style>
         <p:txBody>
-          <a:bodyPr rtlCol="0" anchor="ctr" wrap="square" lIns="182880" rIns="182880"/>
-          <a:lstStyle/>
-          <a:p>
-            <a:pPr algn="l">
-              <a:lnSpc>
-                <a:spcPct val="125000"/>
-              </a:lnSpc>
-              <a:spcAft>
-                <a:spcPts val="0"/>
-              </a:spcAft>
-            </a:pPr>
-            <a:r>
-              <a:rPr sz="1500" b="0">
-                <a:solidFill>
-                  <a:srgbClr val="1E3A8A"/>
-                </a:solidFill>
-              </a:rPr>
-              <a:t>👁 Lecture seule — seul l'admin modifie le planning. Tu vois les changements en temps réel ; tu peux toujours ajuster tes indispos &amp; vœux dans l'onglet </a:t>
-            </a:r>
-            <a:r>
-              <a:rPr sz="1500" b="1">
-                <a:solidFill>
-                  <a:srgbClr val="1E3A8A"/>
-                </a:solidFill>
-              </a:rPr>
-              <a:t>Perso</a:t>
-            </a:r>
-            <a:r>
-              <a:rPr sz="1500" b="0">
-                <a:solidFill>
-                  <a:srgbClr val="1E3A8A"/>
-                </a:solidFill>
-              </a:rPr>
-              <a:t>.</a:t>
-            </a:r>
-          </a:p>
-        </p:txBody>
-      </p:sp>
-      <p:sp>
-        <p:nvSpPr>
-          <p:cNvPr id="5" name="TextBox 4"/>
+          <a:bodyPr rtlCol="0" anchor="ctr"/>
+          <a:lstStyle/>
+          <a:p>
+            <a:pPr algn="ctr"/>
+          </a:p>
+        </p:txBody>
+      </p:sp>
+      <p:sp>
+        <p:nvSpPr>
+          <p:cNvPr id="8" name="TextBox 7"/>
           <p:cNvSpPr txBox="1"/>
           <p:nvPr/>
         </p:nvSpPr>
         <p:spPr>
           <a:xfrm>
-            <a:off x="640080" y="2971800"/>
-            <a:ext cx="10789920" cy="320040"/>
+            <a:off x="6583680" y="2240280"/>
+            <a:ext cx="4663440" cy="548640"/>
           </a:xfrm>
           <a:prstGeom prst="rect">
             <a:avLst/>
@@ -9230,26 +10586,26 @@
               </a:spcAft>
             </a:pPr>
             <a:r>
-              <a:rPr sz="1200" b="0">
-                <a:solidFill>
-                  <a:srgbClr val="94A3B8"/>
-                </a:solidFill>
-              </a:rPr>
-              <a:t>↑ texte exact affiché dans l'application</a:t>
-            </a:r>
-          </a:p>
-        </p:txBody>
-      </p:sp>
-      <p:sp>
-        <p:nvSpPr>
-          <p:cNvPr id="6" name="TextBox 5"/>
+              <a:rPr sz="1900" b="1">
+                <a:solidFill>
+                  <a:srgbClr val="0F172A"/>
+                </a:solidFill>
+              </a:rPr>
+              <a:t>🅓  Médecin double-site</a:t>
+            </a:r>
+          </a:p>
+        </p:txBody>
+      </p:sp>
+      <p:sp>
+        <p:nvSpPr>
+          <p:cNvPr id="9" name="TextBox 8"/>
           <p:cNvSpPr txBox="1"/>
           <p:nvPr/>
         </p:nvSpPr>
         <p:spPr>
           <a:xfrm>
-            <a:off x="640080" y="3474720"/>
-            <a:ext cx="10789920" cy="4572000"/>
+            <a:off x="6583680" y="2880360"/>
+            <a:ext cx="4754880" cy="4572000"/>
           </a:xfrm>
           <a:prstGeom prst="rect">
             <a:avLst/>
@@ -9267,40 +10623,32 @@
                 <a:spcPct val="125000"/>
               </a:lnSpc>
               <a:spcAft>
-                <a:spcPts val="1400"/>
-              </a:spcAft>
-            </a:pPr>
-            <a:r>
-              <a:rPr sz="1800">
-                <a:solidFill>
-                  <a:srgbClr val="0F172A"/>
-                </a:solidFill>
-              </a:rPr>
-              <a:t>👀  </a:t>
-            </a:r>
-            <a:r>
-              <a:rPr sz="1800" b="0">
-                <a:solidFill>
-                  <a:srgbClr val="0F172A"/>
-                </a:solidFill>
-              </a:rPr>
-              <a:t>Le planning se </a:t>
-            </a:r>
-            <a:r>
-              <a:rPr sz="1800" b="1">
-                <a:solidFill>
-                  <a:srgbClr val="0F172A"/>
-                </a:solidFill>
-              </a:rPr>
-              <a:t>consulte</a:t>
-            </a:r>
-            <a:r>
-              <a:rPr sz="1800" b="0">
-                <a:solidFill>
-                  <a:srgbClr val="0F172A"/>
-                </a:solidFill>
-              </a:rPr>
-              <a:t> sans possibilité de le modifier.</a:t>
+                <a:spcPts val="1000"/>
+              </a:spcAft>
+            </a:pPr>
+            <a:r>
+              <a:rPr sz="1600">
+                <a:solidFill>
+                  <a:srgbClr val="0F172A"/>
+                </a:solidFill>
+              </a:rPr>
+              <a:t>•  </a:t>
+            </a:r>
+            <a:r>
+              <a:rPr sz="1600" b="1">
+                <a:solidFill>
+                  <a:srgbClr val="0F172A"/>
+                </a:solidFill>
+              </a:rPr>
+              <a:t>HMN et ACH</a:t>
+            </a:r>
+            <a:r>
+              <a:rPr sz="1600" b="0">
+                <a:solidFill>
+                  <a:srgbClr val="0F172A"/>
+                </a:solidFill>
+              </a:rPr>
+              <a:t> pratiqués : les deux lignes s'affichent.</a:t>
             </a:r>
           </a:p>
           <a:p>
@@ -9309,40 +10657,72 @@
                 <a:spcPct val="125000"/>
               </a:lnSpc>
               <a:spcAft>
-                <a:spcPts val="1400"/>
-              </a:spcAft>
-            </a:pPr>
-            <a:r>
-              <a:rPr sz="1800">
-                <a:solidFill>
-                  <a:srgbClr val="0F172A"/>
-                </a:solidFill>
-              </a:rPr>
-              <a:t>⚡  </a:t>
-            </a:r>
-            <a:r>
-              <a:rPr sz="1800" b="0">
-                <a:solidFill>
-                  <a:srgbClr val="0F172A"/>
-                </a:solidFill>
-              </a:rPr>
-              <a:t>Chaque garde posée par l'admin </a:t>
-            </a:r>
-            <a:r>
-              <a:rPr sz="1800" b="1">
-                <a:solidFill>
-                  <a:srgbClr val="0F172A"/>
-                </a:solidFill>
-              </a:rPr>
-              <a:t>apparaît instantanément</a:t>
-            </a:r>
-            <a:r>
-              <a:rPr sz="1800" b="0">
-                <a:solidFill>
-                  <a:srgbClr val="0F172A"/>
-                </a:solidFill>
-              </a:rPr>
-              <a:t>.</a:t>
+                <a:spcPts val="1000"/>
+              </a:spcAft>
+            </a:pPr>
+            <a:r>
+              <a:rPr sz="1600">
+                <a:solidFill>
+                  <a:srgbClr val="0F172A"/>
+                </a:solidFill>
+              </a:rPr>
+              <a:t>💙  </a:t>
+            </a:r>
+            <a:r>
+              <a:rPr sz="1600" b="0">
+                <a:solidFill>
+                  <a:srgbClr val="0F172A"/>
+                </a:solidFill>
+              </a:rPr>
+              <a:t>Un vœu peut porter sur </a:t>
+            </a:r>
+            <a:r>
+              <a:rPr sz="1600" b="1">
+                <a:solidFill>
+                  <a:srgbClr val="0F172A"/>
+                </a:solidFill>
+              </a:rPr>
+              <a:t>HMN</a:t>
+            </a:r>
+            <a:r>
+              <a:rPr sz="1600" b="0">
+                <a:solidFill>
+                  <a:srgbClr val="0F172A"/>
+                </a:solidFill>
+              </a:rPr>
+              <a:t>, sur </a:t>
+            </a:r>
+            <a:r>
+              <a:rPr sz="1600" b="1">
+                <a:solidFill>
+                  <a:srgbClr val="0F172A"/>
+                </a:solidFill>
+              </a:rPr>
+              <a:t>ACH</a:t>
+            </a:r>
+            <a:r>
+              <a:rPr sz="1600" b="0">
+                <a:solidFill>
+                  <a:srgbClr val="0F172A"/>
+                </a:solidFill>
+              </a:rPr>
+              <a:t>, ou sur </a:t>
+            </a:r>
+            <a:r>
+              <a:rPr sz="1600" b="1">
+                <a:solidFill>
+                  <a:srgbClr val="0F172A"/>
+                </a:solidFill>
+              </a:rPr>
+              <a:t>les deux</a:t>
+            </a:r>
+            <a:r>
+              <a:rPr sz="1600" b="0">
+                <a:solidFill>
+                  <a:srgbClr val="0F172A"/>
+                </a:solidFill>
+              </a:rPr>
+              <a:t> le même jour.</a:t>
             </a:r>
           </a:p>
           <a:p>
@@ -9351,40 +10731,40 @@
                 <a:spcPct val="125000"/>
               </a:lnSpc>
               <a:spcAft>
-                <a:spcPts val="1400"/>
-              </a:spcAft>
-            </a:pPr>
-            <a:r>
-              <a:rPr sz="1800">
-                <a:solidFill>
-                  <a:srgbClr val="0F172A"/>
-                </a:solidFill>
-              </a:rPr>
-              <a:t>✍️  </a:t>
-            </a:r>
-            <a:r>
-              <a:rPr sz="1800" b="0">
-                <a:solidFill>
-                  <a:srgbClr val="0F172A"/>
-                </a:solidFill>
-              </a:rPr>
-              <a:t>Seul l'onglet </a:t>
-            </a:r>
-            <a:r>
-              <a:rPr sz="1800" b="1">
-                <a:solidFill>
-                  <a:srgbClr val="0F172A"/>
-                </a:solidFill>
-              </a:rPr>
-              <a:t>Perso</a:t>
-            </a:r>
-            <a:r>
-              <a:rPr sz="1800" b="0">
-                <a:solidFill>
-                  <a:srgbClr val="0F172A"/>
-                </a:solidFill>
-              </a:rPr>
-              <a:t> reste modifiable (indispos &amp; vœux), à tout moment.</a:t>
+                <a:spcPts val="1000"/>
+              </a:spcAft>
+            </a:pPr>
+            <a:r>
+              <a:rPr sz="1600">
+                <a:solidFill>
+                  <a:srgbClr val="0F172A"/>
+                </a:solidFill>
+              </a:rPr>
+              <a:t>①  </a:t>
+            </a:r>
+            <a:r>
+              <a:rPr sz="1600" b="0">
+                <a:solidFill>
+                  <a:srgbClr val="0F172A"/>
+                </a:solidFill>
+              </a:rPr>
+              <a:t>Un vœu </a:t>
+            </a:r>
+            <a:r>
+              <a:rPr sz="1600" b="1">
+                <a:solidFill>
+                  <a:srgbClr val="0F172A"/>
+                </a:solidFill>
+              </a:rPr>
+              <a:t>HMN + ACH le même jour = 1 seul vœu</a:t>
+            </a:r>
+            <a:r>
+              <a:rPr sz="1600" b="0">
+                <a:solidFill>
+                  <a:srgbClr val="0F172A"/>
+                </a:solidFill>
+              </a:rPr>
+              <a:t> (« les deux »), pas deux.</a:t>
             </a:r>
           </a:p>
         </p:txBody>
@@ -9443,7 +10823,7 @@
                   <a:srgbClr val="2563EB"/>
                 </a:solidFill>
               </a:rPr>
-              <a:t>AFFICHAGE</a:t>
+              <a:t>ÉTAPE 3 · SUIVRE</a:t>
             </a:r>
           </a:p>
         </p:txBody>
@@ -9484,303 +10864,31 @@
                   <a:srgbClr val="0F172A"/>
                 </a:solidFill>
               </a:rPr>
-              <a:t>Quand c'est une autre personne qui choisit</a:t>
-            </a:r>
-          </a:p>
-        </p:txBody>
-      </p:sp>
-      <p:sp>
-        <p:nvSpPr>
-          <p:cNvPr id="4" name="TextBox 3"/>
-          <p:cNvSpPr txBox="1"/>
-          <p:nvPr/>
-        </p:nvSpPr>
-        <p:spPr>
-          <a:xfrm>
-            <a:off x="640080" y="1920240"/>
-            <a:ext cx="6126480" cy="914400"/>
-          </a:xfrm>
-          <a:prstGeom prst="rect">
-            <a:avLst/>
-          </a:prstGeom>
-          <a:noFill/>
-        </p:spPr>
-        <p:txBody>
-          <a:bodyPr wrap="square" anchor="t">
-            <a:spAutoFit/>
-          </a:bodyPr>
-          <a:lstStyle/>
-          <a:p>
-            <a:pPr algn="l">
-              <a:lnSpc>
-                <a:spcPct val="135000"/>
-              </a:lnSpc>
-              <a:spcAft>
-                <a:spcPts val="800"/>
-              </a:spcAft>
-            </a:pPr>
-            <a:r>
-              <a:rPr sz="1700" b="0">
-                <a:solidFill>
-                  <a:srgbClr val="64748B"/>
-                </a:solidFill>
-              </a:rPr>
-              <a:t>L'onglet </a:t>
-            </a:r>
-            <a:r>
-              <a:rPr sz="1700" b="1">
-                <a:solidFill>
-                  <a:srgbClr val="64748B"/>
-                </a:solidFill>
-              </a:rPr>
-              <a:t>Planning</a:t>
-            </a:r>
-            <a:r>
-              <a:rPr sz="1700" b="0">
-                <a:solidFill>
-                  <a:srgbClr val="64748B"/>
-                </a:solidFill>
-              </a:rPr>
-              <a:t> est affiché </a:t>
-            </a:r>
-            <a:r>
-              <a:rPr sz="1700" b="1">
-                <a:solidFill>
-                  <a:srgbClr val="64748B"/>
-                </a:solidFill>
-              </a:rPr>
-              <a:t>du point de vue de la personne dont c'est le tour</a:t>
-            </a:r>
-            <a:r>
-              <a:rPr sz="1700" b="0">
-                <a:solidFill>
-                  <a:srgbClr val="64748B"/>
-                </a:solidFill>
-              </a:rPr>
-              <a:t>, pour l'aider à choisir.</a:t>
-            </a:r>
-          </a:p>
-        </p:txBody>
-      </p:sp>
-      <p:sp>
-        <p:nvSpPr>
-          <p:cNvPr id="5" name="TextBox 4"/>
-          <p:cNvSpPr txBox="1"/>
-          <p:nvPr/>
-        </p:nvSpPr>
-        <p:spPr>
-          <a:xfrm>
-            <a:off x="640080" y="2880360"/>
-            <a:ext cx="6309360" cy="4572000"/>
-          </a:xfrm>
-          <a:prstGeom prst="rect">
-            <a:avLst/>
-          </a:prstGeom>
-          <a:noFill/>
-        </p:spPr>
-        <p:txBody>
-          <a:bodyPr wrap="square" anchor="t">
-            <a:spAutoFit/>
-          </a:bodyPr>
-          <a:lstStyle/>
-          <a:p>
-            <a:pPr algn="l">
-              <a:lnSpc>
-                <a:spcPct val="125000"/>
-              </a:lnSpc>
-              <a:spcAft>
-                <a:spcPts val="800"/>
-              </a:spcAft>
-            </a:pPr>
-            <a:r>
-              <a:rPr sz="1500">
-                <a:solidFill>
-                  <a:srgbClr val="0F172A"/>
-                </a:solidFill>
-              </a:rPr>
-              <a:t>🟩  </a:t>
-            </a:r>
-            <a:r>
-              <a:rPr sz="1500" b="1">
-                <a:solidFill>
-                  <a:srgbClr val="0F172A"/>
-                </a:solidFill>
-              </a:rPr>
-              <a:t>Vert</a:t>
-            </a:r>
-            <a:r>
-              <a:rPr sz="1500" b="0">
-                <a:solidFill>
-                  <a:srgbClr val="0F172A"/>
-                </a:solidFill>
-              </a:rPr>
-              <a:t> = les gardes de la </a:t>
-            </a:r>
-            <a:r>
-              <a:rPr sz="1500" b="1">
-                <a:solidFill>
-                  <a:srgbClr val="0F172A"/>
-                </a:solidFill>
-              </a:rPr>
-              <a:t>personne en train de choisir</a:t>
-            </a:r>
-            <a:r>
-              <a:rPr sz="1500" b="0">
-                <a:solidFill>
-                  <a:srgbClr val="0F172A"/>
-                </a:solidFill>
-              </a:rPr>
-              <a:t> — pas les siennes.</a:t>
-            </a:r>
-          </a:p>
-          <a:p>
-            <a:pPr algn="l">
-              <a:lnSpc>
-                <a:spcPct val="125000"/>
-              </a:lnSpc>
-              <a:spcAft>
-                <a:spcPts val="800"/>
-              </a:spcAft>
-            </a:pPr>
-            <a:r>
-              <a:rPr sz="1500">
-                <a:solidFill>
-                  <a:srgbClr val="0F172A"/>
-                </a:solidFill>
-              </a:rPr>
-              <a:t>⬜  </a:t>
-            </a:r>
-            <a:r>
-              <a:rPr sz="1500" b="1">
-                <a:solidFill>
-                  <a:srgbClr val="0F172A"/>
-                </a:solidFill>
-              </a:rPr>
-              <a:t>Gris foncé</a:t>
-            </a:r>
-            <a:r>
-              <a:rPr sz="1500" b="0">
-                <a:solidFill>
-                  <a:srgbClr val="0F172A"/>
-                </a:solidFill>
-              </a:rPr>
-              <a:t> = jour </a:t>
-            </a:r>
-            <a:r>
-              <a:rPr sz="1500" b="1">
-                <a:solidFill>
-                  <a:srgbClr val="0F172A"/>
-                </a:solidFill>
-              </a:rPr>
-              <a:t>complet</a:t>
-            </a:r>
-            <a:r>
-              <a:rPr sz="1500" b="0">
-                <a:solidFill>
-                  <a:srgbClr val="0F172A"/>
-                </a:solidFill>
-              </a:rPr>
-              <a:t> (deux sites pris).</a:t>
-            </a:r>
-          </a:p>
-          <a:p>
-            <a:pPr algn="l">
-              <a:lnSpc>
-                <a:spcPct val="125000"/>
-              </a:lnSpc>
-              <a:spcAft>
-                <a:spcPts val="800"/>
-              </a:spcAft>
-            </a:pPr>
-            <a:r>
-              <a:rPr sz="1500">
-                <a:solidFill>
-                  <a:srgbClr val="0F172A"/>
-                </a:solidFill>
-              </a:rPr>
-              <a:t>🔵  </a:t>
-            </a:r>
-            <a:r>
-              <a:rPr sz="1500" b="1">
-                <a:solidFill>
-                  <a:srgbClr val="0F172A"/>
-                </a:solidFill>
-              </a:rPr>
-              <a:t>Liseré bleu</a:t>
-            </a:r>
-            <a:r>
-              <a:rPr sz="1500" b="0">
-                <a:solidFill>
-                  <a:srgbClr val="0F172A"/>
-                </a:solidFill>
-              </a:rPr>
-              <a:t> = date encore </a:t>
-            </a:r>
-            <a:r>
-              <a:rPr sz="1500" b="1">
-                <a:solidFill>
-                  <a:srgbClr val="0F172A"/>
-                </a:solidFill>
-              </a:rPr>
-              <a:t>choisissable</a:t>
-            </a:r>
-            <a:r>
-              <a:rPr sz="1500" b="0">
-                <a:solidFill>
-                  <a:srgbClr val="0F172A"/>
-                </a:solidFill>
-              </a:rPr>
-              <a:t> par cette personne.</a:t>
-            </a:r>
-          </a:p>
-          <a:p>
-            <a:pPr algn="l">
-              <a:lnSpc>
-                <a:spcPct val="125000"/>
-              </a:lnSpc>
-              <a:spcAft>
-                <a:spcPts val="800"/>
-              </a:spcAft>
-            </a:pPr>
-            <a:r>
-              <a:rPr sz="1500">
-                <a:solidFill>
-                  <a:srgbClr val="0F172A"/>
-                </a:solidFill>
-              </a:rPr>
-              <a:t>🙈  </a:t>
-            </a:r>
-            <a:r>
-              <a:rPr sz="1500" b="0">
-                <a:solidFill>
-                  <a:srgbClr val="0F172A"/>
-                </a:solidFill>
-              </a:rPr>
-              <a:t>Les vœux / indispos ne sont visibles que par la personne concernée.</a:t>
-            </a:r>
-          </a:p>
-        </p:txBody>
-      </p:sp>
-      <p:sp>
-        <p:nvSpPr>
-          <p:cNvPr id="6" name="Rounded Rectangle 5"/>
+              <a:t>Le Planning est en lecture seule</a:t>
+            </a:r>
+          </a:p>
+        </p:txBody>
+      </p:sp>
+      <p:sp>
+        <p:nvSpPr>
+          <p:cNvPr id="4" name="Rounded Rectangle 3"/>
           <p:cNvSpPr/>
           <p:nvPr/>
         </p:nvSpPr>
         <p:spPr>
           <a:xfrm>
-            <a:off x="640080" y="5257800"/>
-            <a:ext cx="6309360" cy="914400"/>
+            <a:off x="640080" y="2011680"/>
+            <a:ext cx="10789920" cy="914400"/>
           </a:xfrm>
           <a:prstGeom prst="roundRect">
             <a:avLst/>
           </a:prstGeom>
           <a:solidFill>
-            <a:srgbClr val="F0FDF4"/>
+            <a:srgbClr val="EFF6FF"/>
           </a:solidFill>
           <a:ln w="12700">
             <a:solidFill>
-              <a:srgbClr val="BBF7D0"/>
+              <a:srgbClr val="BFDBFE"/>
             </a:solidFill>
           </a:ln>
           <a:effectLst/>
@@ -9812,446 +10920,42 @@
               </a:spcAft>
             </a:pPr>
             <a:r>
-              <a:rPr sz="1400" b="0">
-                <a:solidFill>
-                  <a:srgbClr val="166534"/>
-                </a:solidFill>
-              </a:rPr>
-              <a:t>💡 Pour suivre </a:t>
-            </a:r>
-            <a:r>
-              <a:rPr sz="1400" b="1">
-                <a:solidFill>
-                  <a:srgbClr val="166534"/>
-                </a:solidFill>
-              </a:rPr>
-              <a:t>ses propres gardes</a:t>
-            </a:r>
-            <a:r>
-              <a:rPr sz="1400" b="0">
-                <a:solidFill>
-                  <a:srgbClr val="166534"/>
-                </a:solidFill>
-              </a:rPr>
-              <a:t>, ouvrir l'onglet </a:t>
-            </a:r>
-            <a:r>
-              <a:rPr sz="1400" b="1">
-                <a:solidFill>
-                  <a:srgbClr val="166534"/>
+              <a:rPr sz="1500" b="0">
+                <a:solidFill>
+                  <a:srgbClr val="1E3A8A"/>
+                </a:solidFill>
+              </a:rPr>
+              <a:t>👁 Lecture seule — seul l'admin modifie le planning. Tu vois les changements en temps réel ; tu peux toujours ajuster tes indispos &amp; vœux dans l'onglet </a:t>
+            </a:r>
+            <a:r>
+              <a:rPr sz="1500" b="1">
+                <a:solidFill>
+                  <a:srgbClr val="1E3A8A"/>
                 </a:solidFill>
               </a:rPr>
               <a:t>Perso</a:t>
             </a:r>
             <a:r>
-              <a:rPr sz="1400" b="0">
-                <a:solidFill>
-                  <a:srgbClr val="166534"/>
-                </a:solidFill>
-              </a:rPr>
-              <a:t> : le calendrier y reste centré sur soi.</a:t>
-            </a:r>
-          </a:p>
-        </p:txBody>
-      </p:sp>
-      <p:sp>
-        <p:nvSpPr>
-          <p:cNvPr id="7" name="Rounded Rectangle 6"/>
-          <p:cNvSpPr/>
-          <p:nvPr/>
-        </p:nvSpPr>
-        <p:spPr>
-          <a:xfrm>
-            <a:off x="7498079" y="2377440"/>
-            <a:ext cx="914400" cy="1051560"/>
-          </a:xfrm>
-          <a:prstGeom prst="roundRect">
-            <a:avLst/>
-          </a:prstGeom>
-          <a:solidFill>
-            <a:srgbClr val="DCFCE7"/>
-          </a:solidFill>
-          <a:ln w="25400">
-            <a:solidFill>
-              <a:srgbClr val="16A34A"/>
-            </a:solidFill>
-          </a:ln>
-          <a:effectLst/>
-        </p:spPr>
-        <p:style>
-          <a:lnRef idx="1">
-            <a:schemeClr val="accent1"/>
-          </a:lnRef>
-          <a:fillRef idx="3">
-            <a:schemeClr val="accent1"/>
-          </a:fillRef>
-          <a:effectRef idx="2">
-            <a:schemeClr val="accent1"/>
-          </a:effectRef>
-          <a:fontRef idx="minor">
-            <a:schemeClr val="lt1"/>
-          </a:fontRef>
-        </p:style>
-        <p:txBody>
-          <a:bodyPr rtlCol="0" anchor="ctr" wrap="none" lIns="45720" rIns="45720" tIns="36576" bIns="18288"/>
-          <a:lstStyle/>
-          <a:p>
-            <a:pPr algn="ctr">
-              <a:lnSpc>
-                <a:spcPct val="120000"/>
-              </a:lnSpc>
-              <a:spcAft>
-                <a:spcPts val="200"/>
-              </a:spcAft>
-            </a:pPr>
-            <a:r>
-              <a:rPr sz="1500" b="1">
-                <a:solidFill>
-                  <a:srgbClr val="0F172A"/>
-                </a:solidFill>
-              </a:rPr>
-              <a:t>3</a:t>
-            </a:r>
-          </a:p>
-          <a:p>
-            <a:pPr algn="l">
-              <a:lnSpc>
-                <a:spcPct val="120000"/>
-              </a:lnSpc>
-              <a:spcAft>
-                <a:spcPts val="100"/>
-              </a:spcAft>
-            </a:pPr>
-            <a:r>
-              <a:rPr sz="1100" b="1">
-                <a:solidFill>
-                  <a:srgbClr val="166534"/>
-                </a:solidFill>
-              </a:rPr>
-              <a:t>HMN</a:t>
-            </a:r>
-          </a:p>
-          <a:p>
-            <a:pPr algn="l">
-              <a:lnSpc>
-                <a:spcPct val="120000"/>
-              </a:lnSpc>
-              <a:spcAft>
-                <a:spcPts val="0"/>
-              </a:spcAft>
-            </a:pPr>
-            <a:r>
-              <a:rPr sz="1100" b="0">
-                <a:solidFill>
-                  <a:srgbClr val="64748B"/>
-                </a:solidFill>
-              </a:rPr>
-              <a:t>ACH</a:t>
-            </a:r>
-          </a:p>
-        </p:txBody>
-      </p:sp>
-      <p:sp>
-        <p:nvSpPr>
-          <p:cNvPr id="8" name="Rounded Rectangle 7"/>
-          <p:cNvSpPr/>
-          <p:nvPr/>
-        </p:nvSpPr>
-        <p:spPr>
-          <a:xfrm>
-            <a:off x="8458200" y="2377440"/>
-            <a:ext cx="914400" cy="1051560"/>
-          </a:xfrm>
-          <a:prstGeom prst="roundRect">
-            <a:avLst/>
-          </a:prstGeom>
-          <a:solidFill>
-            <a:srgbClr val="DDE3EB"/>
-          </a:solidFill>
-          <a:ln w="12700">
-            <a:solidFill>
-              <a:srgbClr val="E2E8F0"/>
-            </a:solidFill>
-          </a:ln>
-          <a:effectLst/>
-        </p:spPr>
-        <p:style>
-          <a:lnRef idx="1">
-            <a:schemeClr val="accent1"/>
-          </a:lnRef>
-          <a:fillRef idx="3">
-            <a:schemeClr val="accent1"/>
-          </a:fillRef>
-          <a:effectRef idx="2">
-            <a:schemeClr val="accent1"/>
-          </a:effectRef>
-          <a:fontRef idx="minor">
-            <a:schemeClr val="lt1"/>
-          </a:fontRef>
-        </p:style>
-        <p:txBody>
-          <a:bodyPr rtlCol="0" anchor="ctr" wrap="none" lIns="45720" rIns="45720" tIns="36576" bIns="18288"/>
-          <a:lstStyle/>
-          <a:p>
-            <a:pPr algn="ctr">
-              <a:lnSpc>
-                <a:spcPct val="120000"/>
-              </a:lnSpc>
-              <a:spcAft>
-                <a:spcPts val="200"/>
-              </a:spcAft>
-            </a:pPr>
-            <a:r>
-              <a:rPr sz="1500" b="1">
-                <a:solidFill>
-                  <a:srgbClr val="0F172A"/>
-                </a:solidFill>
-              </a:rPr>
-              <a:t>4</a:t>
-            </a:r>
-          </a:p>
-          <a:p>
-            <a:pPr algn="l">
-              <a:lnSpc>
-                <a:spcPct val="120000"/>
-              </a:lnSpc>
-              <a:spcAft>
-                <a:spcPts val="100"/>
-              </a:spcAft>
-            </a:pPr>
-            <a:r>
-              <a:rPr sz="1100" b="1">
-                <a:solidFill>
-                  <a:srgbClr val="475569"/>
-                </a:solidFill>
-              </a:rPr>
-              <a:t>HMN</a:t>
-            </a:r>
-          </a:p>
-          <a:p>
-            <a:pPr algn="l">
-              <a:lnSpc>
-                <a:spcPct val="120000"/>
-              </a:lnSpc>
-              <a:spcAft>
-                <a:spcPts val="0"/>
-              </a:spcAft>
-            </a:pPr>
-            <a:r>
-              <a:rPr sz="1100" b="1">
-                <a:solidFill>
-                  <a:srgbClr val="475569"/>
-                </a:solidFill>
-              </a:rPr>
-              <a:t>ACH</a:t>
-            </a:r>
-          </a:p>
-        </p:txBody>
-      </p:sp>
-      <p:sp>
-        <p:nvSpPr>
-          <p:cNvPr id="9" name="Rounded Rectangle 8"/>
-          <p:cNvSpPr/>
-          <p:nvPr/>
-        </p:nvSpPr>
-        <p:spPr>
-          <a:xfrm>
-            <a:off x="9418319" y="2377440"/>
-            <a:ext cx="914400" cy="1051560"/>
-          </a:xfrm>
-          <a:prstGeom prst="roundRect">
-            <a:avLst/>
-          </a:prstGeom>
-          <a:solidFill>
-            <a:srgbClr val="EFF6FF"/>
-          </a:solidFill>
-          <a:ln w="25400">
-            <a:solidFill>
-              <a:srgbClr val="2563EB"/>
-            </a:solidFill>
-          </a:ln>
-          <a:effectLst/>
-        </p:spPr>
-        <p:style>
-          <a:lnRef idx="1">
-            <a:schemeClr val="accent1"/>
-          </a:lnRef>
-          <a:fillRef idx="3">
-            <a:schemeClr val="accent1"/>
-          </a:fillRef>
-          <a:effectRef idx="2">
-            <a:schemeClr val="accent1"/>
-          </a:effectRef>
-          <a:fontRef idx="minor">
-            <a:schemeClr val="lt1"/>
-          </a:fontRef>
-        </p:style>
-        <p:txBody>
-          <a:bodyPr rtlCol="0" anchor="ctr" wrap="none" lIns="45720" rIns="45720" tIns="36576" bIns="18288"/>
-          <a:lstStyle/>
-          <a:p>
-            <a:pPr algn="ctr">
-              <a:lnSpc>
-                <a:spcPct val="120000"/>
-              </a:lnSpc>
-              <a:spcAft>
-                <a:spcPts val="200"/>
-              </a:spcAft>
-            </a:pPr>
-            <a:r>
-              <a:rPr sz="1500" b="1">
-                <a:solidFill>
-                  <a:srgbClr val="0F172A"/>
-                </a:solidFill>
-              </a:rPr>
-              <a:t>5</a:t>
-            </a:r>
-          </a:p>
-          <a:p>
-            <a:pPr algn="l">
-              <a:lnSpc>
-                <a:spcPct val="120000"/>
-              </a:lnSpc>
-              <a:spcAft>
-                <a:spcPts val="100"/>
-              </a:spcAft>
-            </a:pPr>
-            <a:r>
-              <a:rPr sz="1100" b="1">
-                <a:solidFill>
-                  <a:srgbClr val="1D4ED8"/>
-                </a:solidFill>
-              </a:rPr>
-              <a:t>HMN</a:t>
-            </a:r>
-          </a:p>
-          <a:p>
-            <a:pPr algn="l">
-              <a:lnSpc>
-                <a:spcPct val="120000"/>
-              </a:lnSpc>
-              <a:spcAft>
-                <a:spcPts val="0"/>
-              </a:spcAft>
-            </a:pPr>
-            <a:r>
-              <a:rPr sz="1100" b="1">
-                <a:solidFill>
-                  <a:srgbClr val="1D4ED8"/>
-                </a:solidFill>
-              </a:rPr>
-              <a:t>ACH</a:t>
-            </a:r>
-          </a:p>
-        </p:txBody>
-      </p:sp>
-      <p:sp>
-        <p:nvSpPr>
-          <p:cNvPr id="10" name="Rounded Rectangle 9"/>
-          <p:cNvSpPr/>
-          <p:nvPr/>
-        </p:nvSpPr>
-        <p:spPr>
-          <a:xfrm>
-            <a:off x="10378440" y="2377440"/>
-            <a:ext cx="914400" cy="1051560"/>
-          </a:xfrm>
-          <a:prstGeom prst="roundRect">
-            <a:avLst/>
-          </a:prstGeom>
-          <a:solidFill>
-            <a:srgbClr val="F8FAFC"/>
-          </a:solidFill>
-          <a:ln w="12700">
-            <a:solidFill>
-              <a:srgbClr val="E2E8F0"/>
-            </a:solidFill>
-          </a:ln>
-          <a:effectLst/>
-        </p:spPr>
-        <p:style>
-          <a:lnRef idx="1">
-            <a:schemeClr val="accent1"/>
-          </a:lnRef>
-          <a:fillRef idx="3">
-            <a:schemeClr val="accent1"/>
-          </a:fillRef>
-          <a:effectRef idx="2">
-            <a:schemeClr val="accent1"/>
-          </a:effectRef>
-          <a:fontRef idx="minor">
-            <a:schemeClr val="lt1"/>
-          </a:fontRef>
-        </p:style>
-        <p:txBody>
-          <a:bodyPr rtlCol="0" anchor="ctr" wrap="none" lIns="45720" rIns="45720" tIns="36576" bIns="18288"/>
-          <a:lstStyle/>
-          <a:p>
-            <a:pPr algn="ctr">
-              <a:lnSpc>
-                <a:spcPct val="120000"/>
-              </a:lnSpc>
-              <a:spcAft>
-                <a:spcPts val="200"/>
-              </a:spcAft>
-            </a:pPr>
-            <a:r>
-              <a:rPr sz="1500" b="1">
-                <a:solidFill>
-                  <a:srgbClr val="0F172A"/>
-                </a:solidFill>
-              </a:rPr>
-              <a:t>6</a:t>
-            </a:r>
-          </a:p>
-          <a:p>
-            <a:pPr algn="l">
-              <a:lnSpc>
-                <a:spcPct val="120000"/>
-              </a:lnSpc>
-              <a:spcAft>
-                <a:spcPts val="100"/>
-              </a:spcAft>
-            </a:pPr>
-            <a:r>
-              <a:rPr sz="1100" b="0">
-                <a:solidFill>
-                  <a:srgbClr val="64748B"/>
-                </a:solidFill>
-              </a:rPr>
-              <a:t>HMN</a:t>
-            </a:r>
-          </a:p>
-          <a:p>
-            <a:pPr algn="l">
-              <a:lnSpc>
-                <a:spcPct val="120000"/>
-              </a:lnSpc>
-              <a:spcAft>
-                <a:spcPts val="0"/>
-              </a:spcAft>
-            </a:pPr>
-            <a:r>
-              <a:rPr sz="1100" b="0">
-                <a:solidFill>
-                  <a:srgbClr val="64748B"/>
-                </a:solidFill>
-              </a:rPr>
-              <a:t>ACH</a:t>
-            </a:r>
-          </a:p>
-        </p:txBody>
-      </p:sp>
-      <p:sp>
-        <p:nvSpPr>
-          <p:cNvPr id="11" name="TextBox 10"/>
+              <a:rPr sz="1500" b="0">
+                <a:solidFill>
+                  <a:srgbClr val="1E3A8A"/>
+                </a:solidFill>
+              </a:rPr>
+              <a:t>.</a:t>
+            </a:r>
+          </a:p>
+        </p:txBody>
+      </p:sp>
+      <p:sp>
+        <p:nvSpPr>
+          <p:cNvPr id="5" name="TextBox 4"/>
           <p:cNvSpPr txBox="1"/>
           <p:nvPr/>
         </p:nvSpPr>
         <p:spPr>
           <a:xfrm>
-            <a:off x="7315199" y="3566160"/>
-            <a:ext cx="4114800" cy="822960"/>
+            <a:off x="640080" y="2971800"/>
+            <a:ext cx="10789920" cy="320040"/>
           </a:xfrm>
           <a:prstGeom prst="rect">
             <a:avLst/>
@@ -10264,9 +10968,9 @@
           </a:bodyPr>
           <a:lstStyle/>
           <a:p>
-            <a:pPr algn="ctr">
-              <a:lnSpc>
-                <a:spcPct val="130000"/>
+            <a:pPr algn="l">
+              <a:lnSpc>
+                <a:spcPct val="120000"/>
               </a:lnSpc>
               <a:spcAft>
                 <a:spcPts val="0"/>
@@ -10275,10 +10979,159 @@
             <a:r>
               <a:rPr sz="1200" b="0">
                 <a:solidFill>
-                  <a:srgbClr val="64748B"/>
-                </a:solidFill>
-              </a:rPr>
-              <a:t>Vert = garde de la personne qui choisit · jour complet · date choisissable · jour libre</a:t>
+                  <a:srgbClr val="94A3B8"/>
+                </a:solidFill>
+              </a:rPr>
+              <a:t>↑ texte exact affiché dans l'application</a:t>
+            </a:r>
+          </a:p>
+        </p:txBody>
+      </p:sp>
+      <p:sp>
+        <p:nvSpPr>
+          <p:cNvPr id="6" name="TextBox 5"/>
+          <p:cNvSpPr txBox="1"/>
+          <p:nvPr/>
+        </p:nvSpPr>
+        <p:spPr>
+          <a:xfrm>
+            <a:off x="640080" y="3474720"/>
+            <a:ext cx="10789920" cy="4572000"/>
+          </a:xfrm>
+          <a:prstGeom prst="rect">
+            <a:avLst/>
+          </a:prstGeom>
+          <a:noFill/>
+        </p:spPr>
+        <p:txBody>
+          <a:bodyPr wrap="square" anchor="t">
+            <a:spAutoFit/>
+          </a:bodyPr>
+          <a:lstStyle/>
+          <a:p>
+            <a:pPr algn="l">
+              <a:lnSpc>
+                <a:spcPct val="125000"/>
+              </a:lnSpc>
+              <a:spcAft>
+                <a:spcPts val="1400"/>
+              </a:spcAft>
+            </a:pPr>
+            <a:r>
+              <a:rPr sz="1800">
+                <a:solidFill>
+                  <a:srgbClr val="0F172A"/>
+                </a:solidFill>
+              </a:rPr>
+              <a:t>👀  </a:t>
+            </a:r>
+            <a:r>
+              <a:rPr sz="1800" b="0">
+                <a:solidFill>
+                  <a:srgbClr val="0F172A"/>
+                </a:solidFill>
+              </a:rPr>
+              <a:t>Le planning se </a:t>
+            </a:r>
+            <a:r>
+              <a:rPr sz="1800" b="1">
+                <a:solidFill>
+                  <a:srgbClr val="0F172A"/>
+                </a:solidFill>
+              </a:rPr>
+              <a:t>consulte</a:t>
+            </a:r>
+            <a:r>
+              <a:rPr sz="1800" b="0">
+                <a:solidFill>
+                  <a:srgbClr val="0F172A"/>
+                </a:solidFill>
+              </a:rPr>
+              <a:t> sans possibilité de le modifier.</a:t>
+            </a:r>
+          </a:p>
+          <a:p>
+            <a:pPr algn="l">
+              <a:lnSpc>
+                <a:spcPct val="125000"/>
+              </a:lnSpc>
+              <a:spcAft>
+                <a:spcPts val="1400"/>
+              </a:spcAft>
+            </a:pPr>
+            <a:r>
+              <a:rPr sz="1800">
+                <a:solidFill>
+                  <a:srgbClr val="0F172A"/>
+                </a:solidFill>
+              </a:rPr>
+              <a:t>⚡  </a:t>
+            </a:r>
+            <a:r>
+              <a:rPr sz="1800" b="0">
+                <a:solidFill>
+                  <a:srgbClr val="0F172A"/>
+                </a:solidFill>
+              </a:rPr>
+              <a:t>Chaque garde posée par l'admin </a:t>
+            </a:r>
+            <a:r>
+              <a:rPr sz="1800" b="1">
+                <a:solidFill>
+                  <a:srgbClr val="0F172A"/>
+                </a:solidFill>
+              </a:rPr>
+              <a:t>apparaît instantanément</a:t>
+            </a:r>
+            <a:r>
+              <a:rPr sz="1800" b="0">
+                <a:solidFill>
+                  <a:srgbClr val="0F172A"/>
+                </a:solidFill>
+              </a:rPr>
+              <a:t>.</a:t>
+            </a:r>
+          </a:p>
+          <a:p>
+            <a:pPr algn="l">
+              <a:lnSpc>
+                <a:spcPct val="125000"/>
+              </a:lnSpc>
+              <a:spcAft>
+                <a:spcPts val="1400"/>
+              </a:spcAft>
+            </a:pPr>
+            <a:r>
+              <a:rPr sz="1800">
+                <a:solidFill>
+                  <a:srgbClr val="0F172A"/>
+                </a:solidFill>
+              </a:rPr>
+              <a:t>✍️  </a:t>
+            </a:r>
+            <a:r>
+              <a:rPr sz="1800" b="0">
+                <a:solidFill>
+                  <a:srgbClr val="0F172A"/>
+                </a:solidFill>
+              </a:rPr>
+              <a:t>Seul l'onglet </a:t>
+            </a:r>
+            <a:r>
+              <a:rPr sz="1800" b="1">
+                <a:solidFill>
+                  <a:srgbClr val="0F172A"/>
+                </a:solidFill>
+              </a:rPr>
+              <a:t>Perso</a:t>
+            </a:r>
+            <a:r>
+              <a:rPr sz="1800" b="0">
+                <a:solidFill>
+                  <a:srgbClr val="0F172A"/>
+                </a:solidFill>
+              </a:rPr>
+              <a:t> reste modifiable (indispos &amp; vœux), à tout moment.</a:t>
             </a:r>
           </a:p>
         </p:txBody>
